--- a/docs/demo/carp-panel-brief.pptx
+++ b/docs/demo/carp-panel-brief.pptx
@@ -10,12 +10,13 @@
     <p:sldId id="258" r:id="rId4"/>
     <p:sldId id="259" r:id="rId5"/>
     <p:sldId id="260" r:id="rId6"/>
+    <p:sldId id="261" r:id="rId7"/>
   </p:sldIdLst>
   <p:notesMasterIdLst>
-    <p:notesMasterId r:id="rId7"/>
+    <p:notesMasterId r:id="rId8"/>
   </p:notesMasterIdLst>
-  <p:sldSz cx="9144000" cy="5143500"/>
-  <p:notesSz cx="5143500" cy="9144000"/>
+  <p:sldSz cx="12192000" cy="6858000"/>
+  <p:notesSz cx="6858000" cy="12192000"/>
   <p:defaultTextStyle>
     <a:lvl1pPr marL="0" algn="l" defTabSz="914400" rtl="0" eaLnBrk="1" latinLnBrk="0" hangingPunct="1">
       <a:defRPr sz="1800" kern="1200">
@@ -882,6 +883,94 @@
             <a:fld id="{F7021451-1387-4CA6-816F-3879F97B5CBC}" type="slidenum">
               <a:rPr lang="en-US"/>
               <a:t>5</a:t>
+            </a:fld>
+            <a:endParaRPr lang="en-US"/>
+          </a:p>
+        </p:txBody>
+      </p:sp>
+    </p:spTree>
+    <p:extLst>
+      <p:ext uri="{BB962C8B-B14F-4D97-AF65-F5344CB8AC3E}">
+        <p14:creationId xmlns:p14="http://schemas.microsoft.com/office/powerpoint/2010/main" val="1024086991"/>
+      </p:ext>
+    </p:extLst>
+  </p:cSld>
+  <p:clrMapOvr>
+    <a:masterClrMapping/>
+  </p:clrMapOvr>
+</p:notes>
+</file>
+
+<file path=ppt/notesSlides/notesSlide6.xml><?xml version="1.0" encoding="utf-8"?>
+<p:notes xmlns:a="http://schemas.openxmlformats.org/drawingml/2006/main" xmlns:r="http://schemas.openxmlformats.org/officeDocument/2006/relationships" xmlns:p="http://schemas.openxmlformats.org/presentationml/2006/main">
+  <p:cSld>
+    <p:spTree>
+      <p:nvGrpSpPr>
+        <p:cNvPr id="1" name=""/>
+        <p:cNvGrpSpPr/>
+        <p:nvPr/>
+      </p:nvGrpSpPr>
+      <p:grpSpPr>
+        <a:xfrm>
+          <a:off x="0" y="0"/>
+          <a:ext cx="0" cy="0"/>
+          <a:chOff x="0" y="0"/>
+          <a:chExt cx="0" cy="0"/>
+        </a:xfrm>
+      </p:grpSpPr>
+      <p:sp>
+        <p:nvSpPr>
+          <p:cNvPr id="2" name="Slide Image Placeholder 1"/>
+          <p:cNvSpPr>
+            <a:spLocks noGrp="1" noRot="1" noChangeAspect="1"/>
+          </p:cNvSpPr>
+          <p:nvPr>
+            <p:ph type="sldImg"/>
+          </p:nvPr>
+        </p:nvSpPr>
+        <p:spPr/>
+      </p:sp>
+      <p:sp>
+        <p:nvSpPr>
+          <p:cNvPr id="3" name="Notes Placeholder 2"/>
+          <p:cNvSpPr>
+            <a:spLocks noGrp="1"/>
+          </p:cNvSpPr>
+          <p:nvPr>
+            <p:ph type="body" idx="1"/>
+          </p:nvPr>
+        </p:nvSpPr>
+        <p:spPr/>
+        <p:txBody>
+          <a:bodyPr/>
+          <a:lstStyle/>
+          <a:p>
+            <a:r>
+              <a:rPr lang="en-US" dirty="0"/>
+              <a:t/>
+            </a:r>
+            <a:endParaRPr lang="en-US" dirty="0"/>
+          </a:p>
+        </p:txBody>
+      </p:sp>
+      <p:sp>
+        <p:nvSpPr>
+          <p:cNvPr id="4" name="Slide Number Placeholder 3"/>
+          <p:cNvSpPr>
+            <a:spLocks noGrp="1"/>
+          </p:cNvSpPr>
+          <p:nvPr>
+            <p:ph type="sldNum" sz="quarter" idx="10"/>
+          </p:nvPr>
+        </p:nvSpPr>
+        <p:spPr/>
+        <p:txBody>
+          <a:bodyPr/>
+          <a:lstStyle/>
+          <a:p>
+            <a:fld id="{F7021451-1387-4CA6-816F-3879F97B5CBC}" type="slidenum">
+              <a:rPr lang="en-US"/>
+              <a:t>6</a:t>
             </a:fld>
             <a:endParaRPr lang="en-US"/>
           </a:p>
@@ -1224,30 +1313,1495 @@
           <a:chExt cx="0" cy="0"/>
         </a:xfrm>
       </p:grpSpPr>
-      <p:pic>
-        <p:nvPicPr>
-          <p:cNvPr id="2" name="Image 0" descr="C:\Accumulate_Stuff\certen\independant_validator\docs\demo\slides\carp-panel-brief-1.jpg">    </p:cNvPr>
-          <p:cNvPicPr>
-            <a:picLocks noChangeAspect="1"/>
-          </p:cNvPicPr>
-          <p:nvPr/>
-        </p:nvPicPr>
-        <p:blipFill>
-          <a:blip r:embed="rId1"/>
-          <a:stretch>
-            <a:fillRect/>
-          </a:stretch>
-        </p:blipFill>
-        <p:spPr>
-          <a:xfrm>
-            <a:off x="0" y="0"/>
-            <a:ext cx="12191695" cy="6858000"/>
-          </a:xfrm>
-          <a:prstGeom prst="rect">
-            <a:avLst/>
-          </a:prstGeom>
-        </p:spPr>
-      </p:pic>
+      <p:sp>
+        <p:nvSpPr>
+          <p:cNvPr id="2" name="Shape 0"/>
+          <p:cNvSpPr/>
+          <p:nvPr/>
+        </p:nvSpPr>
+        <p:spPr>
+          <a:xfrm>
+            <a:off x="0" y="6766560"/>
+            <a:ext cx="12191695" cy="91440"/>
+          </a:xfrm>
+          <a:prstGeom prst="rect">
+            <a:avLst/>
+          </a:prstGeom>
+          <a:solidFill>
+            <a:srgbClr val="1A56DB"/>
+          </a:solidFill>
+          <a:ln w="12700">
+            <a:solidFill>
+              <a:srgbClr val="333333"/>
+            </a:solidFill>
+            <a:prstDash val="solid"/>
+          </a:ln>
+        </p:spPr>
+      </p:sp>
+      <p:sp>
+        <p:nvSpPr>
+          <p:cNvPr id="3" name="Text 1"/>
+          <p:cNvSpPr/>
+          <p:nvPr/>
+        </p:nvSpPr>
+        <p:spPr>
+          <a:xfrm>
+            <a:off x="566928" y="402336"/>
+            <a:ext cx="11057839" cy="201168"/>
+          </a:xfrm>
+          <a:prstGeom prst="rect">
+            <a:avLst/>
+          </a:prstGeom>
+          <a:noFill/>
+          <a:ln/>
+        </p:spPr>
+        <p:txBody>
+          <a:bodyPr wrap="square" lIns="0" tIns="0" rIns="0" bIns="0" rtlCol="0" anchor="t"/>
+          <a:lstStyle/>
+          <a:p>
+            <a:pPr algn="l" indent="0" marL="0">
+              <a:buNone/>
+            </a:pPr>
+            <a:r>
+              <a:rPr lang="en-US" sz="900" b="1" spc="160" kern="0" dirty="0">
+                <a:solidFill>
+                  <a:srgbClr val="1A56DB"/>
+                </a:solidFill>
+                <a:latin typeface="Segoe UI" pitchFamily="34" charset="0"/>
+                <a:ea typeface="Segoe UI" pitchFamily="34" charset="-122"/>
+                <a:cs typeface="Segoe UI" pitchFamily="34" charset="-120"/>
+              </a:rPr>
+              <a:t>THE WHOLE PICTURE</a:t>
+            </a:r>
+            <a:endParaRPr lang="en-US" sz="900" dirty="0"/>
+          </a:p>
+        </p:txBody>
+      </p:sp>
+      <p:sp>
+        <p:nvSpPr>
+          <p:cNvPr id="4" name="Text 2"/>
+          <p:cNvSpPr/>
+          <p:nvPr/>
+        </p:nvSpPr>
+        <p:spPr>
+          <a:xfrm>
+            <a:off x="566928" y="640080"/>
+            <a:ext cx="11057839" cy="420624"/>
+          </a:xfrm>
+          <a:prstGeom prst="rect">
+            <a:avLst/>
+          </a:prstGeom>
+          <a:noFill/>
+          <a:ln/>
+        </p:spPr>
+        <p:txBody>
+          <a:bodyPr wrap="square" lIns="0" tIns="0" rIns="0" bIns="0" rtlCol="0" anchor="t"/>
+          <a:lstStyle/>
+          <a:p>
+            <a:pPr algn="l" indent="0" marL="0">
+              <a:buNone/>
+            </a:pPr>
+            <a:r>
+              <a:rPr lang="en-US" sz="2300" b="1" dirty="0">
+                <a:solidFill>
+                  <a:srgbClr val="12161F"/>
+                </a:solidFill>
+                <a:latin typeface="Segoe UI" pitchFamily="34" charset="0"/>
+                <a:ea typeface="Segoe UI" pitchFamily="34" charset="-122"/>
+                <a:cs typeface="Segoe UI" pitchFamily="34" charset="-120"/>
+              </a:rPr>
+              <a:t>Four systems, one escrow</a:t>
+            </a:r>
+            <a:endParaRPr lang="en-US" sz="2300" dirty="0"/>
+          </a:p>
+        </p:txBody>
+      </p:sp>
+      <p:sp>
+        <p:nvSpPr>
+          <p:cNvPr id="5" name="Shape 3"/>
+          <p:cNvSpPr/>
+          <p:nvPr/>
+        </p:nvSpPr>
+        <p:spPr>
+          <a:xfrm>
+            <a:off x="566928" y="1463040"/>
+            <a:ext cx="45720" cy="1335024"/>
+          </a:xfrm>
+          <a:prstGeom prst="rect">
+            <a:avLst/>
+          </a:prstGeom>
+          <a:solidFill>
+            <a:srgbClr val="157F4A"/>
+          </a:solidFill>
+          <a:ln w="12700">
+            <a:solidFill>
+              <a:srgbClr val="333333"/>
+            </a:solidFill>
+            <a:prstDash val="solid"/>
+          </a:ln>
+        </p:spPr>
+      </p:sp>
+      <p:sp>
+        <p:nvSpPr>
+          <p:cNvPr id="6" name="Text 4"/>
+          <p:cNvSpPr/>
+          <p:nvPr/>
+        </p:nvSpPr>
+        <p:spPr>
+          <a:xfrm>
+            <a:off x="713232" y="1737360"/>
+            <a:ext cx="1078992" cy="274320"/>
+          </a:xfrm>
+          <a:prstGeom prst="rect">
+            <a:avLst/>
+          </a:prstGeom>
+          <a:noFill/>
+          <a:ln/>
+        </p:spPr>
+        <p:txBody>
+          <a:bodyPr wrap="square" lIns="0" tIns="0" rIns="0" bIns="0" rtlCol="0" anchor="t"/>
+          <a:lstStyle/>
+          <a:p>
+            <a:pPr algn="l" indent="0" marL="0">
+              <a:buNone/>
+            </a:pPr>
+            <a:r>
+              <a:rPr lang="en-US" sz="1100" b="1" spc="140" kern="0" dirty="0">
+                <a:solidFill>
+                  <a:srgbClr val="157F4A"/>
+                </a:solidFill>
+                <a:latin typeface="Segoe UI" pitchFamily="34" charset="0"/>
+                <a:ea typeface="Segoe UI" pitchFamily="34" charset="-122"/>
+                <a:cs typeface="Segoe UI" pitchFamily="34" charset="-120"/>
+              </a:rPr>
+              <a:t>YOURS</a:t>
+            </a:r>
+            <a:endParaRPr lang="en-US" sz="1100" dirty="0"/>
+          </a:p>
+        </p:txBody>
+      </p:sp>
+      <p:sp>
+        <p:nvSpPr>
+          <p:cNvPr id="7" name="Text 5"/>
+          <p:cNvSpPr/>
+          <p:nvPr/>
+        </p:nvSpPr>
+        <p:spPr>
+          <a:xfrm>
+            <a:off x="713232" y="2029968"/>
+            <a:ext cx="1078992" cy="402336"/>
+          </a:xfrm>
+          <a:prstGeom prst="rect">
+            <a:avLst/>
+          </a:prstGeom>
+          <a:noFill/>
+          <a:ln/>
+        </p:spPr>
+        <p:txBody>
+          <a:bodyPr wrap="square" lIns="0" tIns="0" rIns="0" bIns="0" rtlCol="0" anchor="t"/>
+          <a:lstStyle/>
+          <a:p>
+            <a:pPr algn="l" indent="0" marL="0">
+              <a:buNone/>
+            </a:pPr>
+            <a:r>
+              <a:rPr lang="en-US" sz="1000" dirty="0">
+                <a:solidFill>
+                  <a:srgbClr val="5B6472"/>
+                </a:solidFill>
+                <a:latin typeface="Segoe UI" pitchFamily="34" charset="0"/>
+                <a:ea typeface="Segoe UI" pitchFamily="34" charset="-122"/>
+                <a:cs typeface="Segoe UI" pitchFamily="34" charset="-120"/>
+              </a:rPr>
+              <a:t>operator + agents</a:t>
+            </a:r>
+            <a:endParaRPr lang="en-US" sz="1000" dirty="0"/>
+          </a:p>
+        </p:txBody>
+      </p:sp>
+      <p:sp>
+        <p:nvSpPr>
+          <p:cNvPr id="8" name="Shape 6"/>
+          <p:cNvSpPr/>
+          <p:nvPr/>
+        </p:nvSpPr>
+        <p:spPr>
+          <a:xfrm>
+            <a:off x="566928" y="3090672"/>
+            <a:ext cx="45720" cy="1335024"/>
+          </a:xfrm>
+          <a:prstGeom prst="rect">
+            <a:avLst/>
+          </a:prstGeom>
+          <a:solidFill>
+            <a:srgbClr val="1A56DB"/>
+          </a:solidFill>
+          <a:ln w="12700">
+            <a:solidFill>
+              <a:srgbClr val="333333"/>
+            </a:solidFill>
+            <a:prstDash val="solid"/>
+          </a:ln>
+        </p:spPr>
+      </p:sp>
+      <p:sp>
+        <p:nvSpPr>
+          <p:cNvPr id="9" name="Text 7"/>
+          <p:cNvSpPr/>
+          <p:nvPr/>
+        </p:nvSpPr>
+        <p:spPr>
+          <a:xfrm>
+            <a:off x="713232" y="3364992"/>
+            <a:ext cx="1078992" cy="274320"/>
+          </a:xfrm>
+          <a:prstGeom prst="rect">
+            <a:avLst/>
+          </a:prstGeom>
+          <a:noFill/>
+          <a:ln/>
+        </p:spPr>
+        <p:txBody>
+          <a:bodyPr wrap="square" lIns="0" tIns="0" rIns="0" bIns="0" rtlCol="0" anchor="t"/>
+          <a:lstStyle/>
+          <a:p>
+            <a:pPr algn="l" indent="0" marL="0">
+              <a:buNone/>
+            </a:pPr>
+            <a:r>
+              <a:rPr lang="en-US" sz="1100" b="1" spc="140" kern="0" dirty="0">
+                <a:solidFill>
+                  <a:srgbClr val="1A56DB"/>
+                </a:solidFill>
+                <a:latin typeface="Segoe UI" pitchFamily="34" charset="0"/>
+                <a:ea typeface="Segoe UI" pitchFamily="34" charset="-122"/>
+                <a:cs typeface="Segoe UI" pitchFamily="34" charset="-120"/>
+              </a:rPr>
+              <a:t>CERTEN</a:t>
+            </a:r>
+            <a:endParaRPr lang="en-US" sz="1100" dirty="0"/>
+          </a:p>
+        </p:txBody>
+      </p:sp>
+      <p:sp>
+        <p:nvSpPr>
+          <p:cNvPr id="10" name="Text 8"/>
+          <p:cNvSpPr/>
+          <p:nvPr/>
+        </p:nvSpPr>
+        <p:spPr>
+          <a:xfrm>
+            <a:off x="713232" y="3657600"/>
+            <a:ext cx="1078992" cy="402336"/>
+          </a:xfrm>
+          <a:prstGeom prst="rect">
+            <a:avLst/>
+          </a:prstGeom>
+          <a:noFill/>
+          <a:ln/>
+        </p:spPr>
+        <p:txBody>
+          <a:bodyPr wrap="square" lIns="0" tIns="0" rIns="0" bIns="0" rtlCol="0" anchor="t"/>
+          <a:lstStyle/>
+          <a:p>
+            <a:pPr algn="l" indent="0" marL="0">
+              <a:buNone/>
+            </a:pPr>
+            <a:r>
+              <a:rPr lang="en-US" sz="1000" dirty="0">
+                <a:solidFill>
+                  <a:srgbClr val="5B6472"/>
+                </a:solidFill>
+                <a:latin typeface="Segoe UI" pitchFamily="34" charset="0"/>
+                <a:ea typeface="Segoe UI" pitchFamily="34" charset="-122"/>
+                <a:cs typeface="Segoe UI" pitchFamily="34" charset="-120"/>
+              </a:rPr>
+              <a:t>proof + panel</a:t>
+            </a:r>
+            <a:endParaRPr lang="en-US" sz="1000" dirty="0"/>
+          </a:p>
+        </p:txBody>
+      </p:sp>
+      <p:sp>
+        <p:nvSpPr>
+          <p:cNvPr id="11" name="Shape 9"/>
+          <p:cNvSpPr/>
+          <p:nvPr/>
+        </p:nvSpPr>
+        <p:spPr>
+          <a:xfrm>
+            <a:off x="566928" y="4718304"/>
+            <a:ext cx="45720" cy="1335024"/>
+          </a:xfrm>
+          <a:prstGeom prst="rect">
+            <a:avLst/>
+          </a:prstGeom>
+          <a:solidFill>
+            <a:srgbClr val="5B6472"/>
+          </a:solidFill>
+          <a:ln w="12700">
+            <a:solidFill>
+              <a:srgbClr val="333333"/>
+            </a:solidFill>
+            <a:prstDash val="solid"/>
+          </a:ln>
+        </p:spPr>
+      </p:sp>
+      <p:sp>
+        <p:nvSpPr>
+          <p:cNvPr id="12" name="Text 10"/>
+          <p:cNvSpPr/>
+          <p:nvPr/>
+        </p:nvSpPr>
+        <p:spPr>
+          <a:xfrm>
+            <a:off x="713232" y="4992624"/>
+            <a:ext cx="1078992" cy="274320"/>
+          </a:xfrm>
+          <a:prstGeom prst="rect">
+            <a:avLst/>
+          </a:prstGeom>
+          <a:noFill/>
+          <a:ln/>
+        </p:spPr>
+        <p:txBody>
+          <a:bodyPr wrap="square" lIns="0" tIns="0" rIns="0" bIns="0" rtlCol="0" anchor="t"/>
+          <a:lstStyle/>
+          <a:p>
+            <a:pPr algn="l" indent="0" marL="0">
+              <a:buNone/>
+            </a:pPr>
+            <a:r>
+              <a:rPr lang="en-US" sz="1100" b="1" spc="140" kern="0" dirty="0">
+                <a:solidFill>
+                  <a:srgbClr val="5B6472"/>
+                </a:solidFill>
+                <a:latin typeface="Segoe UI" pitchFamily="34" charset="0"/>
+                <a:ea typeface="Segoe UI" pitchFamily="34" charset="-122"/>
+                <a:cs typeface="Segoe UI" pitchFamily="34" charset="-120"/>
+              </a:rPr>
+              <a:t>LEDGERS</a:t>
+            </a:r>
+            <a:endParaRPr lang="en-US" sz="1100" dirty="0"/>
+          </a:p>
+        </p:txBody>
+      </p:sp>
+      <p:sp>
+        <p:nvSpPr>
+          <p:cNvPr id="13" name="Text 11"/>
+          <p:cNvSpPr/>
+          <p:nvPr/>
+        </p:nvSpPr>
+        <p:spPr>
+          <a:xfrm>
+            <a:off x="713232" y="5285232"/>
+            <a:ext cx="1078992" cy="402336"/>
+          </a:xfrm>
+          <a:prstGeom prst="rect">
+            <a:avLst/>
+          </a:prstGeom>
+          <a:noFill/>
+          <a:ln/>
+        </p:spPr>
+        <p:txBody>
+          <a:bodyPr wrap="square" lIns="0" tIns="0" rIns="0" bIns="0" rtlCol="0" anchor="t"/>
+          <a:lstStyle/>
+          <a:p>
+            <a:pPr algn="l" indent="0" marL="0">
+              <a:buNone/>
+            </a:pPr>
+            <a:r>
+              <a:rPr lang="en-US" sz="1000" dirty="0">
+                <a:solidFill>
+                  <a:srgbClr val="5B6472"/>
+                </a:solidFill>
+                <a:latin typeface="Segoe UI" pitchFamily="34" charset="0"/>
+                <a:ea typeface="Segoe UI" pitchFamily="34" charset="-122"/>
+                <a:cs typeface="Segoe UI" pitchFamily="34" charset="-120"/>
+              </a:rPr>
+              <a:t>public record</a:t>
+            </a:r>
+            <a:endParaRPr lang="en-US" sz="1000" dirty="0"/>
+          </a:p>
+        </p:txBody>
+      </p:sp>
+      <p:sp>
+        <p:nvSpPr>
+          <p:cNvPr id="14" name="Shape 12"/>
+          <p:cNvSpPr/>
+          <p:nvPr/>
+        </p:nvSpPr>
+        <p:spPr>
+          <a:xfrm>
+            <a:off x="1847088" y="1463040"/>
+            <a:ext cx="3088538" cy="1335024"/>
+          </a:xfrm>
+          <a:prstGeom prst="roundRect">
+            <a:avLst>
+              <a:gd name="adj" fmla="val 4795"/>
+            </a:avLst>
+          </a:prstGeom>
+          <a:solidFill>
+            <a:srgbClr val="E9F5EE"/>
+          </a:solidFill>
+          <a:ln w="12700">
+            <a:solidFill>
+              <a:srgbClr val="157F4A"/>
+            </a:solidFill>
+            <a:prstDash val="solid"/>
+          </a:ln>
+        </p:spPr>
+      </p:sp>
+      <p:sp>
+        <p:nvSpPr>
+          <p:cNvPr id="15" name="Text 13"/>
+          <p:cNvSpPr/>
+          <p:nvPr/>
+        </p:nvSpPr>
+        <p:spPr>
+          <a:xfrm>
+            <a:off x="2048256" y="1737360"/>
+            <a:ext cx="2686202" cy="329184"/>
+          </a:xfrm>
+          <a:prstGeom prst="rect">
+            <a:avLst/>
+          </a:prstGeom>
+          <a:noFill/>
+          <a:ln/>
+        </p:spPr>
+        <p:txBody>
+          <a:bodyPr wrap="square" lIns="0" tIns="0" rIns="0" bIns="0" rtlCol="0" anchor="t"/>
+          <a:lstStyle/>
+          <a:p>
+            <a:pPr algn="l" indent="0" marL="0">
+              <a:buNone/>
+            </a:pPr>
+            <a:r>
+              <a:rPr lang="en-US" sz="1500" b="1" dirty="0">
+                <a:solidFill>
+                  <a:srgbClr val="157F4A"/>
+                </a:solidFill>
+                <a:latin typeface="Segoe UI" pitchFamily="34" charset="0"/>
+                <a:ea typeface="Segoe UI" pitchFamily="34" charset="-122"/>
+                <a:cs typeface="Segoe UI" pitchFamily="34" charset="-120"/>
+              </a:rPr>
+              <a:t>Bryan</a:t>
+            </a:r>
+            <a:endParaRPr lang="en-US" sz="1500" dirty="0"/>
+          </a:p>
+        </p:txBody>
+      </p:sp>
+      <p:sp>
+        <p:nvSpPr>
+          <p:cNvPr id="16" name="Text 14"/>
+          <p:cNvSpPr/>
+          <p:nvPr/>
+        </p:nvSpPr>
+        <p:spPr>
+          <a:xfrm>
+            <a:off x="2048256" y="2139696"/>
+            <a:ext cx="2686202" cy="402336"/>
+          </a:xfrm>
+          <a:prstGeom prst="rect">
+            <a:avLst/>
+          </a:prstGeom>
+          <a:noFill/>
+          <a:ln/>
+        </p:spPr>
+        <p:txBody>
+          <a:bodyPr wrap="square" lIns="0" tIns="0" rIns="0" bIns="0" rtlCol="0" anchor="t"/>
+          <a:lstStyle/>
+          <a:p>
+            <a:pPr algn="l" indent="0" marL="0">
+              <a:buNone/>
+            </a:pPr>
+            <a:r>
+              <a:rPr lang="en-US" sz="1100" dirty="0">
+                <a:solidFill>
+                  <a:srgbClr val="5B6472"/>
+                </a:solidFill>
+                <a:latin typeface="Segoe UI" pitchFamily="34" charset="0"/>
+                <a:ea typeface="Segoe UI" pitchFamily="34" charset="-122"/>
+                <a:cs typeface="Segoe UI" pitchFamily="34" charset="-120"/>
+              </a:rPr>
+              <a:t>page-1 key, encrypted on his laptop</a:t>
+            </a:r>
+            <a:endParaRPr lang="en-US" sz="1100" dirty="0"/>
+          </a:p>
+        </p:txBody>
+      </p:sp>
+      <p:sp>
+        <p:nvSpPr>
+          <p:cNvPr id="17" name="Shape 15"/>
+          <p:cNvSpPr/>
+          <p:nvPr/>
+        </p:nvSpPr>
+        <p:spPr>
+          <a:xfrm>
+            <a:off x="5191658" y="1463040"/>
+            <a:ext cx="3088538" cy="1335024"/>
+          </a:xfrm>
+          <a:prstGeom prst="roundRect">
+            <a:avLst>
+              <a:gd name="adj" fmla="val 4795"/>
+            </a:avLst>
+          </a:prstGeom>
+          <a:solidFill>
+            <a:srgbClr val="E9F5EE"/>
+          </a:solidFill>
+          <a:ln w="12700">
+            <a:solidFill>
+              <a:srgbClr val="157F4A"/>
+            </a:solidFill>
+            <a:prstDash val="solid"/>
+          </a:ln>
+        </p:spPr>
+      </p:sp>
+      <p:sp>
+        <p:nvSpPr>
+          <p:cNvPr id="18" name="Text 16"/>
+          <p:cNvSpPr/>
+          <p:nvPr/>
+        </p:nvSpPr>
+        <p:spPr>
+          <a:xfrm>
+            <a:off x="5392826" y="1737360"/>
+            <a:ext cx="2686202" cy="329184"/>
+          </a:xfrm>
+          <a:prstGeom prst="rect">
+            <a:avLst/>
+          </a:prstGeom>
+          <a:noFill/>
+          <a:ln/>
+        </p:spPr>
+        <p:txBody>
+          <a:bodyPr wrap="square" lIns="0" tIns="0" rIns="0" bIns="0" rtlCol="0" anchor="t"/>
+          <a:lstStyle/>
+          <a:p>
+            <a:pPr algn="l" indent="0" marL="0">
+              <a:buNone/>
+            </a:pPr>
+            <a:r>
+              <a:rPr lang="en-US" sz="1500" b="1" dirty="0">
+                <a:solidFill>
+                  <a:srgbClr val="157F4A"/>
+                </a:solidFill>
+                <a:latin typeface="Segoe UI" pitchFamily="34" charset="0"/>
+                <a:ea typeface="Segoe UI" pitchFamily="34" charset="-122"/>
+                <a:cs typeface="Segoe UI" pitchFamily="34" charset="-120"/>
+              </a:rPr>
+              <a:t>policy engine + signer</a:t>
+            </a:r>
+            <a:endParaRPr lang="en-US" sz="1500" dirty="0"/>
+          </a:p>
+        </p:txBody>
+      </p:sp>
+      <p:sp>
+        <p:nvSpPr>
+          <p:cNvPr id="19" name="Text 17"/>
+          <p:cNvSpPr/>
+          <p:nvPr/>
+        </p:nvSpPr>
+        <p:spPr>
+          <a:xfrm>
+            <a:off x="5392826" y="2139696"/>
+            <a:ext cx="2686202" cy="402336"/>
+          </a:xfrm>
+          <a:prstGeom prst="rect">
+            <a:avLst/>
+          </a:prstGeom>
+          <a:noFill/>
+          <a:ln/>
+        </p:spPr>
+        <p:txBody>
+          <a:bodyPr wrap="square" lIns="0" tIns="0" rIns="0" bIns="0" rtlCol="0" anchor="t"/>
+          <a:lstStyle/>
+          <a:p>
+            <a:pPr algn="l" indent="0" marL="0">
+              <a:buNone/>
+            </a:pPr>
+            <a:r>
+              <a:rPr lang="en-US" sz="1100" dirty="0">
+                <a:solidFill>
+                  <a:srgbClr val="5B6472"/>
+                </a:solidFill>
+                <a:latin typeface="Segoe UI" pitchFamily="34" charset="0"/>
+                <a:ea typeface="Segoe UI" pitchFamily="34" charset="-122"/>
+                <a:cs typeface="Segoe UI" pitchFamily="34" charset="-120"/>
+              </a:rPr>
+              <a:t>page-2 seat · his infra · his key</a:t>
+            </a:r>
+            <a:endParaRPr lang="en-US" sz="1100" dirty="0"/>
+          </a:p>
+        </p:txBody>
+      </p:sp>
+      <p:sp>
+        <p:nvSpPr>
+          <p:cNvPr id="20" name="Shape 18"/>
+          <p:cNvSpPr/>
+          <p:nvPr/>
+        </p:nvSpPr>
+        <p:spPr>
+          <a:xfrm>
+            <a:off x="8536229" y="1463040"/>
+            <a:ext cx="3088538" cy="1335024"/>
+          </a:xfrm>
+          <a:prstGeom prst="roundRect">
+            <a:avLst>
+              <a:gd name="adj" fmla="val 4795"/>
+            </a:avLst>
+          </a:prstGeom>
+          <a:solidFill>
+            <a:srgbClr val="E9F5EE"/>
+          </a:solidFill>
+          <a:ln w="12700">
+            <a:solidFill>
+              <a:srgbClr val="157F4A"/>
+            </a:solidFill>
+            <a:prstDash val="solid"/>
+          </a:ln>
+        </p:spPr>
+      </p:sp>
+      <p:sp>
+        <p:nvSpPr>
+          <p:cNvPr id="21" name="Text 19"/>
+          <p:cNvSpPr/>
+          <p:nvPr/>
+        </p:nvSpPr>
+        <p:spPr>
+          <a:xfrm>
+            <a:off x="8737397" y="1737360"/>
+            <a:ext cx="2686202" cy="329184"/>
+          </a:xfrm>
+          <a:prstGeom prst="rect">
+            <a:avLst/>
+          </a:prstGeom>
+          <a:noFill/>
+          <a:ln/>
+        </p:spPr>
+        <p:txBody>
+          <a:bodyPr wrap="square" lIns="0" tIns="0" rIns="0" bIns="0" rtlCol="0" anchor="t"/>
+          <a:lstStyle/>
+          <a:p>
+            <a:pPr algn="l" indent="0" marL="0">
+              <a:buNone/>
+            </a:pPr>
+            <a:r>
+              <a:rPr lang="en-US" sz="1500" b="1" dirty="0">
+                <a:solidFill>
+                  <a:srgbClr val="157F4A"/>
+                </a:solidFill>
+                <a:latin typeface="Segoe UI" pitchFamily="34" charset="0"/>
+                <a:ea typeface="Segoe UI" pitchFamily="34" charset="-122"/>
+                <a:cs typeface="Segoe UI" pitchFamily="34" charset="-120"/>
+              </a:rPr>
+              <a:t>CARP agents</a:t>
+            </a:r>
+            <a:endParaRPr lang="en-US" sz="1500" dirty="0"/>
+          </a:p>
+        </p:txBody>
+      </p:sp>
+      <p:sp>
+        <p:nvSpPr>
+          <p:cNvPr id="22" name="Text 20"/>
+          <p:cNvSpPr/>
+          <p:nvPr/>
+        </p:nvSpPr>
+        <p:spPr>
+          <a:xfrm>
+            <a:off x="8737397" y="2139696"/>
+            <a:ext cx="2686202" cy="402336"/>
+          </a:xfrm>
+          <a:prstGeom prst="rect">
+            <a:avLst/>
+          </a:prstGeom>
+          <a:noFill/>
+          <a:ln/>
+        </p:spPr>
+        <p:txBody>
+          <a:bodyPr wrap="square" lIns="0" tIns="0" rIns="0" bIns="0" rtlCol="0" anchor="t"/>
+          <a:lstStyle/>
+          <a:p>
+            <a:pPr algn="l" indent="0" marL="0">
+              <a:buNone/>
+            </a:pPr>
+            <a:r>
+              <a:rPr lang="en-US" sz="1100" dirty="0">
+                <a:solidFill>
+                  <a:srgbClr val="5B6472"/>
+                </a:solidFill>
+                <a:latin typeface="Segoe UI" pitchFamily="34" charset="0"/>
+                <a:ea typeface="Segoe UI" pitchFamily="34" charset="-122"/>
+                <a:cs typeface="Segoe UI" pitchFamily="34" charset="-120"/>
+              </a:rPr>
+              <a:t>DID  →  certen_adi</a:t>
+            </a:r>
+            <a:endParaRPr lang="en-US" sz="1100" dirty="0"/>
+          </a:p>
+        </p:txBody>
+      </p:sp>
+      <p:sp>
+        <p:nvSpPr>
+          <p:cNvPr id="23" name="Shape 21"/>
+          <p:cNvSpPr/>
+          <p:nvPr/>
+        </p:nvSpPr>
+        <p:spPr>
+          <a:xfrm>
+            <a:off x="1847088" y="3090672"/>
+            <a:ext cx="3088538" cy="1335024"/>
+          </a:xfrm>
+          <a:prstGeom prst="roundRect">
+            <a:avLst>
+              <a:gd name="adj" fmla="val 4795"/>
+            </a:avLst>
+          </a:prstGeom>
+          <a:solidFill>
+            <a:srgbClr val="EDF2FD"/>
+          </a:solidFill>
+          <a:ln w="12700">
+            <a:solidFill>
+              <a:srgbClr val="1A56DB"/>
+            </a:solidFill>
+            <a:prstDash val="solid"/>
+          </a:ln>
+        </p:spPr>
+      </p:sp>
+      <p:sp>
+        <p:nvSpPr>
+          <p:cNvPr id="24" name="Text 22"/>
+          <p:cNvSpPr/>
+          <p:nvPr/>
+        </p:nvSpPr>
+        <p:spPr>
+          <a:xfrm>
+            <a:off x="2048256" y="3364992"/>
+            <a:ext cx="2686202" cy="329184"/>
+          </a:xfrm>
+          <a:prstGeom prst="rect">
+            <a:avLst/>
+          </a:prstGeom>
+          <a:noFill/>
+          <a:ln/>
+        </p:spPr>
+        <p:txBody>
+          <a:bodyPr wrap="square" lIns="0" tIns="0" rIns="0" bIns="0" rtlCol="0" anchor="t"/>
+          <a:lstStyle/>
+          <a:p>
+            <a:pPr algn="l" indent="0" marL="0">
+              <a:buNone/>
+            </a:pPr>
+            <a:r>
+              <a:rPr lang="en-US" sz="1500" b="1" dirty="0">
+                <a:solidFill>
+                  <a:srgbClr val="1A56DB"/>
+                </a:solidFill>
+                <a:latin typeface="Segoe UI" pitchFamily="34" charset="0"/>
+                <a:ea typeface="Segoe UI" pitchFamily="34" charset="-122"/>
+                <a:cs typeface="Segoe UI" pitchFamily="34" charset="-120"/>
+              </a:rPr>
+              <a:t>gateway</a:t>
+            </a:r>
+            <a:endParaRPr lang="en-US" sz="1500" dirty="0"/>
+          </a:p>
+        </p:txBody>
+      </p:sp>
+      <p:sp>
+        <p:nvSpPr>
+          <p:cNvPr id="25" name="Text 23"/>
+          <p:cNvSpPr/>
+          <p:nvPr/>
+        </p:nvSpPr>
+        <p:spPr>
+          <a:xfrm>
+            <a:off x="2048256" y="3767328"/>
+            <a:ext cx="2686202" cy="402336"/>
+          </a:xfrm>
+          <a:prstGeom prst="rect">
+            <a:avLst/>
+          </a:prstGeom>
+          <a:noFill/>
+          <a:ln/>
+        </p:spPr>
+        <p:txBody>
+          <a:bodyPr wrap="square" lIns="0" tIns="0" rIns="0" bIns="0" rtlCol="0" anchor="t"/>
+          <a:lstStyle/>
+          <a:p>
+            <a:pPr algn="l" indent="0" marL="0">
+              <a:buNone/>
+            </a:pPr>
+            <a:r>
+              <a:rPr lang="en-US" sz="1100" dirty="0">
+                <a:solidFill>
+                  <a:srgbClr val="5B6472"/>
+                </a:solidFill>
+                <a:latin typeface="Segoe UI" pitchFamily="34" charset="0"/>
+                <a:ea typeface="Segoe UI" pitchFamily="34" charset="-122"/>
+                <a:cs typeface="Segoe UI" pitchFamily="34" charset="-120"/>
+              </a:rPr>
+              <a:t>intent in, proof out</a:t>
+            </a:r>
+            <a:endParaRPr lang="en-US" sz="1100" dirty="0"/>
+          </a:p>
+        </p:txBody>
+      </p:sp>
+      <p:sp>
+        <p:nvSpPr>
+          <p:cNvPr id="26" name="Shape 24"/>
+          <p:cNvSpPr/>
+          <p:nvPr/>
+        </p:nvSpPr>
+        <p:spPr>
+          <a:xfrm>
+            <a:off x="5191658" y="3090672"/>
+            <a:ext cx="3088538" cy="1335024"/>
+          </a:xfrm>
+          <a:prstGeom prst="roundRect">
+            <a:avLst>
+              <a:gd name="adj" fmla="val 4795"/>
+            </a:avLst>
+          </a:prstGeom>
+          <a:solidFill>
+            <a:srgbClr val="EDF2FD"/>
+          </a:solidFill>
+          <a:ln w="12700">
+            <a:solidFill>
+              <a:srgbClr val="1A56DB"/>
+            </a:solidFill>
+            <a:prstDash val="solid"/>
+          </a:ln>
+        </p:spPr>
+      </p:sp>
+      <p:sp>
+        <p:nvSpPr>
+          <p:cNvPr id="27" name="Text 25"/>
+          <p:cNvSpPr/>
+          <p:nvPr/>
+        </p:nvSpPr>
+        <p:spPr>
+          <a:xfrm>
+            <a:off x="5392826" y="3364992"/>
+            <a:ext cx="2686202" cy="329184"/>
+          </a:xfrm>
+          <a:prstGeom prst="rect">
+            <a:avLst/>
+          </a:prstGeom>
+          <a:noFill/>
+          <a:ln/>
+        </p:spPr>
+        <p:txBody>
+          <a:bodyPr wrap="square" lIns="0" tIns="0" rIns="0" bIns="0" rtlCol="0" anchor="t"/>
+          <a:lstStyle/>
+          <a:p>
+            <a:pPr algn="l" indent="0" marL="0">
+              <a:buNone/>
+            </a:pPr>
+            <a:r>
+              <a:rPr lang="en-US" sz="1500" b="1" dirty="0">
+                <a:solidFill>
+                  <a:srgbClr val="1A56DB"/>
+                </a:solidFill>
+                <a:latin typeface="Segoe UI" pitchFamily="34" charset="0"/>
+                <a:ea typeface="Segoe UI" pitchFamily="34" charset="-122"/>
+                <a:cs typeface="Segoe UI" pitchFamily="34" charset="-120"/>
+              </a:rPr>
+              <a:t>validator fleet</a:t>
+            </a:r>
+            <a:endParaRPr lang="en-US" sz="1500" dirty="0"/>
+          </a:p>
+        </p:txBody>
+      </p:sp>
+      <p:sp>
+        <p:nvSpPr>
+          <p:cNvPr id="28" name="Text 26"/>
+          <p:cNvSpPr/>
+          <p:nvPr/>
+        </p:nvSpPr>
+        <p:spPr>
+          <a:xfrm>
+            <a:off x="5392826" y="3767328"/>
+            <a:ext cx="2686202" cy="402336"/>
+          </a:xfrm>
+          <a:prstGeom prst="rect">
+            <a:avLst/>
+          </a:prstGeom>
+          <a:noFill/>
+          <a:ln/>
+        </p:spPr>
+        <p:txBody>
+          <a:bodyPr wrap="square" lIns="0" tIns="0" rIns="0" bIns="0" rtlCol="0" anchor="t"/>
+          <a:lstStyle/>
+          <a:p>
+            <a:pPr algn="l" indent="0" marL="0">
+              <a:buNone/>
+            </a:pPr>
+            <a:r>
+              <a:rPr lang="en-US" sz="1100" dirty="0">
+                <a:solidFill>
+                  <a:srgbClr val="5B6472"/>
+                </a:solidFill>
+                <a:latin typeface="Segoe UI" pitchFamily="34" charset="0"/>
+                <a:ea typeface="Segoe UI" pitchFamily="34" charset="-122"/>
+                <a:cs typeface="Segoe UI" pitchFamily="34" charset="-120"/>
+              </a:rPr>
+              <a:t>7 nodes · quorum signs</a:t>
+            </a:r>
+            <a:endParaRPr lang="en-US" sz="1100" dirty="0"/>
+          </a:p>
+        </p:txBody>
+      </p:sp>
+      <p:sp>
+        <p:nvSpPr>
+          <p:cNvPr id="29" name="Shape 27"/>
+          <p:cNvSpPr/>
+          <p:nvPr/>
+        </p:nvSpPr>
+        <p:spPr>
+          <a:xfrm>
+            <a:off x="8536229" y="3090672"/>
+            <a:ext cx="3088538" cy="1335024"/>
+          </a:xfrm>
+          <a:prstGeom prst="roundRect">
+            <a:avLst>
+              <a:gd name="adj" fmla="val 4795"/>
+            </a:avLst>
+          </a:prstGeom>
+          <a:solidFill>
+            <a:srgbClr val="EDF2FD"/>
+          </a:solidFill>
+          <a:ln w="12700">
+            <a:solidFill>
+              <a:srgbClr val="1A56DB"/>
+            </a:solidFill>
+            <a:prstDash val="solid"/>
+          </a:ln>
+        </p:spPr>
+      </p:sp>
+      <p:sp>
+        <p:nvSpPr>
+          <p:cNvPr id="30" name="Text 28"/>
+          <p:cNvSpPr/>
+          <p:nvPr/>
+        </p:nvSpPr>
+        <p:spPr>
+          <a:xfrm>
+            <a:off x="8737397" y="3364992"/>
+            <a:ext cx="2686202" cy="329184"/>
+          </a:xfrm>
+          <a:prstGeom prst="rect">
+            <a:avLst/>
+          </a:prstGeom>
+          <a:noFill/>
+          <a:ln/>
+        </p:spPr>
+        <p:txBody>
+          <a:bodyPr wrap="square" lIns="0" tIns="0" rIns="0" bIns="0" rtlCol="0" anchor="t"/>
+          <a:lstStyle/>
+          <a:p>
+            <a:pPr algn="l" indent="0" marL="0">
+              <a:buNone/>
+            </a:pPr>
+            <a:r>
+              <a:rPr lang="en-US" sz="1500" b="1" dirty="0">
+                <a:solidFill>
+                  <a:srgbClr val="1A56DB"/>
+                </a:solidFill>
+                <a:latin typeface="Segoe UI" pitchFamily="34" charset="0"/>
+                <a:ea typeface="Segoe UI" pitchFamily="34" charset="-122"/>
+                <a:cs typeface="Segoe UI" pitchFamily="34" charset="-120"/>
+              </a:rPr>
+              <a:t>the panel</a:t>
+            </a:r>
+            <a:endParaRPr lang="en-US" sz="1500" dirty="0"/>
+          </a:p>
+        </p:txBody>
+      </p:sp>
+      <p:sp>
+        <p:nvSpPr>
+          <p:cNvPr id="31" name="Text 29"/>
+          <p:cNvSpPr/>
+          <p:nvPr/>
+        </p:nvSpPr>
+        <p:spPr>
+          <a:xfrm>
+            <a:off x="8737397" y="3767328"/>
+            <a:ext cx="2686202" cy="402336"/>
+          </a:xfrm>
+          <a:prstGeom prst="rect">
+            <a:avLst/>
+          </a:prstGeom>
+          <a:noFill/>
+          <a:ln/>
+        </p:spPr>
+        <p:txBody>
+          <a:bodyPr wrap="square" lIns="0" tIns="0" rIns="0" bIns="0" rtlCol="0" anchor="t"/>
+          <a:lstStyle/>
+          <a:p>
+            <a:pPr algn="l" indent="0" marL="0">
+              <a:buNone/>
+            </a:pPr>
+            <a:r>
+              <a:rPr lang="en-US" sz="1100" dirty="0">
+                <a:solidFill>
+                  <a:srgbClr val="5B6472"/>
+                </a:solidFill>
+                <a:latin typeface="Segoe UI" pitchFamily="34" charset="0"/>
+                <a:ea typeface="Segoe UI" pitchFamily="34" charset="-122"/>
+                <a:cs typeface="Segoe UI" pitchFamily="34" charset="-120"/>
+              </a:rPr>
+              <a:t>one book · page 1 / page 2</a:t>
+            </a:r>
+            <a:endParaRPr lang="en-US" sz="1100" dirty="0"/>
+          </a:p>
+        </p:txBody>
+      </p:sp>
+      <p:sp>
+        <p:nvSpPr>
+          <p:cNvPr id="32" name="Shape 30"/>
+          <p:cNvSpPr/>
+          <p:nvPr/>
+        </p:nvSpPr>
+        <p:spPr>
+          <a:xfrm>
+            <a:off x="1847088" y="4718304"/>
+            <a:ext cx="4760824" cy="1335024"/>
+          </a:xfrm>
+          <a:prstGeom prst="roundRect">
+            <a:avLst>
+              <a:gd name="adj" fmla="val 4795"/>
+            </a:avLst>
+          </a:prstGeom>
+          <a:solidFill>
+            <a:srgbClr val="F5F7FA"/>
+          </a:solidFill>
+          <a:ln w="12700">
+            <a:solidFill>
+              <a:srgbClr val="DDE2EA"/>
+            </a:solidFill>
+            <a:prstDash val="solid"/>
+          </a:ln>
+        </p:spPr>
+      </p:sp>
+      <p:sp>
+        <p:nvSpPr>
+          <p:cNvPr id="33" name="Text 31"/>
+          <p:cNvSpPr/>
+          <p:nvPr/>
+        </p:nvSpPr>
+        <p:spPr>
+          <a:xfrm>
+            <a:off x="2048256" y="4992624"/>
+            <a:ext cx="4358488" cy="329184"/>
+          </a:xfrm>
+          <a:prstGeom prst="rect">
+            <a:avLst/>
+          </a:prstGeom>
+          <a:noFill/>
+          <a:ln/>
+        </p:spPr>
+        <p:txBody>
+          <a:bodyPr wrap="square" lIns="0" tIns="0" rIns="0" bIns="0" rtlCol="0" anchor="t"/>
+          <a:lstStyle/>
+          <a:p>
+            <a:pPr algn="l" indent="0" marL="0">
+              <a:buNone/>
+            </a:pPr>
+            <a:r>
+              <a:rPr lang="en-US" sz="1500" b="1" dirty="0">
+                <a:solidFill>
+                  <a:srgbClr val="12161F"/>
+                </a:solidFill>
+                <a:latin typeface="Segoe UI" pitchFamily="34" charset="0"/>
+                <a:ea typeface="Segoe UI" pitchFamily="34" charset="-122"/>
+                <a:cs typeface="Segoe UI" pitchFamily="34" charset="-120"/>
+              </a:rPr>
+              <a:t>Accumulate  ·  Kermit</a:t>
+            </a:r>
+            <a:endParaRPr lang="en-US" sz="1500" dirty="0"/>
+          </a:p>
+        </p:txBody>
+      </p:sp>
+      <p:sp>
+        <p:nvSpPr>
+          <p:cNvPr id="34" name="Text 32"/>
+          <p:cNvSpPr/>
+          <p:nvPr/>
+        </p:nvSpPr>
+        <p:spPr>
+          <a:xfrm>
+            <a:off x="2048256" y="5394960"/>
+            <a:ext cx="4358488" cy="402336"/>
+          </a:xfrm>
+          <a:prstGeom prst="rect">
+            <a:avLst/>
+          </a:prstGeom>
+          <a:noFill/>
+          <a:ln/>
+        </p:spPr>
+        <p:txBody>
+          <a:bodyPr wrap="square" lIns="0" tIns="0" rIns="0" bIns="0" rtlCol="0" anchor="t"/>
+          <a:lstStyle/>
+          <a:p>
+            <a:pPr algn="l" indent="0" marL="0">
+              <a:buNone/>
+            </a:pPr>
+            <a:r>
+              <a:rPr lang="en-US" sz="1100" dirty="0">
+                <a:solidFill>
+                  <a:srgbClr val="5B6472"/>
+                </a:solidFill>
+                <a:latin typeface="Segoe UI" pitchFamily="34" charset="0"/>
+                <a:ea typeface="Segoe UI" pitchFamily="34" charset="-122"/>
+                <a:cs typeface="Segoe UI" pitchFamily="34" charset="-120"/>
+              </a:rPr>
+              <a:t>ADIs, key book, the pages themselves</a:t>
+            </a:r>
+            <a:endParaRPr lang="en-US" sz="1100" dirty="0"/>
+          </a:p>
+        </p:txBody>
+      </p:sp>
+      <p:sp>
+        <p:nvSpPr>
+          <p:cNvPr id="35" name="Shape 33"/>
+          <p:cNvSpPr/>
+          <p:nvPr/>
+        </p:nvSpPr>
+        <p:spPr>
+          <a:xfrm>
+            <a:off x="6863944" y="4718304"/>
+            <a:ext cx="4760824" cy="1335024"/>
+          </a:xfrm>
+          <a:prstGeom prst="roundRect">
+            <a:avLst>
+              <a:gd name="adj" fmla="val 4795"/>
+            </a:avLst>
+          </a:prstGeom>
+          <a:solidFill>
+            <a:srgbClr val="F5F7FA"/>
+          </a:solidFill>
+          <a:ln w="12700">
+            <a:solidFill>
+              <a:srgbClr val="DDE2EA"/>
+            </a:solidFill>
+            <a:prstDash val="solid"/>
+          </a:ln>
+        </p:spPr>
+      </p:sp>
+      <p:sp>
+        <p:nvSpPr>
+          <p:cNvPr id="36" name="Text 34"/>
+          <p:cNvSpPr/>
+          <p:nvPr/>
+        </p:nvSpPr>
+        <p:spPr>
+          <a:xfrm>
+            <a:off x="7065112" y="4992624"/>
+            <a:ext cx="4358488" cy="329184"/>
+          </a:xfrm>
+          <a:prstGeom prst="rect">
+            <a:avLst/>
+          </a:prstGeom>
+          <a:noFill/>
+          <a:ln/>
+        </p:spPr>
+        <p:txBody>
+          <a:bodyPr wrap="square" lIns="0" tIns="0" rIns="0" bIns="0" rtlCol="0" anchor="t"/>
+          <a:lstStyle/>
+          <a:p>
+            <a:pPr algn="l" indent="0" marL="0">
+              <a:buNone/>
+            </a:pPr>
+            <a:r>
+              <a:rPr lang="en-US" sz="1500" b="1" dirty="0">
+                <a:solidFill>
+                  <a:srgbClr val="12161F"/>
+                </a:solidFill>
+                <a:latin typeface="Segoe UI" pitchFamily="34" charset="0"/>
+                <a:ea typeface="Segoe UI" pitchFamily="34" charset="-122"/>
+                <a:cs typeface="Segoe UI" pitchFamily="34" charset="-120"/>
+              </a:rPr>
+              <a:t>Ethereum Sepolia</a:t>
+            </a:r>
+            <a:endParaRPr lang="en-US" sz="1500" dirty="0"/>
+          </a:p>
+        </p:txBody>
+      </p:sp>
+      <p:sp>
+        <p:nvSpPr>
+          <p:cNvPr id="37" name="Text 35"/>
+          <p:cNvSpPr/>
+          <p:nvPr/>
+        </p:nvSpPr>
+        <p:spPr>
+          <a:xfrm>
+            <a:off x="7065112" y="5394960"/>
+            <a:ext cx="4358488" cy="402336"/>
+          </a:xfrm>
+          <a:prstGeom prst="rect">
+            <a:avLst/>
+          </a:prstGeom>
+          <a:noFill/>
+          <a:ln/>
+        </p:spPr>
+        <p:txBody>
+          <a:bodyPr wrap="square" lIns="0" tIns="0" rIns="0" bIns="0" rtlCol="0" anchor="t"/>
+          <a:lstStyle/>
+          <a:p>
+            <a:pPr algn="l" indent="0" marL="0">
+              <a:buNone/>
+            </a:pPr>
+            <a:r>
+              <a:rPr lang="en-US" sz="1100" dirty="0">
+                <a:solidFill>
+                  <a:srgbClr val="5B6472"/>
+                </a:solidFill>
+                <a:latin typeface="Segoe UI" pitchFamily="34" charset="0"/>
+                <a:ea typeface="Segoe UI" pitchFamily="34" charset="-122"/>
+                <a:cs typeface="Segoe UI" pitchFamily="34" charset="-120"/>
+              </a:rPr>
+              <a:t>escrobot — untouched, admin = the panel</a:t>
+            </a:r>
+            <a:endParaRPr lang="en-US" sz="1100" dirty="0"/>
+          </a:p>
+        </p:txBody>
+      </p:sp>
+      <p:sp>
+        <p:nvSpPr>
+          <p:cNvPr id="38" name="Shape 36"/>
+          <p:cNvSpPr/>
+          <p:nvPr/>
+        </p:nvSpPr>
+        <p:spPr>
+          <a:xfrm>
+            <a:off x="3391357" y="2834640"/>
+            <a:ext cx="0" cy="219456"/>
+          </a:xfrm>
+          <a:prstGeom prst="line">
+            <a:avLst/>
+          </a:prstGeom>
+          <a:noFill/>
+          <a:ln w="22225">
+            <a:solidFill>
+              <a:srgbClr val="5B6472"/>
+            </a:solidFill>
+            <a:prstDash val="solid"/>
+            <a:tailEnd type="triangle"/>
+          </a:ln>
+        </p:spPr>
+      </p:sp>
+      <p:sp>
+        <p:nvSpPr>
+          <p:cNvPr id="39" name="Shape 37"/>
+          <p:cNvSpPr/>
+          <p:nvPr/>
+        </p:nvSpPr>
+        <p:spPr>
+          <a:xfrm>
+            <a:off x="6735928" y="2834640"/>
+            <a:ext cx="0" cy="219456"/>
+          </a:xfrm>
+          <a:prstGeom prst="line">
+            <a:avLst/>
+          </a:prstGeom>
+          <a:noFill/>
+          <a:ln w="22225">
+            <a:solidFill>
+              <a:srgbClr val="5B6472"/>
+            </a:solidFill>
+            <a:prstDash val="solid"/>
+            <a:tailEnd type="triangle"/>
+          </a:ln>
+        </p:spPr>
+      </p:sp>
+      <p:sp>
+        <p:nvSpPr>
+          <p:cNvPr id="40" name="Shape 38"/>
+          <p:cNvSpPr/>
+          <p:nvPr/>
+        </p:nvSpPr>
+        <p:spPr>
+          <a:xfrm>
+            <a:off x="10080498" y="2834640"/>
+            <a:ext cx="0" cy="219456"/>
+          </a:xfrm>
+          <a:prstGeom prst="line">
+            <a:avLst/>
+          </a:prstGeom>
+          <a:noFill/>
+          <a:ln w="22225">
+            <a:solidFill>
+              <a:srgbClr val="5B6472"/>
+            </a:solidFill>
+            <a:prstDash val="solid"/>
+            <a:tailEnd type="triangle"/>
+          </a:ln>
+        </p:spPr>
+      </p:sp>
+      <p:sp>
+        <p:nvSpPr>
+          <p:cNvPr id="41" name="Shape 39"/>
+          <p:cNvSpPr/>
+          <p:nvPr/>
+        </p:nvSpPr>
+        <p:spPr>
+          <a:xfrm>
+            <a:off x="3391357" y="4462272"/>
+            <a:ext cx="0" cy="219456"/>
+          </a:xfrm>
+          <a:prstGeom prst="line">
+            <a:avLst/>
+          </a:prstGeom>
+          <a:noFill/>
+          <a:ln w="22225">
+            <a:solidFill>
+              <a:srgbClr val="5B6472"/>
+            </a:solidFill>
+            <a:prstDash val="solid"/>
+            <a:tailEnd type="triangle"/>
+          </a:ln>
+        </p:spPr>
+      </p:sp>
+      <p:sp>
+        <p:nvSpPr>
+          <p:cNvPr id="42" name="Shape 40"/>
+          <p:cNvSpPr/>
+          <p:nvPr/>
+        </p:nvSpPr>
+        <p:spPr>
+          <a:xfrm>
+            <a:off x="10080498" y="4462272"/>
+            <a:ext cx="0" cy="219456"/>
+          </a:xfrm>
+          <a:prstGeom prst="line">
+            <a:avLst/>
+          </a:prstGeom>
+          <a:noFill/>
+          <a:ln w="22225">
+            <a:solidFill>
+              <a:srgbClr val="5B6472"/>
+            </a:solidFill>
+            <a:prstDash val="solid"/>
+            <a:tailEnd type="triangle"/>
+          </a:ln>
+        </p:spPr>
+      </p:sp>
+      <p:sp>
+        <p:nvSpPr>
+          <p:cNvPr id="43" name="Text 41"/>
+          <p:cNvSpPr/>
+          <p:nvPr/>
+        </p:nvSpPr>
+        <p:spPr>
+          <a:xfrm>
+            <a:off x="1847088" y="2816352"/>
+            <a:ext cx="9777679" cy="256032"/>
+          </a:xfrm>
+          <a:prstGeom prst="rect">
+            <a:avLst/>
+          </a:prstGeom>
+          <a:noFill/>
+          <a:ln/>
+        </p:spPr>
+        <p:txBody>
+          <a:bodyPr wrap="square" lIns="0" tIns="0" rIns="0" bIns="0" rtlCol="0" anchor="ctr"/>
+          <a:lstStyle/>
+          <a:p>
+            <a:pPr algn="r" indent="0" marL="0">
+              <a:buNone/>
+            </a:pPr>
+            <a:r>
+              <a:rPr lang="en-US" sz="1000" dirty="0">
+                <a:solidFill>
+                  <a:srgbClr val="5B6472"/>
+                </a:solidFill>
+                <a:latin typeface="Segoe UI" pitchFamily="34" charset="0"/>
+                <a:ea typeface="Segoe UI" pitchFamily="34" charset="-122"/>
+                <a:cs typeface="Segoe UI" pitchFamily="34" charset="-120"/>
+              </a:rPr>
+              <a:t>intents + signatures</a:t>
+            </a:r>
+            <a:endParaRPr lang="en-US" sz="1000" dirty="0"/>
+          </a:p>
+        </p:txBody>
+      </p:sp>
+      <p:sp>
+        <p:nvSpPr>
+          <p:cNvPr id="44" name="Text 42"/>
+          <p:cNvSpPr/>
+          <p:nvPr/>
+        </p:nvSpPr>
+        <p:spPr>
+          <a:xfrm>
+            <a:off x="1847088" y="4443984"/>
+            <a:ext cx="9777679" cy="256032"/>
+          </a:xfrm>
+          <a:prstGeom prst="rect">
+            <a:avLst/>
+          </a:prstGeom>
+          <a:noFill/>
+          <a:ln/>
+        </p:spPr>
+        <p:txBody>
+          <a:bodyPr wrap="square" lIns="0" tIns="0" rIns="0" bIns="0" rtlCol="0" anchor="ctr"/>
+          <a:lstStyle/>
+          <a:p>
+            <a:pPr algn="r" indent="0" marL="0">
+              <a:buNone/>
+            </a:pPr>
+            <a:r>
+              <a:rPr lang="en-US" sz="1000" dirty="0">
+                <a:solidFill>
+                  <a:srgbClr val="5B6472"/>
+                </a:solidFill>
+                <a:latin typeface="Segoe UI" pitchFamily="34" charset="0"/>
+                <a:ea typeface="Segoe UI" pitchFamily="34" charset="-122"/>
+                <a:cs typeface="Segoe UI" pitchFamily="34" charset="-120"/>
+              </a:rPr>
+              <a:t>proof, then execution</a:t>
+            </a:r>
+            <a:endParaRPr lang="en-US" sz="1000" dirty="0"/>
+          </a:p>
+        </p:txBody>
+      </p:sp>
+      <p:sp>
+        <p:nvSpPr>
+          <p:cNvPr id="45" name="Text 43"/>
+          <p:cNvSpPr/>
+          <p:nvPr/>
+        </p:nvSpPr>
+        <p:spPr>
+          <a:xfrm>
+            <a:off x="566928" y="6126480"/>
+            <a:ext cx="11057839" cy="329184"/>
+          </a:xfrm>
+          <a:prstGeom prst="rect">
+            <a:avLst/>
+          </a:prstGeom>
+          <a:noFill/>
+          <a:ln/>
+        </p:spPr>
+        <p:txBody>
+          <a:bodyPr wrap="square" lIns="0" tIns="0" rIns="0" bIns="0" rtlCol="0" anchor="t"/>
+          <a:lstStyle/>
+          <a:p>
+            <a:pPr algn="ctr" indent="0" marL="0">
+              <a:buNone/>
+            </a:pPr>
+            <a:r>
+              <a:rPr lang="en-US" sz="1400" b="1" dirty="0">
+                <a:solidFill>
+                  <a:srgbClr val="1A56DB"/>
+                </a:solidFill>
+                <a:latin typeface="Segoe UI" pitchFamily="34" charset="0"/>
+                <a:ea typeface="Segoe UI" pitchFamily="34" charset="-122"/>
+                <a:cs typeface="Segoe UI" pitchFamily="34" charset="-120"/>
+              </a:rPr>
+              <a:t>CERTEN holds no seat on either page, and never touches your contract.</a:t>
+            </a:r>
+            <a:endParaRPr lang="en-US" sz="1400" dirty="0"/>
+          </a:p>
+        </p:txBody>
+      </p:sp>
     </p:spTree>
   </p:cSld>
   <p:clrMapOvr>
@@ -1273,30 +2827,1019 @@
           <a:chExt cx="0" cy="0"/>
         </a:xfrm>
       </p:grpSpPr>
-      <p:pic>
-        <p:nvPicPr>
-          <p:cNvPr id="2" name="Image 0" descr="C:\Accumulate_Stuff\certen\independant_validator\docs\demo\slides\carp-panel-brief-2.jpg">    </p:cNvPr>
-          <p:cNvPicPr>
-            <a:picLocks noChangeAspect="1"/>
-          </p:cNvPicPr>
-          <p:nvPr/>
-        </p:nvPicPr>
-        <p:blipFill>
-          <a:blip r:embed="rId1"/>
-          <a:stretch>
-            <a:fillRect/>
-          </a:stretch>
-        </p:blipFill>
-        <p:spPr>
-          <a:xfrm>
-            <a:off x="0" y="0"/>
-            <a:ext cx="12191695" cy="6858000"/>
-          </a:xfrm>
-          <a:prstGeom prst="rect">
-            <a:avLst/>
-          </a:prstGeom>
-        </p:spPr>
-      </p:pic>
+      <p:sp>
+        <p:nvSpPr>
+          <p:cNvPr id="2" name="Shape 0"/>
+          <p:cNvSpPr/>
+          <p:nvPr/>
+        </p:nvSpPr>
+        <p:spPr>
+          <a:xfrm>
+            <a:off x="0" y="6766560"/>
+            <a:ext cx="12191695" cy="91440"/>
+          </a:xfrm>
+          <a:prstGeom prst="rect">
+            <a:avLst/>
+          </a:prstGeom>
+          <a:solidFill>
+            <a:srgbClr val="1A56DB"/>
+          </a:solidFill>
+          <a:ln w="12700">
+            <a:solidFill>
+              <a:srgbClr val="333333"/>
+            </a:solidFill>
+            <a:prstDash val="solid"/>
+          </a:ln>
+        </p:spPr>
+      </p:sp>
+      <p:sp>
+        <p:nvSpPr>
+          <p:cNvPr id="3" name="Text 1"/>
+          <p:cNvSpPr/>
+          <p:nvPr/>
+        </p:nvSpPr>
+        <p:spPr>
+          <a:xfrm>
+            <a:off x="566928" y="402336"/>
+            <a:ext cx="11057839" cy="201168"/>
+          </a:xfrm>
+          <a:prstGeom prst="rect">
+            <a:avLst/>
+          </a:prstGeom>
+          <a:noFill/>
+          <a:ln/>
+        </p:spPr>
+        <p:txBody>
+          <a:bodyPr wrap="square" lIns="0" tIns="0" rIns="0" bIns="0" rtlCol="0" anchor="t"/>
+          <a:lstStyle/>
+          <a:p>
+            <a:pPr algn="l" indent="0" marL="0">
+              <a:buNone/>
+            </a:pPr>
+            <a:r>
+              <a:rPr lang="en-US" sz="900" b="1" spc="160" kern="0" dirty="0">
+                <a:solidFill>
+                  <a:srgbClr val="1A56DB"/>
+                </a:solidFill>
+                <a:latin typeface="Segoe UI" pitchFamily="34" charset="0"/>
+                <a:ea typeface="Segoe UI" pitchFamily="34" charset="-122"/>
+                <a:cs typeface="Segoe UI" pitchFamily="34" charset="-120"/>
+              </a:rPr>
+              <a:t>ESCROBOT × CERTEN  ·  LIVE ON ETHEREUM SEPOLIA</a:t>
+            </a:r>
+            <a:endParaRPr lang="en-US" sz="900" dirty="0"/>
+          </a:p>
+        </p:txBody>
+      </p:sp>
+      <p:sp>
+        <p:nvSpPr>
+          <p:cNvPr id="4" name="Text 2"/>
+          <p:cNvSpPr/>
+          <p:nvPr/>
+        </p:nvSpPr>
+        <p:spPr>
+          <a:xfrm>
+            <a:off x="566928" y="640080"/>
+            <a:ext cx="11057839" cy="420624"/>
+          </a:xfrm>
+          <a:prstGeom prst="rect">
+            <a:avLst/>
+          </a:prstGeom>
+          <a:noFill/>
+          <a:ln/>
+        </p:spPr>
+        <p:txBody>
+          <a:bodyPr wrap="square" lIns="0" tIns="0" rIns="0" bIns="0" rtlCol="0" anchor="t"/>
+          <a:lstStyle/>
+          <a:p>
+            <a:pPr algn="l" indent="0" marL="0">
+              <a:buNone/>
+            </a:pPr>
+            <a:r>
+              <a:rPr lang="en-US" sz="2300" b="1" dirty="0">
+                <a:solidFill>
+                  <a:srgbClr val="12161F"/>
+                </a:solidFill>
+                <a:latin typeface="Segoe UI" pitchFamily="34" charset="0"/>
+                <a:ea typeface="Segoe UI" pitchFamily="34" charset="-122"/>
+                <a:cs typeface="Segoe UI" pitchFamily="34" charset="-120"/>
+              </a:rPr>
+              <a:t>The Admin Key Is Gone</a:t>
+            </a:r>
+            <a:endParaRPr lang="en-US" sz="2300" dirty="0"/>
+          </a:p>
+        </p:txBody>
+      </p:sp>
+      <p:sp>
+        <p:nvSpPr>
+          <p:cNvPr id="5" name="Shape 3"/>
+          <p:cNvSpPr/>
+          <p:nvPr/>
+        </p:nvSpPr>
+        <p:spPr>
+          <a:xfrm>
+            <a:off x="566928" y="1426464"/>
+            <a:ext cx="2627300" cy="1207008"/>
+          </a:xfrm>
+          <a:prstGeom prst="roundRect">
+            <a:avLst>
+              <a:gd name="adj" fmla="val 5303"/>
+            </a:avLst>
+          </a:prstGeom>
+          <a:solidFill>
+            <a:srgbClr val="F5F7FA"/>
+          </a:solidFill>
+          <a:ln w="12700">
+            <a:solidFill>
+              <a:srgbClr val="DDE2EA"/>
+            </a:solidFill>
+            <a:prstDash val="solid"/>
+          </a:ln>
+        </p:spPr>
+      </p:sp>
+      <p:sp>
+        <p:nvSpPr>
+          <p:cNvPr id="6" name="Text 4"/>
+          <p:cNvSpPr/>
+          <p:nvPr/>
+        </p:nvSpPr>
+        <p:spPr>
+          <a:xfrm>
+            <a:off x="749808" y="1664208"/>
+            <a:ext cx="2261540" cy="292608"/>
+          </a:xfrm>
+          <a:prstGeom prst="rect">
+            <a:avLst/>
+          </a:prstGeom>
+          <a:noFill/>
+          <a:ln/>
+        </p:spPr>
+        <p:txBody>
+          <a:bodyPr wrap="square" lIns="0" tIns="0" rIns="0" bIns="0" rtlCol="0" anchor="t"/>
+          <a:lstStyle/>
+          <a:p>
+            <a:pPr algn="l" indent="0" marL="0">
+              <a:buNone/>
+            </a:pPr>
+            <a:r>
+              <a:rPr lang="en-US" sz="1350" b="1" dirty="0">
+                <a:solidFill>
+                  <a:srgbClr val="12161F"/>
+                </a:solidFill>
+                <a:latin typeface="Segoe UI" pitchFamily="34" charset="0"/>
+                <a:ea typeface="Segoe UI" pitchFamily="34" charset="-122"/>
+                <a:cs typeface="Segoe UI" pitchFamily="34" charset="-120"/>
+              </a:rPr>
+              <a:t>The escrow contract</a:t>
+            </a:r>
+            <a:endParaRPr lang="en-US" sz="1350" dirty="0"/>
+          </a:p>
+        </p:txBody>
+      </p:sp>
+      <p:sp>
+        <p:nvSpPr>
+          <p:cNvPr id="7" name="Text 5"/>
+          <p:cNvSpPr/>
+          <p:nvPr/>
+        </p:nvSpPr>
+        <p:spPr>
+          <a:xfrm>
+            <a:off x="749808" y="2103120"/>
+            <a:ext cx="2261540" cy="237744"/>
+          </a:xfrm>
+          <a:prstGeom prst="rect">
+            <a:avLst/>
+          </a:prstGeom>
+          <a:noFill/>
+          <a:ln/>
+        </p:spPr>
+        <p:txBody>
+          <a:bodyPr wrap="square" lIns="0" tIns="0" rIns="0" bIns="0" rtlCol="0" anchor="t"/>
+          <a:lstStyle/>
+          <a:p>
+            <a:pPr algn="l" indent="0" marL="0">
+              <a:buNone/>
+            </a:pPr>
+            <a:r>
+              <a:rPr lang="en-US" sz="950" b="1" spc="120" kern="0" dirty="0">
+                <a:solidFill>
+                  <a:srgbClr val="157F4A"/>
+                </a:solidFill>
+                <a:latin typeface="Segoe UI" pitchFamily="34" charset="0"/>
+                <a:ea typeface="Segoe UI" pitchFamily="34" charset="-122"/>
+                <a:cs typeface="Segoe UI" pitchFamily="34" charset="-120"/>
+              </a:rPr>
+              <a:t>UNTOUCHED</a:t>
+            </a:r>
+            <a:endParaRPr lang="en-US" sz="950" dirty="0"/>
+          </a:p>
+        </p:txBody>
+      </p:sp>
+      <p:sp>
+        <p:nvSpPr>
+          <p:cNvPr id="8" name="Shape 6"/>
+          <p:cNvSpPr/>
+          <p:nvPr/>
+        </p:nvSpPr>
+        <p:spPr>
+          <a:xfrm>
+            <a:off x="3377108" y="1426464"/>
+            <a:ext cx="2627300" cy="1207008"/>
+          </a:xfrm>
+          <a:prstGeom prst="roundRect">
+            <a:avLst>
+              <a:gd name="adj" fmla="val 5303"/>
+            </a:avLst>
+          </a:prstGeom>
+          <a:solidFill>
+            <a:srgbClr val="F5F7FA"/>
+          </a:solidFill>
+          <a:ln w="12700">
+            <a:solidFill>
+              <a:srgbClr val="DDE2EA"/>
+            </a:solidFill>
+            <a:prstDash val="solid"/>
+          </a:ln>
+        </p:spPr>
+      </p:sp>
+      <p:sp>
+        <p:nvSpPr>
+          <p:cNvPr id="9" name="Text 7"/>
+          <p:cNvSpPr/>
+          <p:nvPr/>
+        </p:nvSpPr>
+        <p:spPr>
+          <a:xfrm>
+            <a:off x="3559988" y="1664208"/>
+            <a:ext cx="2261540" cy="292608"/>
+          </a:xfrm>
+          <a:prstGeom prst="rect">
+            <a:avLst/>
+          </a:prstGeom>
+          <a:noFill/>
+          <a:ln/>
+        </p:spPr>
+        <p:txBody>
+          <a:bodyPr wrap="square" lIns="0" tIns="0" rIns="0" bIns="0" rtlCol="0" anchor="t"/>
+          <a:lstStyle/>
+          <a:p>
+            <a:pPr algn="l" indent="0" marL="0">
+              <a:buNone/>
+            </a:pPr>
+            <a:r>
+              <a:rPr lang="en-US" sz="1350" b="1" dirty="0">
+                <a:solidFill>
+                  <a:srgbClr val="12161F"/>
+                </a:solidFill>
+                <a:latin typeface="Segoe UI" pitchFamily="34" charset="0"/>
+                <a:ea typeface="Segoe UI" pitchFamily="34" charset="-122"/>
+                <a:cs typeface="Segoe UI" pitchFamily="34" charset="-120"/>
+              </a:rPr>
+              <a:t>forceResolve logic</a:t>
+            </a:r>
+            <a:endParaRPr lang="en-US" sz="1350" dirty="0"/>
+          </a:p>
+        </p:txBody>
+      </p:sp>
+      <p:sp>
+        <p:nvSpPr>
+          <p:cNvPr id="10" name="Text 8"/>
+          <p:cNvSpPr/>
+          <p:nvPr/>
+        </p:nvSpPr>
+        <p:spPr>
+          <a:xfrm>
+            <a:off x="3559988" y="2103120"/>
+            <a:ext cx="2261540" cy="237744"/>
+          </a:xfrm>
+          <a:prstGeom prst="rect">
+            <a:avLst/>
+          </a:prstGeom>
+          <a:noFill/>
+          <a:ln/>
+        </p:spPr>
+        <p:txBody>
+          <a:bodyPr wrap="square" lIns="0" tIns="0" rIns="0" bIns="0" rtlCol="0" anchor="t"/>
+          <a:lstStyle/>
+          <a:p>
+            <a:pPr algn="l" indent="0" marL="0">
+              <a:buNone/>
+            </a:pPr>
+            <a:r>
+              <a:rPr lang="en-US" sz="950" b="1" spc="120" kern="0" dirty="0">
+                <a:solidFill>
+                  <a:srgbClr val="157F4A"/>
+                </a:solidFill>
+                <a:latin typeface="Segoe UI" pitchFamily="34" charset="0"/>
+                <a:ea typeface="Segoe UI" pitchFamily="34" charset="-122"/>
+                <a:cs typeface="Segoe UI" pitchFamily="34" charset="-120"/>
+              </a:rPr>
+              <a:t>UNTOUCHED</a:t>
+            </a:r>
+            <a:endParaRPr lang="en-US" sz="950" dirty="0"/>
+          </a:p>
+        </p:txBody>
+      </p:sp>
+      <p:sp>
+        <p:nvSpPr>
+          <p:cNvPr id="11" name="Shape 9"/>
+          <p:cNvSpPr/>
+          <p:nvPr/>
+        </p:nvSpPr>
+        <p:spPr>
+          <a:xfrm>
+            <a:off x="6187288" y="1426464"/>
+            <a:ext cx="2627300" cy="1207008"/>
+          </a:xfrm>
+          <a:prstGeom prst="roundRect">
+            <a:avLst>
+              <a:gd name="adj" fmla="val 5303"/>
+            </a:avLst>
+          </a:prstGeom>
+          <a:solidFill>
+            <a:srgbClr val="F5F7FA"/>
+          </a:solidFill>
+          <a:ln w="12700">
+            <a:solidFill>
+              <a:srgbClr val="DDE2EA"/>
+            </a:solidFill>
+            <a:prstDash val="solid"/>
+          </a:ln>
+        </p:spPr>
+      </p:sp>
+      <p:sp>
+        <p:nvSpPr>
+          <p:cNvPr id="12" name="Text 10"/>
+          <p:cNvSpPr/>
+          <p:nvPr/>
+        </p:nvSpPr>
+        <p:spPr>
+          <a:xfrm>
+            <a:off x="6370168" y="1664208"/>
+            <a:ext cx="2261540" cy="292608"/>
+          </a:xfrm>
+          <a:prstGeom prst="rect">
+            <a:avLst/>
+          </a:prstGeom>
+          <a:noFill/>
+          <a:ln/>
+        </p:spPr>
+        <p:txBody>
+          <a:bodyPr wrap="square" lIns="0" tIns="0" rIns="0" bIns="0" rtlCol="0" anchor="t"/>
+          <a:lstStyle/>
+          <a:p>
+            <a:pPr algn="l" indent="0" marL="0">
+              <a:buNone/>
+            </a:pPr>
+            <a:r>
+              <a:rPr lang="en-US" sz="1350" b="1" dirty="0">
+                <a:solidFill>
+                  <a:srgbClr val="12161F"/>
+                </a:solidFill>
+                <a:latin typeface="Segoe UI" pitchFamily="34" charset="0"/>
+                <a:ea typeface="Segoe UI" pitchFamily="34" charset="-122"/>
+                <a:cs typeface="Segoe UI" pitchFamily="34" charset="-120"/>
+              </a:rPr>
+              <a:t>isAdmin</a:t>
+            </a:r>
+            <a:endParaRPr lang="en-US" sz="1350" dirty="0"/>
+          </a:p>
+        </p:txBody>
+      </p:sp>
+      <p:sp>
+        <p:nvSpPr>
+          <p:cNvPr id="13" name="Text 11"/>
+          <p:cNvSpPr/>
+          <p:nvPr/>
+        </p:nvSpPr>
+        <p:spPr>
+          <a:xfrm>
+            <a:off x="6370168" y="2103120"/>
+            <a:ext cx="2261540" cy="237744"/>
+          </a:xfrm>
+          <a:prstGeom prst="rect">
+            <a:avLst/>
+          </a:prstGeom>
+          <a:noFill/>
+          <a:ln/>
+        </p:spPr>
+        <p:txBody>
+          <a:bodyPr wrap="square" lIns="0" tIns="0" rIns="0" bIns="0" rtlCol="0" anchor="t"/>
+          <a:lstStyle/>
+          <a:p>
+            <a:pPr algn="l" indent="0" marL="0">
+              <a:buNone/>
+            </a:pPr>
+            <a:r>
+              <a:rPr lang="en-US" sz="950" b="1" spc="120" kern="0" dirty="0">
+                <a:solidFill>
+                  <a:srgbClr val="157F4A"/>
+                </a:solidFill>
+                <a:latin typeface="Segoe UI" pitchFamily="34" charset="0"/>
+                <a:ea typeface="Segoe UI" pitchFamily="34" charset="-122"/>
+                <a:cs typeface="Segoe UI" pitchFamily="34" charset="-120"/>
+              </a:rPr>
+              <a:t>UNTOUCHED</a:t>
+            </a:r>
+            <a:endParaRPr lang="en-US" sz="950" dirty="0"/>
+          </a:p>
+        </p:txBody>
+      </p:sp>
+      <p:sp>
+        <p:nvSpPr>
+          <p:cNvPr id="14" name="Shape 12"/>
+          <p:cNvSpPr/>
+          <p:nvPr/>
+        </p:nvSpPr>
+        <p:spPr>
+          <a:xfrm>
+            <a:off x="8997467" y="1426464"/>
+            <a:ext cx="2627300" cy="1207008"/>
+          </a:xfrm>
+          <a:prstGeom prst="roundRect">
+            <a:avLst>
+              <a:gd name="adj" fmla="val 5303"/>
+            </a:avLst>
+          </a:prstGeom>
+          <a:solidFill>
+            <a:srgbClr val="EDF2FD"/>
+          </a:solidFill>
+          <a:ln w="12700">
+            <a:solidFill>
+              <a:srgbClr val="1A56DB"/>
+            </a:solidFill>
+            <a:prstDash val="solid"/>
+          </a:ln>
+        </p:spPr>
+      </p:sp>
+      <p:sp>
+        <p:nvSpPr>
+          <p:cNvPr id="15" name="Text 13"/>
+          <p:cNvSpPr/>
+          <p:nvPr/>
+        </p:nvSpPr>
+        <p:spPr>
+          <a:xfrm>
+            <a:off x="9180347" y="1664208"/>
+            <a:ext cx="2261540" cy="292608"/>
+          </a:xfrm>
+          <a:prstGeom prst="rect">
+            <a:avLst/>
+          </a:prstGeom>
+          <a:noFill/>
+          <a:ln/>
+        </p:spPr>
+        <p:txBody>
+          <a:bodyPr wrap="square" lIns="0" tIns="0" rIns="0" bIns="0" rtlCol="0" anchor="t"/>
+          <a:lstStyle/>
+          <a:p>
+            <a:pPr algn="l" indent="0" marL="0">
+              <a:buNone/>
+            </a:pPr>
+            <a:r>
+              <a:rPr lang="en-US" sz="1350" b="1" dirty="0">
+                <a:solidFill>
+                  <a:srgbClr val="1A56DB"/>
+                </a:solidFill>
+                <a:latin typeface="Segoe UI" pitchFamily="34" charset="0"/>
+                <a:ea typeface="Segoe UI" pitchFamily="34" charset="-122"/>
+                <a:cs typeface="Segoe UI" pitchFamily="34" charset="-120"/>
+              </a:rPr>
+              <a:t>The admin address</a:t>
+            </a:r>
+            <a:endParaRPr lang="en-US" sz="1350" dirty="0"/>
+          </a:p>
+        </p:txBody>
+      </p:sp>
+      <p:sp>
+        <p:nvSpPr>
+          <p:cNvPr id="16" name="Text 14"/>
+          <p:cNvSpPr/>
+          <p:nvPr/>
+        </p:nvSpPr>
+        <p:spPr>
+          <a:xfrm>
+            <a:off x="9180347" y="2103120"/>
+            <a:ext cx="2261540" cy="237744"/>
+          </a:xfrm>
+          <a:prstGeom prst="rect">
+            <a:avLst/>
+          </a:prstGeom>
+          <a:noFill/>
+          <a:ln/>
+        </p:spPr>
+        <p:txBody>
+          <a:bodyPr wrap="square" lIns="0" tIns="0" rIns="0" bIns="0" rtlCol="0" anchor="t"/>
+          <a:lstStyle/>
+          <a:p>
+            <a:pPr algn="l" indent="0" marL="0">
+              <a:buNone/>
+            </a:pPr>
+            <a:r>
+              <a:rPr lang="en-US" sz="950" b="1" spc="120" kern="0" dirty="0">
+                <a:solidFill>
+                  <a:srgbClr val="1A56DB"/>
+                </a:solidFill>
+                <a:latin typeface="Segoe UI" pitchFamily="34" charset="0"/>
+                <a:ea typeface="Segoe UI" pitchFamily="34" charset="-122"/>
+                <a:cs typeface="Segoe UI" pitchFamily="34" charset="-120"/>
+              </a:rPr>
+              <a:t>MOVED</a:t>
+            </a:r>
+            <a:endParaRPr lang="en-US" sz="950" dirty="0"/>
+          </a:p>
+        </p:txBody>
+      </p:sp>
+      <p:sp>
+        <p:nvSpPr>
+          <p:cNvPr id="17" name="Shape 15"/>
+          <p:cNvSpPr/>
+          <p:nvPr/>
+        </p:nvSpPr>
+        <p:spPr>
+          <a:xfrm>
+            <a:off x="10311117" y="2688336"/>
+            <a:ext cx="0" cy="457200"/>
+          </a:xfrm>
+          <a:prstGeom prst="line">
+            <a:avLst/>
+          </a:prstGeom>
+          <a:noFill/>
+          <a:ln w="25400">
+            <a:solidFill>
+              <a:srgbClr val="1A56DB"/>
+            </a:solidFill>
+            <a:prstDash val="solid"/>
+            <a:tailEnd type="triangle"/>
+          </a:ln>
+        </p:spPr>
+      </p:sp>
+      <p:sp>
+        <p:nvSpPr>
+          <p:cNvPr id="18" name="Shape 16"/>
+          <p:cNvSpPr/>
+          <p:nvPr/>
+        </p:nvSpPr>
+        <p:spPr>
+          <a:xfrm>
+            <a:off x="566928" y="3218688"/>
+            <a:ext cx="11057839" cy="896112"/>
+          </a:xfrm>
+          <a:prstGeom prst="roundRect">
+            <a:avLst>
+              <a:gd name="adj" fmla="val 7143"/>
+            </a:avLst>
+          </a:prstGeom>
+          <a:solidFill>
+            <a:srgbClr val="FFFFFF"/>
+          </a:solidFill>
+          <a:ln w="12700">
+            <a:solidFill>
+              <a:srgbClr val="1A56DB"/>
+            </a:solidFill>
+            <a:prstDash val="solid"/>
+          </a:ln>
+        </p:spPr>
+      </p:sp>
+      <p:sp>
+        <p:nvSpPr>
+          <p:cNvPr id="19" name="Shape 17"/>
+          <p:cNvSpPr/>
+          <p:nvPr/>
+        </p:nvSpPr>
+        <p:spPr>
+          <a:xfrm>
+            <a:off x="566928" y="3218688"/>
+            <a:ext cx="54864" cy="896112"/>
+          </a:xfrm>
+          <a:prstGeom prst="rect">
+            <a:avLst/>
+          </a:prstGeom>
+          <a:solidFill>
+            <a:srgbClr val="1A56DB"/>
+          </a:solidFill>
+          <a:ln w="12700">
+            <a:solidFill>
+              <a:srgbClr val="333333"/>
+            </a:solidFill>
+            <a:prstDash val="solid"/>
+          </a:ln>
+        </p:spPr>
+      </p:sp>
+      <p:sp>
+        <p:nvSpPr>
+          <p:cNvPr id="20" name="Text 18"/>
+          <p:cNvSpPr/>
+          <p:nvPr/>
+        </p:nvSpPr>
+        <p:spPr>
+          <a:xfrm>
+            <a:off x="841248" y="3218688"/>
+            <a:ext cx="10509199" cy="896112"/>
+          </a:xfrm>
+          <a:prstGeom prst="rect">
+            <a:avLst/>
+          </a:prstGeom>
+          <a:noFill/>
+          <a:ln/>
+        </p:spPr>
+        <p:txBody>
+          <a:bodyPr wrap="square" lIns="0" tIns="0" rIns="0" bIns="0" rtlCol="0" anchor="ctr"/>
+          <a:lstStyle/>
+          <a:p>
+            <a:pPr algn="l" indent="0" marL="0">
+              <a:buNone/>
+            </a:pPr>
+            <a:r>
+              <a:rPr lang="en-US" sz="1350" b="1" dirty="0">
+                <a:solidFill>
+                  <a:srgbClr val="1A56DB"/>
+                </a:solidFill>
+                <a:latin typeface="Consolas" pitchFamily="34" charset="0"/>
+                <a:ea typeface="Consolas" pitchFamily="34" charset="-122"/>
+                <a:cs typeface="Consolas" pitchFamily="34" charset="-120"/>
+              </a:rPr>
+              <a:t>escrobot.admin()  =  0x895b28715FA81F6F4d6994cDda4e5323cC07F9f3</a:t>
+            </a:r>
+            <a:endParaRPr lang="en-US" sz="1350" dirty="0"/>
+          </a:p>
+        </p:txBody>
+      </p:sp>
+      <p:sp>
+        <p:nvSpPr>
+          <p:cNvPr id="21" name="Shape 19"/>
+          <p:cNvSpPr/>
+          <p:nvPr/>
+        </p:nvSpPr>
+        <p:spPr>
+          <a:xfrm>
+            <a:off x="3253664" y="4151376"/>
+            <a:ext cx="0" cy="182880"/>
+          </a:xfrm>
+          <a:prstGeom prst="line">
+            <a:avLst/>
+          </a:prstGeom>
+          <a:noFill/>
+          <a:ln w="19050">
+            <a:solidFill>
+              <a:srgbClr val="1A56DB"/>
+            </a:solidFill>
+            <a:prstDash val="solid"/>
+            <a:tailEnd type="triangle"/>
+          </a:ln>
+        </p:spPr>
+      </p:sp>
+      <p:sp>
+        <p:nvSpPr>
+          <p:cNvPr id="22" name="Shape 20"/>
+          <p:cNvSpPr/>
+          <p:nvPr/>
+        </p:nvSpPr>
+        <p:spPr>
+          <a:xfrm>
+            <a:off x="8938031" y="4151376"/>
+            <a:ext cx="0" cy="182880"/>
+          </a:xfrm>
+          <a:prstGeom prst="line">
+            <a:avLst/>
+          </a:prstGeom>
+          <a:noFill/>
+          <a:ln w="19050">
+            <a:solidFill>
+              <a:srgbClr val="1A56DB"/>
+            </a:solidFill>
+            <a:prstDash val="solid"/>
+            <a:tailEnd type="triangle"/>
+          </a:ln>
+        </p:spPr>
+      </p:sp>
+      <p:sp>
+        <p:nvSpPr>
+          <p:cNvPr id="23" name="Shape 21"/>
+          <p:cNvSpPr/>
+          <p:nvPr/>
+        </p:nvSpPr>
+        <p:spPr>
+          <a:xfrm>
+            <a:off x="566928" y="4389120"/>
+            <a:ext cx="5373472" cy="1225296"/>
+          </a:xfrm>
+          <a:prstGeom prst="roundRect">
+            <a:avLst>
+              <a:gd name="adj" fmla="val 5224"/>
+            </a:avLst>
+          </a:prstGeom>
+          <a:solidFill>
+            <a:srgbClr val="EDF2FD"/>
+          </a:solidFill>
+          <a:ln w="12700">
+            <a:solidFill>
+              <a:srgbClr val="1A56DB"/>
+            </a:solidFill>
+            <a:prstDash val="solid"/>
+          </a:ln>
+        </p:spPr>
+      </p:sp>
+      <p:sp>
+        <p:nvSpPr>
+          <p:cNvPr id="24" name="Text 22"/>
+          <p:cNvSpPr/>
+          <p:nvPr/>
+        </p:nvSpPr>
+        <p:spPr>
+          <a:xfrm>
+            <a:off x="822960" y="4572000"/>
+            <a:ext cx="1828800" cy="256032"/>
+          </a:xfrm>
+          <a:prstGeom prst="rect">
+            <a:avLst/>
+          </a:prstGeom>
+          <a:noFill/>
+          <a:ln/>
+        </p:spPr>
+        <p:txBody>
+          <a:bodyPr wrap="square" lIns="0" tIns="0" rIns="0" bIns="0" rtlCol="0" anchor="t"/>
+          <a:lstStyle/>
+          <a:p>
+            <a:pPr algn="l" indent="0" marL="0">
+              <a:buNone/>
+            </a:pPr>
+            <a:r>
+              <a:rPr lang="en-US" sz="1000" b="1" spc="140" kern="0" dirty="0">
+                <a:solidFill>
+                  <a:srgbClr val="1A56DB"/>
+                </a:solidFill>
+                <a:latin typeface="Segoe UI" pitchFamily="34" charset="0"/>
+                <a:ea typeface="Segoe UI" pitchFamily="34" charset="-122"/>
+                <a:cs typeface="Segoe UI" pitchFamily="34" charset="-120"/>
+              </a:rPr>
+              <a:t>PAGE 1</a:t>
+            </a:r>
+            <a:endParaRPr lang="en-US" sz="1000" dirty="0"/>
+          </a:p>
+        </p:txBody>
+      </p:sp>
+      <p:sp>
+        <p:nvSpPr>
+          <p:cNvPr id="25" name="Text 23"/>
+          <p:cNvSpPr/>
+          <p:nvPr/>
+        </p:nvSpPr>
+        <p:spPr>
+          <a:xfrm>
+            <a:off x="822960" y="4919472"/>
+            <a:ext cx="2194560" cy="457200"/>
+          </a:xfrm>
+          <a:prstGeom prst="rect">
+            <a:avLst/>
+          </a:prstGeom>
+          <a:noFill/>
+          <a:ln/>
+        </p:spPr>
+        <p:txBody>
+          <a:bodyPr wrap="square" lIns="0" tIns="0" rIns="0" bIns="0" rtlCol="0" anchor="t"/>
+          <a:lstStyle/>
+          <a:p>
+            <a:pPr algn="l" indent="0" marL="0">
+              <a:buNone/>
+            </a:pPr>
+            <a:r>
+              <a:rPr lang="en-US" sz="2400" b="1" dirty="0">
+                <a:solidFill>
+                  <a:srgbClr val="12161F"/>
+                </a:solidFill>
+                <a:latin typeface="Segoe UI" pitchFamily="34" charset="0"/>
+                <a:ea typeface="Segoe UI" pitchFamily="34" charset="-122"/>
+                <a:cs typeface="Segoe UI" pitchFamily="34" charset="-120"/>
+              </a:rPr>
+              <a:t>you</a:t>
+            </a:r>
+            <a:endParaRPr lang="en-US" sz="2400" dirty="0"/>
+          </a:p>
+        </p:txBody>
+      </p:sp>
+      <p:sp>
+        <p:nvSpPr>
+          <p:cNvPr id="26" name="Text 24"/>
+          <p:cNvSpPr/>
+          <p:nvPr/>
+        </p:nvSpPr>
+        <p:spPr>
+          <a:xfrm>
+            <a:off x="3654400" y="4919472"/>
+            <a:ext cx="2029968" cy="457200"/>
+          </a:xfrm>
+          <a:prstGeom prst="rect">
+            <a:avLst/>
+          </a:prstGeom>
+          <a:noFill/>
+          <a:ln/>
+        </p:spPr>
+        <p:txBody>
+          <a:bodyPr wrap="square" lIns="0" tIns="0" rIns="0" bIns="0" rtlCol="0" anchor="ctr"/>
+          <a:lstStyle/>
+          <a:p>
+            <a:pPr algn="r" indent="0" marL="0">
+              <a:buNone/>
+            </a:pPr>
+            <a:r>
+              <a:rPr lang="en-US" sz="1300" dirty="0">
+                <a:solidFill>
+                  <a:srgbClr val="5B6472"/>
+                </a:solidFill>
+                <a:latin typeface="Segoe UI" pitchFamily="34" charset="0"/>
+                <a:ea typeface="Segoe UI" pitchFamily="34" charset="-122"/>
+                <a:cs typeface="Segoe UI" pitchFamily="34" charset="-120"/>
+              </a:rPr>
+              <a:t>escalation only</a:t>
+            </a:r>
+            <a:endParaRPr lang="en-US" sz="1300" dirty="0"/>
+          </a:p>
+        </p:txBody>
+      </p:sp>
+      <p:sp>
+        <p:nvSpPr>
+          <p:cNvPr id="27" name="Shape 25"/>
+          <p:cNvSpPr/>
+          <p:nvPr/>
+        </p:nvSpPr>
+        <p:spPr>
+          <a:xfrm>
+            <a:off x="6251296" y="4389120"/>
+            <a:ext cx="5373472" cy="1225296"/>
+          </a:xfrm>
+          <a:prstGeom prst="roundRect">
+            <a:avLst>
+              <a:gd name="adj" fmla="val 5224"/>
+            </a:avLst>
+          </a:prstGeom>
+          <a:solidFill>
+            <a:srgbClr val="F5F7FA"/>
+          </a:solidFill>
+          <a:ln w="12700">
+            <a:solidFill>
+              <a:srgbClr val="DDE2EA"/>
+            </a:solidFill>
+            <a:prstDash val="solid"/>
+          </a:ln>
+        </p:spPr>
+      </p:sp>
+      <p:sp>
+        <p:nvSpPr>
+          <p:cNvPr id="28" name="Text 26"/>
+          <p:cNvSpPr/>
+          <p:nvPr/>
+        </p:nvSpPr>
+        <p:spPr>
+          <a:xfrm>
+            <a:off x="6507328" y="4572000"/>
+            <a:ext cx="1828800" cy="256032"/>
+          </a:xfrm>
+          <a:prstGeom prst="rect">
+            <a:avLst/>
+          </a:prstGeom>
+          <a:noFill/>
+          <a:ln/>
+        </p:spPr>
+        <p:txBody>
+          <a:bodyPr wrap="square" lIns="0" tIns="0" rIns="0" bIns="0" rtlCol="0" anchor="t"/>
+          <a:lstStyle/>
+          <a:p>
+            <a:pPr algn="l" indent="0" marL="0">
+              <a:buNone/>
+            </a:pPr>
+            <a:r>
+              <a:rPr lang="en-US" sz="1000" b="1" spc="140" kern="0" dirty="0">
+                <a:solidFill>
+                  <a:srgbClr val="5B6472"/>
+                </a:solidFill>
+                <a:latin typeface="Segoe UI" pitchFamily="34" charset="0"/>
+                <a:ea typeface="Segoe UI" pitchFamily="34" charset="-122"/>
+                <a:cs typeface="Segoe UI" pitchFamily="34" charset="-120"/>
+              </a:rPr>
+              <a:t>PAGE 2</a:t>
+            </a:r>
+            <a:endParaRPr lang="en-US" sz="1000" dirty="0"/>
+          </a:p>
+        </p:txBody>
+      </p:sp>
+      <p:sp>
+        <p:nvSpPr>
+          <p:cNvPr id="29" name="Text 27"/>
+          <p:cNvSpPr/>
+          <p:nvPr/>
+        </p:nvSpPr>
+        <p:spPr>
+          <a:xfrm>
+            <a:off x="6507328" y="4919472"/>
+            <a:ext cx="3291840" cy="457200"/>
+          </a:xfrm>
+          <a:prstGeom prst="rect">
+            <a:avLst/>
+          </a:prstGeom>
+          <a:noFill/>
+          <a:ln/>
+        </p:spPr>
+        <p:txBody>
+          <a:bodyPr wrap="square" lIns="0" tIns="0" rIns="0" bIns="0" rtlCol="0" anchor="t"/>
+          <a:lstStyle/>
+          <a:p>
+            <a:pPr algn="l" indent="0" marL="0">
+              <a:buNone/>
+            </a:pPr>
+            <a:r>
+              <a:rPr lang="en-US" sz="2400" b="1" dirty="0">
+                <a:solidFill>
+                  <a:srgbClr val="12161F"/>
+                </a:solidFill>
+                <a:latin typeface="Segoe UI" pitchFamily="34" charset="0"/>
+                <a:ea typeface="Segoe UI" pitchFamily="34" charset="-122"/>
+                <a:cs typeface="Segoe UI" pitchFamily="34" charset="-120"/>
+              </a:rPr>
+              <a:t>agent + policy</a:t>
+            </a:r>
+            <a:endParaRPr lang="en-US" sz="2400" dirty="0"/>
+          </a:p>
+        </p:txBody>
+      </p:sp>
+      <p:sp>
+        <p:nvSpPr>
+          <p:cNvPr id="30" name="Text 28"/>
+          <p:cNvSpPr/>
+          <p:nvPr/>
+        </p:nvSpPr>
+        <p:spPr>
+          <a:xfrm>
+            <a:off x="9338767" y="4919472"/>
+            <a:ext cx="2029968" cy="457200"/>
+          </a:xfrm>
+          <a:prstGeom prst="rect">
+            <a:avLst/>
+          </a:prstGeom>
+          <a:noFill/>
+          <a:ln/>
+        </p:spPr>
+        <p:txBody>
+          <a:bodyPr wrap="square" lIns="0" tIns="0" rIns="0" bIns="0" rtlCol="0" anchor="ctr"/>
+          <a:lstStyle/>
+          <a:p>
+            <a:pPr algn="r" indent="0" marL="0">
+              <a:buNone/>
+            </a:pPr>
+            <a:r>
+              <a:rPr lang="en-US" sz="1300" dirty="0">
+                <a:solidFill>
+                  <a:srgbClr val="5B6472"/>
+                </a:solidFill>
+                <a:latin typeface="Segoe UI" pitchFamily="34" charset="0"/>
+                <a:ea typeface="Segoe UI" pitchFamily="34" charset="-122"/>
+                <a:cs typeface="Segoe UI" pitchFamily="34" charset="-120"/>
+              </a:rPr>
+              <a:t>routine settlement</a:t>
+            </a:r>
+            <a:endParaRPr lang="en-US" sz="1300" dirty="0"/>
+          </a:p>
+        </p:txBody>
+      </p:sp>
+      <p:sp>
+        <p:nvSpPr>
+          <p:cNvPr id="31" name="Text 29"/>
+          <p:cNvSpPr/>
+          <p:nvPr/>
+        </p:nvSpPr>
+        <p:spPr>
+          <a:xfrm>
+            <a:off x="566928" y="5815584"/>
+            <a:ext cx="11057839" cy="310896"/>
+          </a:xfrm>
+          <a:prstGeom prst="rect">
+            <a:avLst/>
+          </a:prstGeom>
+          <a:noFill/>
+          <a:ln/>
+        </p:spPr>
+        <p:txBody>
+          <a:bodyPr wrap="square" lIns="0" tIns="0" rIns="0" bIns="0" rtlCol="0" anchor="t"/>
+          <a:lstStyle/>
+          <a:p>
+            <a:pPr algn="ctr" indent="0" marL="0">
+              <a:buNone/>
+            </a:pPr>
+            <a:r>
+              <a:rPr lang="en-US" sz="1400" dirty="0">
+                <a:solidFill>
+                  <a:srgbClr val="5B6472"/>
+                </a:solidFill>
+                <a:latin typeface="Segoe UI" pitchFamily="34" charset="0"/>
+                <a:ea typeface="Segoe UI" pitchFamily="34" charset="-122"/>
+                <a:cs typeface="Segoe UI" pitchFamily="34" charset="-120"/>
+              </a:rPr>
+              <a:t>One address. Two levels of authority.</a:t>
+            </a:r>
+            <a:endParaRPr lang="en-US" sz="1400" dirty="0"/>
+          </a:p>
+        </p:txBody>
+      </p:sp>
     </p:spTree>
   </p:cSld>
   <p:clrMapOvr>
@@ -1322,30 +3865,1067 @@
           <a:chExt cx="0" cy="0"/>
         </a:xfrm>
       </p:grpSpPr>
-      <p:pic>
-        <p:nvPicPr>
-          <p:cNvPr id="2" name="Image 0" descr="C:\Accumulate_Stuff\certen\independant_validator\docs\demo\slides\carp-panel-brief-3.jpg">    </p:cNvPr>
-          <p:cNvPicPr>
-            <a:picLocks noChangeAspect="1"/>
-          </p:cNvPicPr>
-          <p:nvPr/>
-        </p:nvPicPr>
-        <p:blipFill>
-          <a:blip r:embed="rId1"/>
-          <a:stretch>
-            <a:fillRect/>
-          </a:stretch>
-        </p:blipFill>
-        <p:spPr>
-          <a:xfrm>
-            <a:off x="0" y="0"/>
-            <a:ext cx="12191695" cy="6858000"/>
-          </a:xfrm>
-          <a:prstGeom prst="rect">
-            <a:avLst/>
-          </a:prstGeom>
-        </p:spPr>
-      </p:pic>
+      <p:sp>
+        <p:nvSpPr>
+          <p:cNvPr id="2" name="Shape 0"/>
+          <p:cNvSpPr/>
+          <p:nvPr/>
+        </p:nvSpPr>
+        <p:spPr>
+          <a:xfrm>
+            <a:off x="0" y="6766560"/>
+            <a:ext cx="12191695" cy="91440"/>
+          </a:xfrm>
+          <a:prstGeom prst="rect">
+            <a:avLst/>
+          </a:prstGeom>
+          <a:solidFill>
+            <a:srgbClr val="1A56DB"/>
+          </a:solidFill>
+          <a:ln w="12700">
+            <a:solidFill>
+              <a:srgbClr val="333333"/>
+            </a:solidFill>
+            <a:prstDash val="solid"/>
+          </a:ln>
+        </p:spPr>
+      </p:sp>
+      <p:sp>
+        <p:nvSpPr>
+          <p:cNvPr id="3" name="Text 1"/>
+          <p:cNvSpPr/>
+          <p:nvPr/>
+        </p:nvSpPr>
+        <p:spPr>
+          <a:xfrm>
+            <a:off x="566928" y="402336"/>
+            <a:ext cx="11057839" cy="201168"/>
+          </a:xfrm>
+          <a:prstGeom prst="rect">
+            <a:avLst/>
+          </a:prstGeom>
+          <a:noFill/>
+          <a:ln/>
+        </p:spPr>
+        <p:txBody>
+          <a:bodyPr wrap="square" lIns="0" tIns="0" rIns="0" bIns="0" rtlCol="0" anchor="t"/>
+          <a:lstStyle/>
+          <a:p>
+            <a:pPr algn="l" indent="0" marL="0">
+              <a:buNone/>
+            </a:pPr>
+            <a:r>
+              <a:rPr lang="en-US" sz="900" b="1" spc="160" kern="0" dirty="0">
+                <a:solidFill>
+                  <a:srgbClr val="1A56DB"/>
+                </a:solidFill>
+                <a:latin typeface="Segoe UI" pitchFamily="34" charset="0"/>
+                <a:ea typeface="Segoe UI" pitchFamily="34" charset="-122"/>
+                <a:cs typeface="Segoe UI" pitchFamily="34" charset="-120"/>
+              </a:rPr>
+              <a:t>THE SHAPE</a:t>
+            </a:r>
+            <a:endParaRPr lang="en-US" sz="900" dirty="0"/>
+          </a:p>
+        </p:txBody>
+      </p:sp>
+      <p:sp>
+        <p:nvSpPr>
+          <p:cNvPr id="4" name="Text 2"/>
+          <p:cNvSpPr/>
+          <p:nvPr/>
+        </p:nvSpPr>
+        <p:spPr>
+          <a:xfrm>
+            <a:off x="566928" y="640080"/>
+            <a:ext cx="11057839" cy="420624"/>
+          </a:xfrm>
+          <a:prstGeom prst="rect">
+            <a:avLst/>
+          </a:prstGeom>
+          <a:noFill/>
+          <a:ln/>
+        </p:spPr>
+        <p:txBody>
+          <a:bodyPr wrap="square" lIns="0" tIns="0" rIns="0" bIns="0" rtlCol="0" anchor="t"/>
+          <a:lstStyle/>
+          <a:p>
+            <a:pPr algn="l" indent="0" marL="0">
+              <a:buNone/>
+            </a:pPr>
+            <a:r>
+              <a:rPr lang="en-US" sz="2300" b="1" dirty="0">
+                <a:solidFill>
+                  <a:srgbClr val="12161F"/>
+                </a:solidFill>
+                <a:latin typeface="Segoe UI" pitchFamily="34" charset="0"/>
+                <a:ea typeface="Segoe UI" pitchFamily="34" charset="-122"/>
+                <a:cs typeface="Segoe UI" pitchFamily="34" charset="-120"/>
+              </a:rPr>
+              <a:t>Routine below. You above.</a:t>
+            </a:r>
+            <a:endParaRPr lang="en-US" sz="2300" dirty="0"/>
+          </a:p>
+        </p:txBody>
+      </p:sp>
+      <p:sp>
+        <p:nvSpPr>
+          <p:cNvPr id="5" name="Shape 3"/>
+          <p:cNvSpPr/>
+          <p:nvPr/>
+        </p:nvSpPr>
+        <p:spPr>
+          <a:xfrm>
+            <a:off x="566928" y="1682496"/>
+            <a:ext cx="64008" cy="4096512"/>
+          </a:xfrm>
+          <a:prstGeom prst="rect">
+            <a:avLst/>
+          </a:prstGeom>
+          <a:solidFill>
+            <a:srgbClr val="1A56DB"/>
+          </a:solidFill>
+          <a:ln w="12700">
+            <a:solidFill>
+              <a:srgbClr val="333333"/>
+            </a:solidFill>
+            <a:prstDash val="solid"/>
+          </a:ln>
+        </p:spPr>
+      </p:sp>
+      <p:sp>
+        <p:nvSpPr>
+          <p:cNvPr id="6" name="Text 4"/>
+          <p:cNvSpPr/>
+          <p:nvPr/>
+        </p:nvSpPr>
+        <p:spPr>
+          <a:xfrm>
+            <a:off x="566928" y="1371600"/>
+            <a:ext cx="3657600" cy="237744"/>
+          </a:xfrm>
+          <a:prstGeom prst="rect">
+            <a:avLst/>
+          </a:prstGeom>
+          <a:noFill/>
+          <a:ln/>
+        </p:spPr>
+        <p:txBody>
+          <a:bodyPr wrap="square" lIns="0" tIns="0" rIns="0" bIns="0" rtlCol="0" anchor="t"/>
+          <a:lstStyle/>
+          <a:p>
+            <a:pPr algn="l" indent="0" marL="0">
+              <a:buNone/>
+            </a:pPr>
+            <a:r>
+              <a:rPr lang="en-US" sz="1050" b="1" dirty="0">
+                <a:solidFill>
+                  <a:srgbClr val="1A56DB"/>
+                </a:solidFill>
+                <a:latin typeface="Consolas" pitchFamily="34" charset="0"/>
+                <a:ea typeface="Consolas" pitchFamily="34" charset="-122"/>
+                <a:cs typeface="Consolas" pitchFamily="34" charset="-120"/>
+              </a:rPr>
+              <a:t>acc://panel.acme/book</a:t>
+            </a:r>
+            <a:endParaRPr lang="en-US" sz="1050" dirty="0"/>
+          </a:p>
+        </p:txBody>
+      </p:sp>
+      <p:sp>
+        <p:nvSpPr>
+          <p:cNvPr id="7" name="Shape 5"/>
+          <p:cNvSpPr/>
+          <p:nvPr/>
+        </p:nvSpPr>
+        <p:spPr>
+          <a:xfrm>
+            <a:off x="786384" y="1682496"/>
+            <a:ext cx="6858000" cy="1691640"/>
+          </a:xfrm>
+          <a:prstGeom prst="roundRect">
+            <a:avLst>
+              <a:gd name="adj" fmla="val 3784"/>
+            </a:avLst>
+          </a:prstGeom>
+          <a:solidFill>
+            <a:srgbClr val="EDF2FD"/>
+          </a:solidFill>
+          <a:ln w="12700">
+            <a:solidFill>
+              <a:srgbClr val="1A56DB"/>
+            </a:solidFill>
+            <a:prstDash val="solid"/>
+          </a:ln>
+        </p:spPr>
+      </p:sp>
+      <p:sp>
+        <p:nvSpPr>
+          <p:cNvPr id="8" name="Text 6"/>
+          <p:cNvSpPr/>
+          <p:nvPr/>
+        </p:nvSpPr>
+        <p:spPr>
+          <a:xfrm>
+            <a:off x="1060704" y="1901952"/>
+            <a:ext cx="1097280" cy="256032"/>
+          </a:xfrm>
+          <a:prstGeom prst="rect">
+            <a:avLst/>
+          </a:prstGeom>
+          <a:noFill/>
+          <a:ln/>
+        </p:spPr>
+        <p:txBody>
+          <a:bodyPr wrap="square" lIns="0" tIns="0" rIns="0" bIns="0" rtlCol="0" anchor="t"/>
+          <a:lstStyle/>
+          <a:p>
+            <a:pPr algn="l" indent="0" marL="0">
+              <a:buNone/>
+            </a:pPr>
+            <a:r>
+              <a:rPr lang="en-US" sz="1050" b="1" spc="140" kern="0" dirty="0">
+                <a:solidFill>
+                  <a:srgbClr val="1A56DB"/>
+                </a:solidFill>
+                <a:latin typeface="Segoe UI" pitchFamily="34" charset="0"/>
+                <a:ea typeface="Segoe UI" pitchFamily="34" charset="-122"/>
+                <a:cs typeface="Segoe UI" pitchFamily="34" charset="-120"/>
+              </a:rPr>
+              <a:t>PAGE 1</a:t>
+            </a:r>
+            <a:endParaRPr lang="en-US" sz="1050" dirty="0"/>
+          </a:p>
+        </p:txBody>
+      </p:sp>
+      <p:sp>
+        <p:nvSpPr>
+          <p:cNvPr id="9" name="Shape 7"/>
+          <p:cNvSpPr/>
+          <p:nvPr/>
+        </p:nvSpPr>
+        <p:spPr>
+          <a:xfrm>
+            <a:off x="2212848" y="1865376"/>
+            <a:ext cx="1463040" cy="292608"/>
+          </a:xfrm>
+          <a:prstGeom prst="roundRect">
+            <a:avLst>
+              <a:gd name="adj" fmla="val 156250"/>
+            </a:avLst>
+          </a:prstGeom>
+          <a:solidFill>
+            <a:srgbClr val="1A56DB"/>
+          </a:solidFill>
+          <a:ln w="12700">
+            <a:solidFill>
+              <a:srgbClr val="1A56DB"/>
+            </a:solidFill>
+            <a:prstDash val="solid"/>
+          </a:ln>
+        </p:spPr>
+      </p:sp>
+      <p:sp>
+        <p:nvSpPr>
+          <p:cNvPr id="10" name="Text 8"/>
+          <p:cNvSpPr/>
+          <p:nvPr/>
+        </p:nvSpPr>
+        <p:spPr>
+          <a:xfrm>
+            <a:off x="2212848" y="1865376"/>
+            <a:ext cx="1463040" cy="292608"/>
+          </a:xfrm>
+          <a:prstGeom prst="rect">
+            <a:avLst/>
+          </a:prstGeom>
+          <a:noFill/>
+          <a:ln/>
+        </p:spPr>
+        <p:txBody>
+          <a:bodyPr wrap="square" lIns="0" tIns="0" rIns="0" bIns="0" rtlCol="0" anchor="ctr"/>
+          <a:lstStyle/>
+          <a:p>
+            <a:pPr algn="ctr" indent="0" marL="0">
+              <a:buNone/>
+            </a:pPr>
+            <a:r>
+              <a:rPr lang="en-US" sz="850" b="1" dirty="0">
+                <a:solidFill>
+                  <a:srgbClr val="FFFFFF"/>
+                </a:solidFill>
+                <a:latin typeface="Segoe UI" pitchFamily="34" charset="0"/>
+                <a:ea typeface="Segoe UI" pitchFamily="34" charset="-122"/>
+                <a:cs typeface="Segoe UI" pitchFamily="34" charset="-120"/>
+              </a:rPr>
+              <a:t>HIGHER PRIORITY</a:t>
+            </a:r>
+            <a:endParaRPr lang="en-US" sz="850" dirty="0"/>
+          </a:p>
+        </p:txBody>
+      </p:sp>
+      <p:sp>
+        <p:nvSpPr>
+          <p:cNvPr id="11" name="Text 9"/>
+          <p:cNvSpPr/>
+          <p:nvPr/>
+        </p:nvSpPr>
+        <p:spPr>
+          <a:xfrm>
+            <a:off x="1060704" y="2377440"/>
+            <a:ext cx="2194560" cy="512064"/>
+          </a:xfrm>
+          <a:prstGeom prst="rect">
+            <a:avLst/>
+          </a:prstGeom>
+          <a:noFill/>
+          <a:ln/>
+        </p:spPr>
+        <p:txBody>
+          <a:bodyPr wrap="square" lIns="0" tIns="0" rIns="0" bIns="0" rtlCol="0" anchor="t"/>
+          <a:lstStyle/>
+          <a:p>
+            <a:pPr algn="l" indent="0" marL="0">
+              <a:buNone/>
+            </a:pPr>
+            <a:r>
+              <a:rPr lang="en-US" sz="2700" b="1" dirty="0">
+                <a:solidFill>
+                  <a:srgbClr val="12161F"/>
+                </a:solidFill>
+                <a:latin typeface="Segoe UI" pitchFamily="34" charset="0"/>
+                <a:ea typeface="Segoe UI" pitchFamily="34" charset="-122"/>
+                <a:cs typeface="Segoe UI" pitchFamily="34" charset="-120"/>
+              </a:rPr>
+              <a:t>you</a:t>
+            </a:r>
+            <a:endParaRPr lang="en-US" sz="2700" dirty="0"/>
+          </a:p>
+        </p:txBody>
+      </p:sp>
+      <p:sp>
+        <p:nvSpPr>
+          <p:cNvPr id="12" name="Text 10"/>
+          <p:cNvSpPr/>
+          <p:nvPr/>
+        </p:nvSpPr>
+        <p:spPr>
+          <a:xfrm>
+            <a:off x="1060704" y="2980944"/>
+            <a:ext cx="3291840" cy="274320"/>
+          </a:xfrm>
+          <a:prstGeom prst="rect">
+            <a:avLst/>
+          </a:prstGeom>
+          <a:noFill/>
+          <a:ln/>
+        </p:spPr>
+        <p:txBody>
+          <a:bodyPr wrap="square" lIns="0" tIns="0" rIns="0" bIns="0" rtlCol="0" anchor="t"/>
+          <a:lstStyle/>
+          <a:p>
+            <a:pPr algn="l" indent="0" marL="0">
+              <a:buNone/>
+            </a:pPr>
+            <a:r>
+              <a:rPr lang="en-US" sz="1250" dirty="0">
+                <a:solidFill>
+                  <a:srgbClr val="5B6472"/>
+                </a:solidFill>
+                <a:latin typeface="Segoe UI" pitchFamily="34" charset="0"/>
+                <a:ea typeface="Segoe UI" pitchFamily="34" charset="-122"/>
+                <a:cs typeface="Segoe UI" pitchFamily="34" charset="-120"/>
+              </a:rPr>
+              <a:t>1-of-1  ·  escalation only</a:t>
+            </a:r>
+            <a:endParaRPr lang="en-US" sz="1250" dirty="0"/>
+          </a:p>
+        </p:txBody>
+      </p:sp>
+      <p:sp>
+        <p:nvSpPr>
+          <p:cNvPr id="13" name="Shape 11"/>
+          <p:cNvSpPr/>
+          <p:nvPr/>
+        </p:nvSpPr>
+        <p:spPr>
+          <a:xfrm>
+            <a:off x="786384" y="4087368"/>
+            <a:ext cx="6858000" cy="1691640"/>
+          </a:xfrm>
+          <a:prstGeom prst="roundRect">
+            <a:avLst>
+              <a:gd name="adj" fmla="val 3784"/>
+            </a:avLst>
+          </a:prstGeom>
+          <a:solidFill>
+            <a:srgbClr val="F5F7FA"/>
+          </a:solidFill>
+          <a:ln w="12700">
+            <a:solidFill>
+              <a:srgbClr val="DDE2EA"/>
+            </a:solidFill>
+            <a:prstDash val="solid"/>
+          </a:ln>
+        </p:spPr>
+      </p:sp>
+      <p:sp>
+        <p:nvSpPr>
+          <p:cNvPr id="14" name="Text 12"/>
+          <p:cNvSpPr/>
+          <p:nvPr/>
+        </p:nvSpPr>
+        <p:spPr>
+          <a:xfrm>
+            <a:off x="1060704" y="4306824"/>
+            <a:ext cx="1097280" cy="256032"/>
+          </a:xfrm>
+          <a:prstGeom prst="rect">
+            <a:avLst/>
+          </a:prstGeom>
+          <a:noFill/>
+          <a:ln/>
+        </p:spPr>
+        <p:txBody>
+          <a:bodyPr wrap="square" lIns="0" tIns="0" rIns="0" bIns="0" rtlCol="0" anchor="t"/>
+          <a:lstStyle/>
+          <a:p>
+            <a:pPr algn="l" indent="0" marL="0">
+              <a:buNone/>
+            </a:pPr>
+            <a:r>
+              <a:rPr lang="en-US" sz="1050" b="1" spc="140" kern="0" dirty="0">
+                <a:solidFill>
+                  <a:srgbClr val="5B6472"/>
+                </a:solidFill>
+                <a:latin typeface="Segoe UI" pitchFamily="34" charset="0"/>
+                <a:ea typeface="Segoe UI" pitchFamily="34" charset="-122"/>
+                <a:cs typeface="Segoe UI" pitchFamily="34" charset="-120"/>
+              </a:rPr>
+              <a:t>PAGE 2</a:t>
+            </a:r>
+            <a:endParaRPr lang="en-US" sz="1050" dirty="0"/>
+          </a:p>
+        </p:txBody>
+      </p:sp>
+      <p:sp>
+        <p:nvSpPr>
+          <p:cNvPr id="15" name="Shape 13"/>
+          <p:cNvSpPr/>
+          <p:nvPr/>
+        </p:nvSpPr>
+        <p:spPr>
+          <a:xfrm>
+            <a:off x="2212848" y="4270248"/>
+            <a:ext cx="1463040" cy="292608"/>
+          </a:xfrm>
+          <a:prstGeom prst="roundRect">
+            <a:avLst>
+              <a:gd name="adj" fmla="val 156250"/>
+            </a:avLst>
+          </a:prstGeom>
+          <a:solidFill>
+            <a:srgbClr val="FFFFFF"/>
+          </a:solidFill>
+          <a:ln w="12700">
+            <a:solidFill>
+              <a:srgbClr val="5B6472"/>
+            </a:solidFill>
+            <a:prstDash val="solid"/>
+          </a:ln>
+        </p:spPr>
+      </p:sp>
+      <p:sp>
+        <p:nvSpPr>
+          <p:cNvPr id="16" name="Text 14"/>
+          <p:cNvSpPr/>
+          <p:nvPr/>
+        </p:nvSpPr>
+        <p:spPr>
+          <a:xfrm>
+            <a:off x="2212848" y="4270248"/>
+            <a:ext cx="1463040" cy="292608"/>
+          </a:xfrm>
+          <a:prstGeom prst="rect">
+            <a:avLst/>
+          </a:prstGeom>
+          <a:noFill/>
+          <a:ln/>
+        </p:spPr>
+        <p:txBody>
+          <a:bodyPr wrap="square" lIns="0" tIns="0" rIns="0" bIns="0" rtlCol="0" anchor="ctr"/>
+          <a:lstStyle/>
+          <a:p>
+            <a:pPr algn="ctr" indent="0" marL="0">
+              <a:buNone/>
+            </a:pPr>
+            <a:r>
+              <a:rPr lang="en-US" sz="850" b="1" dirty="0">
+                <a:solidFill>
+                  <a:srgbClr val="5B6472"/>
+                </a:solidFill>
+                <a:latin typeface="Segoe UI" pitchFamily="34" charset="0"/>
+                <a:ea typeface="Segoe UI" pitchFamily="34" charset="-122"/>
+                <a:cs typeface="Segoe UI" pitchFamily="34" charset="-120"/>
+              </a:rPr>
+              <a:t>LOWER PRIORITY</a:t>
+            </a:r>
+            <a:endParaRPr lang="en-US" sz="850" dirty="0"/>
+          </a:p>
+        </p:txBody>
+      </p:sp>
+      <p:sp>
+        <p:nvSpPr>
+          <p:cNvPr id="17" name="Text 15"/>
+          <p:cNvSpPr/>
+          <p:nvPr/>
+        </p:nvSpPr>
+        <p:spPr>
+          <a:xfrm>
+            <a:off x="1060704" y="4782312"/>
+            <a:ext cx="3840480" cy="512064"/>
+          </a:xfrm>
+          <a:prstGeom prst="rect">
+            <a:avLst/>
+          </a:prstGeom>
+          <a:noFill/>
+          <a:ln/>
+        </p:spPr>
+        <p:txBody>
+          <a:bodyPr wrap="square" lIns="0" tIns="0" rIns="0" bIns="0" rtlCol="0" anchor="t"/>
+          <a:lstStyle/>
+          <a:p>
+            <a:pPr algn="l" indent="0" marL="0">
+              <a:buNone/>
+            </a:pPr>
+            <a:r>
+              <a:rPr lang="en-US" sz="2700" b="1" dirty="0">
+                <a:solidFill>
+                  <a:srgbClr val="12161F"/>
+                </a:solidFill>
+                <a:latin typeface="Segoe UI" pitchFamily="34" charset="0"/>
+                <a:ea typeface="Segoe UI" pitchFamily="34" charset="-122"/>
+                <a:cs typeface="Segoe UI" pitchFamily="34" charset="-120"/>
+              </a:rPr>
+              <a:t>agent + policy</a:t>
+            </a:r>
+            <a:endParaRPr lang="en-US" sz="2700" dirty="0"/>
+          </a:p>
+        </p:txBody>
+      </p:sp>
+      <p:sp>
+        <p:nvSpPr>
+          <p:cNvPr id="18" name="Text 16"/>
+          <p:cNvSpPr/>
+          <p:nvPr/>
+        </p:nvSpPr>
+        <p:spPr>
+          <a:xfrm>
+            <a:off x="1060704" y="5385816"/>
+            <a:ext cx="3291840" cy="274320"/>
+          </a:xfrm>
+          <a:prstGeom prst="rect">
+            <a:avLst/>
+          </a:prstGeom>
+          <a:noFill/>
+          <a:ln/>
+        </p:spPr>
+        <p:txBody>
+          <a:bodyPr wrap="square" lIns="0" tIns="0" rIns="0" bIns="0" rtlCol="0" anchor="t"/>
+          <a:lstStyle/>
+          <a:p>
+            <a:pPr algn="l" indent="0" marL="0">
+              <a:buNone/>
+            </a:pPr>
+            <a:r>
+              <a:rPr lang="en-US" sz="1250" dirty="0">
+                <a:solidFill>
+                  <a:srgbClr val="5B6472"/>
+                </a:solidFill>
+                <a:latin typeface="Segoe UI" pitchFamily="34" charset="0"/>
+                <a:ea typeface="Segoe UI" pitchFamily="34" charset="-122"/>
+                <a:cs typeface="Segoe UI" pitchFamily="34" charset="-120"/>
+              </a:rPr>
+              <a:t>2-of-2  ·  routine settlement</a:t>
+            </a:r>
+            <a:endParaRPr lang="en-US" sz="1250" dirty="0"/>
+          </a:p>
+        </p:txBody>
+      </p:sp>
+      <p:sp>
+        <p:nvSpPr>
+          <p:cNvPr id="19" name="Shape 17"/>
+          <p:cNvSpPr/>
+          <p:nvPr/>
+        </p:nvSpPr>
+        <p:spPr>
+          <a:xfrm>
+            <a:off x="5084064" y="3502152"/>
+            <a:ext cx="0" cy="521208"/>
+          </a:xfrm>
+          <a:prstGeom prst="line">
+            <a:avLst/>
+          </a:prstGeom>
+          <a:noFill/>
+          <a:ln w="25400">
+            <a:solidFill>
+              <a:srgbClr val="157F4A"/>
+            </a:solidFill>
+            <a:prstDash val="solid"/>
+            <a:tailEnd type="triangle"/>
+          </a:ln>
+        </p:spPr>
+      </p:sp>
+      <p:sp>
+        <p:nvSpPr>
+          <p:cNvPr id="20" name="Text 18"/>
+          <p:cNvSpPr/>
+          <p:nvPr/>
+        </p:nvSpPr>
+        <p:spPr>
+          <a:xfrm>
+            <a:off x="5212080" y="3611880"/>
+            <a:ext cx="1097280" cy="292608"/>
+          </a:xfrm>
+          <a:prstGeom prst="rect">
+            <a:avLst/>
+          </a:prstGeom>
+          <a:noFill/>
+          <a:ln/>
+        </p:spPr>
+        <p:txBody>
+          <a:bodyPr wrap="square" lIns="0" tIns="0" rIns="0" bIns="0" rtlCol="0" anchor="ctr"/>
+          <a:lstStyle/>
+          <a:p>
+            <a:pPr algn="l" indent="0" marL="0">
+              <a:buNone/>
+            </a:pPr>
+            <a:r>
+              <a:rPr lang="en-US" sz="1100" b="1" dirty="0">
+                <a:solidFill>
+                  <a:srgbClr val="157F4A"/>
+                </a:solidFill>
+                <a:latin typeface="Segoe UI" pitchFamily="34" charset="0"/>
+                <a:ea typeface="Segoe UI" pitchFamily="34" charset="-122"/>
+                <a:cs typeface="Segoe UI" pitchFamily="34" charset="-120"/>
+              </a:rPr>
+              <a:t>rewrites</a:t>
+            </a:r>
+            <a:endParaRPr lang="en-US" sz="1100" dirty="0"/>
+          </a:p>
+        </p:txBody>
+      </p:sp>
+      <p:sp>
+        <p:nvSpPr>
+          <p:cNvPr id="21" name="Shape 19"/>
+          <p:cNvSpPr/>
+          <p:nvPr/>
+        </p:nvSpPr>
+        <p:spPr>
+          <a:xfrm>
+            <a:off x="6912864" y="3502152"/>
+            <a:ext cx="0" cy="521208"/>
+          </a:xfrm>
+          <a:prstGeom prst="line">
+            <a:avLst/>
+          </a:prstGeom>
+          <a:noFill/>
+          <a:ln w="25400">
+            <a:solidFill>
+              <a:srgbClr val="B42318"/>
+            </a:solidFill>
+            <a:prstDash val="dash"/>
+            <a:headEnd type="triangle"/>
+          </a:ln>
+        </p:spPr>
+      </p:sp>
+      <p:sp>
+        <p:nvSpPr>
+          <p:cNvPr id="22" name="Text 20"/>
+          <p:cNvSpPr/>
+          <p:nvPr/>
+        </p:nvSpPr>
+        <p:spPr>
+          <a:xfrm>
+            <a:off x="5541264" y="3611880"/>
+            <a:ext cx="1225296" cy="292608"/>
+          </a:xfrm>
+          <a:prstGeom prst="rect">
+            <a:avLst/>
+          </a:prstGeom>
+          <a:noFill/>
+          <a:ln/>
+        </p:spPr>
+        <p:txBody>
+          <a:bodyPr wrap="square" lIns="0" tIns="0" rIns="0" bIns="0" rtlCol="0" anchor="ctr"/>
+          <a:lstStyle/>
+          <a:p>
+            <a:pPr algn="r" indent="0" marL="0">
+              <a:buNone/>
+            </a:pPr>
+            <a:r>
+              <a:rPr lang="en-US" sz="1100" b="1" dirty="0">
+                <a:solidFill>
+                  <a:srgbClr val="B42318"/>
+                </a:solidFill>
+                <a:latin typeface="Segoe UI" pitchFamily="34" charset="0"/>
+                <a:ea typeface="Segoe UI" pitchFamily="34" charset="-122"/>
+                <a:cs typeface="Segoe UI" pitchFamily="34" charset="-120"/>
+              </a:rPr>
+              <a:t>cannot</a:t>
+            </a:r>
+            <a:endParaRPr lang="en-US" sz="1100" dirty="0"/>
+          </a:p>
+        </p:txBody>
+      </p:sp>
+      <p:sp>
+        <p:nvSpPr>
+          <p:cNvPr id="23" name="Shape 21"/>
+          <p:cNvSpPr/>
+          <p:nvPr/>
+        </p:nvSpPr>
+        <p:spPr>
+          <a:xfrm>
+            <a:off x="8101584" y="1773936"/>
+            <a:ext cx="45720" cy="969264"/>
+          </a:xfrm>
+          <a:prstGeom prst="rect">
+            <a:avLst/>
+          </a:prstGeom>
+          <a:solidFill>
+            <a:srgbClr val="1A56DB"/>
+          </a:solidFill>
+          <a:ln w="12700">
+            <a:solidFill>
+              <a:srgbClr val="333333"/>
+            </a:solidFill>
+            <a:prstDash val="solid"/>
+          </a:ln>
+        </p:spPr>
+      </p:sp>
+      <p:sp>
+        <p:nvSpPr>
+          <p:cNvPr id="24" name="Text 22"/>
+          <p:cNvSpPr/>
+          <p:nvPr/>
+        </p:nvSpPr>
+        <p:spPr>
+          <a:xfrm>
+            <a:off x="8284464" y="1773936"/>
+            <a:ext cx="3340303" cy="310896"/>
+          </a:xfrm>
+          <a:prstGeom prst="rect">
+            <a:avLst/>
+          </a:prstGeom>
+          <a:noFill/>
+          <a:ln/>
+        </p:spPr>
+        <p:txBody>
+          <a:bodyPr wrap="square" lIns="0" tIns="0" rIns="0" bIns="0" rtlCol="0" anchor="t"/>
+          <a:lstStyle/>
+          <a:p>
+            <a:pPr algn="l" indent="0" marL="0">
+              <a:buNone/>
+            </a:pPr>
+            <a:r>
+              <a:rPr lang="en-US" sz="1400" b="1" dirty="0">
+                <a:solidFill>
+                  <a:srgbClr val="12161F"/>
+                </a:solidFill>
+                <a:latin typeface="Segoe UI" pitchFamily="34" charset="0"/>
+                <a:ea typeface="Segoe UI" pitchFamily="34" charset="-122"/>
+                <a:cs typeface="Segoe UI" pitchFamily="34" charset="-120"/>
+              </a:rPr>
+              <a:t>Either page acts alone</a:t>
+            </a:r>
+            <a:endParaRPr lang="en-US" sz="1400" dirty="0"/>
+          </a:p>
+        </p:txBody>
+      </p:sp>
+      <p:sp>
+        <p:nvSpPr>
+          <p:cNvPr id="25" name="Text 23"/>
+          <p:cNvSpPr/>
+          <p:nvPr/>
+        </p:nvSpPr>
+        <p:spPr>
+          <a:xfrm>
+            <a:off x="8284464" y="2121408"/>
+            <a:ext cx="3340303" cy="548640"/>
+          </a:xfrm>
+          <a:prstGeom prst="rect">
+            <a:avLst/>
+          </a:prstGeom>
+          <a:noFill/>
+          <a:ln/>
+        </p:spPr>
+        <p:txBody>
+          <a:bodyPr wrap="square" lIns="0" tIns="0" rIns="0" bIns="0" rtlCol="0" anchor="t"/>
+          <a:lstStyle/>
+          <a:p>
+            <a:pPr algn="l" indent="0" marL="0">
+              <a:buNone/>
+            </a:pPr>
+            <a:r>
+              <a:rPr lang="en-US" sz="1200" dirty="0">
+                <a:solidFill>
+                  <a:srgbClr val="5B6472"/>
+                </a:solidFill>
+                <a:latin typeface="Segoe UI" pitchFamily="34" charset="0"/>
+                <a:ea typeface="Segoe UI" pitchFamily="34" charset="-122"/>
+                <a:cs typeface="Segoe UI" pitchFamily="34" charset="-120"/>
+              </a:rPr>
+              <a:t>authority sits at book level</a:t>
+            </a:r>
+            <a:endParaRPr lang="en-US" sz="1200" dirty="0"/>
+          </a:p>
+        </p:txBody>
+      </p:sp>
+      <p:sp>
+        <p:nvSpPr>
+          <p:cNvPr id="26" name="Shape 24"/>
+          <p:cNvSpPr/>
+          <p:nvPr/>
+        </p:nvSpPr>
+        <p:spPr>
+          <a:xfrm>
+            <a:off x="8101584" y="3255264"/>
+            <a:ext cx="45720" cy="969264"/>
+          </a:xfrm>
+          <a:prstGeom prst="rect">
+            <a:avLst/>
+          </a:prstGeom>
+          <a:solidFill>
+            <a:srgbClr val="1A56DB"/>
+          </a:solidFill>
+          <a:ln w="12700">
+            <a:solidFill>
+              <a:srgbClr val="333333"/>
+            </a:solidFill>
+            <a:prstDash val="solid"/>
+          </a:ln>
+        </p:spPr>
+      </p:sp>
+      <p:sp>
+        <p:nvSpPr>
+          <p:cNvPr id="27" name="Text 25"/>
+          <p:cNvSpPr/>
+          <p:nvPr/>
+        </p:nvSpPr>
+        <p:spPr>
+          <a:xfrm>
+            <a:off x="8284464" y="3255264"/>
+            <a:ext cx="3340303" cy="310896"/>
+          </a:xfrm>
+          <a:prstGeom prst="rect">
+            <a:avLst/>
+          </a:prstGeom>
+          <a:noFill/>
+          <a:ln/>
+        </p:spPr>
+        <p:txBody>
+          <a:bodyPr wrap="square" lIns="0" tIns="0" rIns="0" bIns="0" rtlCol="0" anchor="t"/>
+          <a:lstStyle/>
+          <a:p>
+            <a:pPr algn="l" indent="0" marL="0">
+              <a:buNone/>
+            </a:pPr>
+            <a:r>
+              <a:rPr lang="en-US" sz="1400" b="1" dirty="0">
+                <a:solidFill>
+                  <a:srgbClr val="12161F"/>
+                </a:solidFill>
+                <a:latin typeface="Segoe UI" pitchFamily="34" charset="0"/>
+                <a:ea typeface="Segoe UI" pitchFamily="34" charset="-122"/>
+                <a:cs typeface="Segoe UI" pitchFamily="34" charset="-120"/>
+              </a:rPr>
+              <a:t>Priority runs one way</a:t>
+            </a:r>
+            <a:endParaRPr lang="en-US" sz="1400" dirty="0"/>
+          </a:p>
+        </p:txBody>
+      </p:sp>
+      <p:sp>
+        <p:nvSpPr>
+          <p:cNvPr id="28" name="Text 26"/>
+          <p:cNvSpPr/>
+          <p:nvPr/>
+        </p:nvSpPr>
+        <p:spPr>
+          <a:xfrm>
+            <a:off x="8284464" y="3602736"/>
+            <a:ext cx="3340303" cy="548640"/>
+          </a:xfrm>
+          <a:prstGeom prst="rect">
+            <a:avLst/>
+          </a:prstGeom>
+          <a:noFill/>
+          <a:ln/>
+        </p:spPr>
+        <p:txBody>
+          <a:bodyPr wrap="square" lIns="0" tIns="0" rIns="0" bIns="0" rtlCol="0" anchor="t"/>
+          <a:lstStyle/>
+          <a:p>
+            <a:pPr algn="l" indent="0" marL="0">
+              <a:buNone/>
+            </a:pPr>
+            <a:r>
+              <a:rPr lang="en-US" sz="1200" dirty="0">
+                <a:solidFill>
+                  <a:srgbClr val="5B6472"/>
+                </a:solidFill>
+                <a:latin typeface="Segoe UI" pitchFamily="34" charset="0"/>
+                <a:ea typeface="Segoe UI" pitchFamily="34" charset="-122"/>
+                <a:cs typeface="Segoe UI" pitchFamily="34" charset="-120"/>
+              </a:rPr>
+              <a:t>only equal-or-higher may modify</a:t>
+            </a:r>
+            <a:endParaRPr lang="en-US" sz="1200" dirty="0"/>
+          </a:p>
+        </p:txBody>
+      </p:sp>
+      <p:sp>
+        <p:nvSpPr>
+          <p:cNvPr id="29" name="Shape 27"/>
+          <p:cNvSpPr/>
+          <p:nvPr/>
+        </p:nvSpPr>
+        <p:spPr>
+          <a:xfrm>
+            <a:off x="8101584" y="4736592"/>
+            <a:ext cx="45720" cy="969264"/>
+          </a:xfrm>
+          <a:prstGeom prst="rect">
+            <a:avLst/>
+          </a:prstGeom>
+          <a:solidFill>
+            <a:srgbClr val="1A56DB"/>
+          </a:solidFill>
+          <a:ln w="12700">
+            <a:solidFill>
+              <a:srgbClr val="333333"/>
+            </a:solidFill>
+            <a:prstDash val="solid"/>
+          </a:ln>
+        </p:spPr>
+      </p:sp>
+      <p:sp>
+        <p:nvSpPr>
+          <p:cNvPr id="30" name="Text 28"/>
+          <p:cNvSpPr/>
+          <p:nvPr/>
+        </p:nvSpPr>
+        <p:spPr>
+          <a:xfrm>
+            <a:off x="8284464" y="4736592"/>
+            <a:ext cx="3340303" cy="310896"/>
+          </a:xfrm>
+          <a:prstGeom prst="rect">
+            <a:avLst/>
+          </a:prstGeom>
+          <a:noFill/>
+          <a:ln/>
+        </p:spPr>
+        <p:txBody>
+          <a:bodyPr wrap="square" lIns="0" tIns="0" rIns="0" bIns="0" rtlCol="0" anchor="t"/>
+          <a:lstStyle/>
+          <a:p>
+            <a:pPr algn="l" indent="0" marL="0">
+              <a:buNone/>
+            </a:pPr>
+            <a:r>
+              <a:rPr lang="en-US" sz="1400" b="1" dirty="0">
+                <a:solidFill>
+                  <a:srgbClr val="12161F"/>
+                </a:solidFill>
+                <a:latin typeface="Segoe UI" pitchFamily="34" charset="0"/>
+                <a:ea typeface="Segoe UI" pitchFamily="34" charset="-122"/>
+                <a:cs typeface="Segoe UI" pitchFamily="34" charset="-120"/>
+              </a:rPr>
+              <a:t>A bad seat is replaceable</a:t>
+            </a:r>
+            <a:endParaRPr lang="en-US" sz="1400" dirty="0"/>
+          </a:p>
+        </p:txBody>
+      </p:sp>
+      <p:sp>
+        <p:nvSpPr>
+          <p:cNvPr id="31" name="Text 29"/>
+          <p:cNvSpPr/>
+          <p:nvPr/>
+        </p:nvSpPr>
+        <p:spPr>
+          <a:xfrm>
+            <a:off x="8284464" y="5084064"/>
+            <a:ext cx="3340303" cy="548640"/>
+          </a:xfrm>
+          <a:prstGeom prst="rect">
+            <a:avLst/>
+          </a:prstGeom>
+          <a:noFill/>
+          <a:ln/>
+        </p:spPr>
+        <p:txBody>
+          <a:bodyPr wrap="square" lIns="0" tIns="0" rIns="0" bIns="0" rtlCol="0" anchor="t"/>
+          <a:lstStyle/>
+          <a:p>
+            <a:pPr algn="l" indent="0" marL="0">
+              <a:buNone/>
+            </a:pPr>
+            <a:r>
+              <a:rPr lang="en-US" sz="1200" dirty="0">
+                <a:solidFill>
+                  <a:srgbClr val="5B6472"/>
+                </a:solidFill>
+                <a:latin typeface="Segoe UI" pitchFamily="34" charset="0"/>
+                <a:ea typeface="Segoe UI" pitchFamily="34" charset="-122"/>
+                <a:cs typeface="Segoe UI" pitchFamily="34" charset="-120"/>
+              </a:rPr>
+              <a:t>it can never replace you</a:t>
+            </a:r>
+            <a:endParaRPr lang="en-US" sz="1200" dirty="0"/>
+          </a:p>
+        </p:txBody>
+      </p:sp>
+      <p:sp>
+        <p:nvSpPr>
+          <p:cNvPr id="32" name="Text 30"/>
+          <p:cNvSpPr/>
+          <p:nvPr/>
+        </p:nvSpPr>
+        <p:spPr>
+          <a:xfrm>
+            <a:off x="566928" y="6163056"/>
+            <a:ext cx="11057839" cy="329184"/>
+          </a:xfrm>
+          <a:prstGeom prst="rect">
+            <a:avLst/>
+          </a:prstGeom>
+          <a:noFill/>
+          <a:ln/>
+        </p:spPr>
+        <p:txBody>
+          <a:bodyPr wrap="square" lIns="0" tIns="0" rIns="0" bIns="0" rtlCol="0" anchor="t"/>
+          <a:lstStyle/>
+          <a:p>
+            <a:pPr algn="ctr" indent="0" marL="0">
+              <a:buNone/>
+            </a:pPr>
+            <a:r>
+              <a:rPr lang="en-US" sz="1500" b="1" dirty="0">
+                <a:solidFill>
+                  <a:srgbClr val="1A56DB"/>
+                </a:solidFill>
+                <a:latin typeface="Segoe UI" pitchFamily="34" charset="0"/>
+                <a:ea typeface="Segoe UI" pitchFamily="34" charset="-122"/>
+                <a:cs typeface="Segoe UI" pitchFamily="34" charset="-120"/>
+              </a:rPr>
+              <a:t>You are never in the routine path.</a:t>
+            </a:r>
+            <a:endParaRPr lang="en-US" sz="1500" dirty="0"/>
+          </a:p>
+        </p:txBody>
+      </p:sp>
     </p:spTree>
   </p:cSld>
   <p:clrMapOvr>
@@ -1371,30 +4951,1099 @@
           <a:chExt cx="0" cy="0"/>
         </a:xfrm>
       </p:grpSpPr>
-      <p:pic>
-        <p:nvPicPr>
-          <p:cNvPr id="2" name="Image 0" descr="C:\Accumulate_Stuff\certen\independant_validator\docs\demo\slides\carp-panel-brief-4.jpg">    </p:cNvPr>
-          <p:cNvPicPr>
-            <a:picLocks noChangeAspect="1"/>
-          </p:cNvPicPr>
-          <p:nvPr/>
-        </p:nvPicPr>
-        <p:blipFill>
-          <a:blip r:embed="rId1"/>
-          <a:stretch>
-            <a:fillRect/>
-          </a:stretch>
-        </p:blipFill>
-        <p:spPr>
-          <a:xfrm>
-            <a:off x="0" y="0"/>
-            <a:ext cx="12191695" cy="6858000"/>
-          </a:xfrm>
-          <a:prstGeom prst="rect">
-            <a:avLst/>
-          </a:prstGeom>
-        </p:spPr>
-      </p:pic>
+      <p:sp>
+        <p:nvSpPr>
+          <p:cNvPr id="2" name="Shape 0"/>
+          <p:cNvSpPr/>
+          <p:nvPr/>
+        </p:nvSpPr>
+        <p:spPr>
+          <a:xfrm>
+            <a:off x="0" y="6766560"/>
+            <a:ext cx="12191695" cy="91440"/>
+          </a:xfrm>
+          <a:prstGeom prst="rect">
+            <a:avLst/>
+          </a:prstGeom>
+          <a:solidFill>
+            <a:srgbClr val="1A56DB"/>
+          </a:solidFill>
+          <a:ln w="12700">
+            <a:solidFill>
+              <a:srgbClr val="333333"/>
+            </a:solidFill>
+            <a:prstDash val="solid"/>
+          </a:ln>
+        </p:spPr>
+      </p:sp>
+      <p:sp>
+        <p:nvSpPr>
+          <p:cNvPr id="3" name="Text 1"/>
+          <p:cNvSpPr/>
+          <p:nvPr/>
+        </p:nvSpPr>
+        <p:spPr>
+          <a:xfrm>
+            <a:off x="566928" y="402336"/>
+            <a:ext cx="11057839" cy="201168"/>
+          </a:xfrm>
+          <a:prstGeom prst="rect">
+            <a:avLst/>
+          </a:prstGeom>
+          <a:noFill/>
+          <a:ln/>
+        </p:spPr>
+        <p:txBody>
+          <a:bodyPr wrap="square" lIns="0" tIns="0" rIns="0" bIns="0" rtlCol="0" anchor="t"/>
+          <a:lstStyle/>
+          <a:p>
+            <a:pPr algn="l" indent="0" marL="0">
+              <a:buNone/>
+            </a:pPr>
+            <a:r>
+              <a:rPr lang="en-US" sz="900" b="1" spc="160" kern="0" dirty="0">
+                <a:solidFill>
+                  <a:srgbClr val="1A56DB"/>
+                </a:solidFill>
+                <a:latin typeface="Segoe UI" pitchFamily="34" charset="0"/>
+                <a:ea typeface="Segoe UI" pitchFamily="34" charset="-122"/>
+                <a:cs typeface="Segoe UI" pitchFamily="34" charset="-120"/>
+              </a:rPr>
+              <a:t>ACT I</a:t>
+            </a:r>
+            <a:endParaRPr lang="en-US" sz="900" dirty="0"/>
+          </a:p>
+        </p:txBody>
+      </p:sp>
+      <p:sp>
+        <p:nvSpPr>
+          <p:cNvPr id="4" name="Text 2"/>
+          <p:cNvSpPr/>
+          <p:nvPr/>
+        </p:nvSpPr>
+        <p:spPr>
+          <a:xfrm>
+            <a:off x="566928" y="640080"/>
+            <a:ext cx="11057839" cy="420624"/>
+          </a:xfrm>
+          <a:prstGeom prst="rect">
+            <a:avLst/>
+          </a:prstGeom>
+          <a:noFill/>
+          <a:ln/>
+        </p:spPr>
+        <p:txBody>
+          <a:bodyPr wrap="square" lIns="0" tIns="0" rIns="0" bIns="0" rtlCol="0" anchor="t"/>
+          <a:lstStyle/>
+          <a:p>
+            <a:pPr algn="l" indent="0" marL="0">
+              <a:buNone/>
+            </a:pPr>
+            <a:r>
+              <a:rPr lang="en-US" sz="2300" b="1" dirty="0">
+                <a:solidFill>
+                  <a:srgbClr val="12161F"/>
+                </a:solidFill>
+                <a:latin typeface="Segoe UI" pitchFamily="34" charset="0"/>
+                <a:ea typeface="Segoe UI" pitchFamily="34" charset="-122"/>
+                <a:cs typeface="Segoe UI" pitchFamily="34" charset="-120"/>
+              </a:rPr>
+              <a:t>Routine — settled without you</a:t>
+            </a:r>
+            <a:endParaRPr lang="en-US" sz="2300" dirty="0"/>
+          </a:p>
+        </p:txBody>
+      </p:sp>
+      <p:sp>
+        <p:nvSpPr>
+          <p:cNvPr id="5" name="Shape 3"/>
+          <p:cNvSpPr/>
+          <p:nvPr/>
+        </p:nvSpPr>
+        <p:spPr>
+          <a:xfrm>
+            <a:off x="566928" y="1499616"/>
+            <a:ext cx="2134953" cy="1371600"/>
+          </a:xfrm>
+          <a:prstGeom prst="roundRect">
+            <a:avLst>
+              <a:gd name="adj" fmla="val 4667"/>
+            </a:avLst>
+          </a:prstGeom>
+          <a:solidFill>
+            <a:srgbClr val="F5F7FA"/>
+          </a:solidFill>
+          <a:ln w="12700">
+            <a:solidFill>
+              <a:srgbClr val="DDE2EA"/>
+            </a:solidFill>
+            <a:prstDash val="solid"/>
+          </a:ln>
+        </p:spPr>
+      </p:sp>
+      <p:sp>
+        <p:nvSpPr>
+          <p:cNvPr id="6" name="Text 4"/>
+          <p:cNvSpPr/>
+          <p:nvPr/>
+        </p:nvSpPr>
+        <p:spPr>
+          <a:xfrm>
+            <a:off x="749808" y="1810512"/>
+            <a:ext cx="1769193" cy="347472"/>
+          </a:xfrm>
+          <a:prstGeom prst="rect">
+            <a:avLst/>
+          </a:prstGeom>
+          <a:noFill/>
+          <a:ln/>
+        </p:spPr>
+        <p:txBody>
+          <a:bodyPr wrap="square" lIns="0" tIns="0" rIns="0" bIns="0" rtlCol="0" anchor="t"/>
+          <a:lstStyle/>
+          <a:p>
+            <a:pPr algn="l" indent="0" marL="0">
+              <a:buNone/>
+            </a:pPr>
+            <a:r>
+              <a:rPr lang="en-US" sz="1600" b="1" dirty="0">
+                <a:solidFill>
+                  <a:srgbClr val="12161F"/>
+                </a:solidFill>
+                <a:latin typeface="Segoe UI" pitchFamily="34" charset="0"/>
+                <a:ea typeface="Segoe UI" pitchFamily="34" charset="-122"/>
+                <a:cs typeface="Segoe UI" pitchFamily="34" charset="-120"/>
+              </a:rPr>
+              <a:t>your agent</a:t>
+            </a:r>
+            <a:endParaRPr lang="en-US" sz="1600" dirty="0"/>
+          </a:p>
+        </p:txBody>
+      </p:sp>
+      <p:sp>
+        <p:nvSpPr>
+          <p:cNvPr id="7" name="Text 5"/>
+          <p:cNvSpPr/>
+          <p:nvPr/>
+        </p:nvSpPr>
+        <p:spPr>
+          <a:xfrm>
+            <a:off x="749808" y="2231136"/>
+            <a:ext cx="1769193" cy="402336"/>
+          </a:xfrm>
+          <a:prstGeom prst="rect">
+            <a:avLst/>
+          </a:prstGeom>
+          <a:noFill/>
+          <a:ln/>
+        </p:spPr>
+        <p:txBody>
+          <a:bodyPr wrap="square" lIns="0" tIns="0" rIns="0" bIns="0" rtlCol="0" anchor="t"/>
+          <a:lstStyle/>
+          <a:p>
+            <a:pPr algn="l" indent="0" marL="0">
+              <a:buNone/>
+            </a:pPr>
+            <a:r>
+              <a:rPr lang="en-US" sz="1150" dirty="0">
+                <a:solidFill>
+                  <a:srgbClr val="5B6472"/>
+                </a:solidFill>
+                <a:latin typeface="Segoe UI" pitchFamily="34" charset="0"/>
+                <a:ea typeface="Segoe UI" pitchFamily="34" charset="-122"/>
+                <a:cs typeface="Segoe UI" pitchFamily="34" charset="-120"/>
+              </a:rPr>
+              <a:t>proposes</a:t>
+            </a:r>
+            <a:endParaRPr lang="en-US" sz="1150" dirty="0"/>
+          </a:p>
+        </p:txBody>
+      </p:sp>
+      <p:sp>
+        <p:nvSpPr>
+          <p:cNvPr id="8" name="Shape 6"/>
+          <p:cNvSpPr/>
+          <p:nvPr/>
+        </p:nvSpPr>
+        <p:spPr>
+          <a:xfrm>
+            <a:off x="2829897" y="2185416"/>
+            <a:ext cx="384048" cy="0"/>
+          </a:xfrm>
+          <a:prstGeom prst="line">
+            <a:avLst/>
+          </a:prstGeom>
+          <a:noFill/>
+          <a:ln w="22225">
+            <a:solidFill>
+              <a:srgbClr val="5B6472"/>
+            </a:solidFill>
+            <a:prstDash val="solid"/>
+            <a:tailEnd type="triangle"/>
+          </a:ln>
+        </p:spPr>
+      </p:sp>
+      <p:sp>
+        <p:nvSpPr>
+          <p:cNvPr id="9" name="Shape 7"/>
+          <p:cNvSpPr/>
+          <p:nvPr/>
+        </p:nvSpPr>
+        <p:spPr>
+          <a:xfrm>
+            <a:off x="3341961" y="1499616"/>
+            <a:ext cx="2732740" cy="1371600"/>
+          </a:xfrm>
+          <a:prstGeom prst="roundRect">
+            <a:avLst>
+              <a:gd name="adj" fmla="val 4667"/>
+            </a:avLst>
+          </a:prstGeom>
+          <a:solidFill>
+            <a:srgbClr val="EDF2FD"/>
+          </a:solidFill>
+          <a:ln w="12700">
+            <a:solidFill>
+              <a:srgbClr val="1A56DB"/>
+            </a:solidFill>
+            <a:prstDash val="solid"/>
+          </a:ln>
+        </p:spPr>
+      </p:sp>
+      <p:sp>
+        <p:nvSpPr>
+          <p:cNvPr id="10" name="Text 8"/>
+          <p:cNvSpPr/>
+          <p:nvPr/>
+        </p:nvSpPr>
+        <p:spPr>
+          <a:xfrm>
+            <a:off x="3524841" y="1810512"/>
+            <a:ext cx="2366980" cy="347472"/>
+          </a:xfrm>
+          <a:prstGeom prst="rect">
+            <a:avLst/>
+          </a:prstGeom>
+          <a:noFill/>
+          <a:ln/>
+        </p:spPr>
+        <p:txBody>
+          <a:bodyPr wrap="square" lIns="0" tIns="0" rIns="0" bIns="0" rtlCol="0" anchor="t"/>
+          <a:lstStyle/>
+          <a:p>
+            <a:pPr algn="l" indent="0" marL="0">
+              <a:buNone/>
+            </a:pPr>
+            <a:r>
+              <a:rPr lang="en-US" sz="1600" b="1" dirty="0">
+                <a:solidFill>
+                  <a:srgbClr val="1A56DB"/>
+                </a:solidFill>
+                <a:latin typeface="Segoe UI" pitchFamily="34" charset="0"/>
+                <a:ea typeface="Segoe UI" pitchFamily="34" charset="-122"/>
+                <a:cs typeface="Segoe UI" pitchFamily="34" charset="-120"/>
+              </a:rPr>
+              <a:t>your policy engine</a:t>
+            </a:r>
+            <a:endParaRPr lang="en-US" sz="1600" dirty="0"/>
+          </a:p>
+        </p:txBody>
+      </p:sp>
+      <p:sp>
+        <p:nvSpPr>
+          <p:cNvPr id="11" name="Text 9"/>
+          <p:cNvSpPr/>
+          <p:nvPr/>
+        </p:nvSpPr>
+        <p:spPr>
+          <a:xfrm>
+            <a:off x="3524841" y="2231136"/>
+            <a:ext cx="2366980" cy="402336"/>
+          </a:xfrm>
+          <a:prstGeom prst="rect">
+            <a:avLst/>
+          </a:prstGeom>
+          <a:noFill/>
+          <a:ln/>
+        </p:spPr>
+        <p:txBody>
+          <a:bodyPr wrap="square" lIns="0" tIns="0" rIns="0" bIns="0" rtlCol="0" anchor="t"/>
+          <a:lstStyle/>
+          <a:p>
+            <a:pPr algn="l" indent="0" marL="0">
+              <a:buNone/>
+            </a:pPr>
+            <a:r>
+              <a:rPr lang="en-US" sz="1150" dirty="0">
+                <a:solidFill>
+                  <a:srgbClr val="5B6472"/>
+                </a:solidFill>
+                <a:latin typeface="Segoe UI" pitchFamily="34" charset="0"/>
+                <a:ea typeface="Segoe UI" pitchFamily="34" charset="-122"/>
+                <a:cs typeface="Segoe UI" pitchFamily="34" charset="-120"/>
+              </a:rPr>
+              <a:t>your rules · its own key</a:t>
+            </a:r>
+            <a:endParaRPr lang="en-US" sz="1150" dirty="0"/>
+          </a:p>
+        </p:txBody>
+      </p:sp>
+      <p:sp>
+        <p:nvSpPr>
+          <p:cNvPr id="12" name="Shape 10"/>
+          <p:cNvSpPr/>
+          <p:nvPr/>
+        </p:nvSpPr>
+        <p:spPr>
+          <a:xfrm>
+            <a:off x="6202717" y="2185416"/>
+            <a:ext cx="384048" cy="0"/>
+          </a:xfrm>
+          <a:prstGeom prst="line">
+            <a:avLst/>
+          </a:prstGeom>
+          <a:noFill/>
+          <a:ln w="22225">
+            <a:solidFill>
+              <a:srgbClr val="5B6472"/>
+            </a:solidFill>
+            <a:prstDash val="solid"/>
+            <a:tailEnd type="triangle"/>
+          </a:ln>
+        </p:spPr>
+      </p:sp>
+      <p:sp>
+        <p:nvSpPr>
+          <p:cNvPr id="13" name="Shape 11"/>
+          <p:cNvSpPr/>
+          <p:nvPr/>
+        </p:nvSpPr>
+        <p:spPr>
+          <a:xfrm>
+            <a:off x="6714781" y="1499616"/>
+            <a:ext cx="2134953" cy="1371600"/>
+          </a:xfrm>
+          <a:prstGeom prst="roundRect">
+            <a:avLst>
+              <a:gd name="adj" fmla="val 4667"/>
+            </a:avLst>
+          </a:prstGeom>
+          <a:solidFill>
+            <a:srgbClr val="E9F5EE"/>
+          </a:solidFill>
+          <a:ln w="12700">
+            <a:solidFill>
+              <a:srgbClr val="157F4A"/>
+            </a:solidFill>
+            <a:prstDash val="solid"/>
+          </a:ln>
+        </p:spPr>
+      </p:sp>
+      <p:sp>
+        <p:nvSpPr>
+          <p:cNvPr id="14" name="Text 12"/>
+          <p:cNvSpPr/>
+          <p:nvPr/>
+        </p:nvSpPr>
+        <p:spPr>
+          <a:xfrm>
+            <a:off x="6897661" y="1810512"/>
+            <a:ext cx="1769193" cy="347472"/>
+          </a:xfrm>
+          <a:prstGeom prst="rect">
+            <a:avLst/>
+          </a:prstGeom>
+          <a:noFill/>
+          <a:ln/>
+        </p:spPr>
+        <p:txBody>
+          <a:bodyPr wrap="square" lIns="0" tIns="0" rIns="0" bIns="0" rtlCol="0" anchor="t"/>
+          <a:lstStyle/>
+          <a:p>
+            <a:pPr algn="l" indent="0" marL="0">
+              <a:buNone/>
+            </a:pPr>
+            <a:r>
+              <a:rPr lang="en-US" sz="1600" b="1" dirty="0">
+                <a:solidFill>
+                  <a:srgbClr val="157F4A"/>
+                </a:solidFill>
+                <a:latin typeface="Segoe UI" pitchFamily="34" charset="0"/>
+                <a:ea typeface="Segoe UI" pitchFamily="34" charset="-122"/>
+                <a:cs typeface="Segoe UI" pitchFamily="34" charset="-120"/>
+              </a:rPr>
+              <a:t>page 2</a:t>
+            </a:r>
+            <a:endParaRPr lang="en-US" sz="1600" dirty="0"/>
+          </a:p>
+        </p:txBody>
+      </p:sp>
+      <p:sp>
+        <p:nvSpPr>
+          <p:cNvPr id="15" name="Text 13"/>
+          <p:cNvSpPr/>
+          <p:nvPr/>
+        </p:nvSpPr>
+        <p:spPr>
+          <a:xfrm>
+            <a:off x="6897661" y="2231136"/>
+            <a:ext cx="1769193" cy="402336"/>
+          </a:xfrm>
+          <a:prstGeom prst="rect">
+            <a:avLst/>
+          </a:prstGeom>
+          <a:noFill/>
+          <a:ln/>
+        </p:spPr>
+        <p:txBody>
+          <a:bodyPr wrap="square" lIns="0" tIns="0" rIns="0" bIns="0" rtlCol="0" anchor="t"/>
+          <a:lstStyle/>
+          <a:p>
+            <a:pPr algn="l" indent="0" marL="0">
+              <a:buNone/>
+            </a:pPr>
+            <a:r>
+              <a:rPr lang="en-US" sz="1150" dirty="0">
+                <a:solidFill>
+                  <a:srgbClr val="5B6472"/>
+                </a:solidFill>
+                <a:latin typeface="Segoe UI" pitchFamily="34" charset="0"/>
+                <a:ea typeface="Segoe UI" pitchFamily="34" charset="-122"/>
+                <a:cs typeface="Segoe UI" pitchFamily="34" charset="-120"/>
+              </a:rPr>
+              <a:t>2-of-2 satisfied</a:t>
+            </a:r>
+            <a:endParaRPr lang="en-US" sz="1150" dirty="0"/>
+          </a:p>
+        </p:txBody>
+      </p:sp>
+      <p:sp>
+        <p:nvSpPr>
+          <p:cNvPr id="16" name="Shape 14"/>
+          <p:cNvSpPr/>
+          <p:nvPr/>
+        </p:nvSpPr>
+        <p:spPr>
+          <a:xfrm>
+            <a:off x="8977750" y="2185416"/>
+            <a:ext cx="384048" cy="0"/>
+          </a:xfrm>
+          <a:prstGeom prst="line">
+            <a:avLst/>
+          </a:prstGeom>
+          <a:noFill/>
+          <a:ln w="22225">
+            <a:solidFill>
+              <a:srgbClr val="5B6472"/>
+            </a:solidFill>
+            <a:prstDash val="solid"/>
+            <a:tailEnd type="triangle"/>
+          </a:ln>
+        </p:spPr>
+      </p:sp>
+      <p:sp>
+        <p:nvSpPr>
+          <p:cNvPr id="17" name="Shape 15"/>
+          <p:cNvSpPr/>
+          <p:nvPr/>
+        </p:nvSpPr>
+        <p:spPr>
+          <a:xfrm>
+            <a:off x="9489814" y="1499616"/>
+            <a:ext cx="2134953" cy="1371600"/>
+          </a:xfrm>
+          <a:prstGeom prst="roundRect">
+            <a:avLst>
+              <a:gd name="adj" fmla="val 4667"/>
+            </a:avLst>
+          </a:prstGeom>
+          <a:solidFill>
+            <a:srgbClr val="F5F7FA"/>
+          </a:solidFill>
+          <a:ln w="12700">
+            <a:solidFill>
+              <a:srgbClr val="DDE2EA"/>
+            </a:solidFill>
+            <a:prstDash val="solid"/>
+          </a:ln>
+        </p:spPr>
+      </p:sp>
+      <p:sp>
+        <p:nvSpPr>
+          <p:cNvPr id="18" name="Text 16"/>
+          <p:cNvSpPr/>
+          <p:nvPr/>
+        </p:nvSpPr>
+        <p:spPr>
+          <a:xfrm>
+            <a:off x="9672694" y="1810512"/>
+            <a:ext cx="1769193" cy="347472"/>
+          </a:xfrm>
+          <a:prstGeom prst="rect">
+            <a:avLst/>
+          </a:prstGeom>
+          <a:noFill/>
+          <a:ln/>
+        </p:spPr>
+        <p:txBody>
+          <a:bodyPr wrap="square" lIns="0" tIns="0" rIns="0" bIns="0" rtlCol="0" anchor="t"/>
+          <a:lstStyle/>
+          <a:p>
+            <a:pPr algn="l" indent="0" marL="0">
+              <a:buNone/>
+            </a:pPr>
+            <a:r>
+              <a:rPr lang="en-US" sz="1600" b="1" dirty="0">
+                <a:solidFill>
+                  <a:srgbClr val="12161F"/>
+                </a:solidFill>
+                <a:latin typeface="Segoe UI" pitchFamily="34" charset="0"/>
+                <a:ea typeface="Segoe UI" pitchFamily="34" charset="-122"/>
+                <a:cs typeface="Segoe UI" pitchFamily="34" charset="-120"/>
+              </a:rPr>
+              <a:t>escrobot</a:t>
+            </a:r>
+            <a:endParaRPr lang="en-US" sz="1600" dirty="0"/>
+          </a:p>
+        </p:txBody>
+      </p:sp>
+      <p:sp>
+        <p:nvSpPr>
+          <p:cNvPr id="19" name="Text 17"/>
+          <p:cNvSpPr/>
+          <p:nvPr/>
+        </p:nvSpPr>
+        <p:spPr>
+          <a:xfrm>
+            <a:off x="9672694" y="2231136"/>
+            <a:ext cx="1769193" cy="402336"/>
+          </a:xfrm>
+          <a:prstGeom prst="rect">
+            <a:avLst/>
+          </a:prstGeom>
+          <a:noFill/>
+          <a:ln/>
+        </p:spPr>
+        <p:txBody>
+          <a:bodyPr wrap="square" lIns="0" tIns="0" rIns="0" bIns="0" rtlCol="0" anchor="t"/>
+          <a:lstStyle/>
+          <a:p>
+            <a:pPr algn="l" indent="0" marL="0">
+              <a:buNone/>
+            </a:pPr>
+            <a:r>
+              <a:rPr lang="en-US" sz="1150" dirty="0">
+                <a:solidFill>
+                  <a:srgbClr val="5B6472"/>
+                </a:solidFill>
+                <a:latin typeface="Segoe UI" pitchFamily="34" charset="0"/>
+                <a:ea typeface="Segoe UI" pitchFamily="34" charset="-122"/>
+                <a:cs typeface="Segoe UI" pitchFamily="34" charset="-120"/>
+              </a:rPr>
+              <a:t>status 5</a:t>
+            </a:r>
+            <a:endParaRPr lang="en-US" sz="1150" dirty="0"/>
+          </a:p>
+        </p:txBody>
+      </p:sp>
+      <p:sp>
+        <p:nvSpPr>
+          <p:cNvPr id="20" name="Shape 18"/>
+          <p:cNvSpPr/>
+          <p:nvPr/>
+        </p:nvSpPr>
+        <p:spPr>
+          <a:xfrm>
+            <a:off x="566928" y="3438144"/>
+            <a:ext cx="3527450" cy="2121408"/>
+          </a:xfrm>
+          <a:prstGeom prst="roundRect">
+            <a:avLst>
+              <a:gd name="adj" fmla="val 3017"/>
+            </a:avLst>
+          </a:prstGeom>
+          <a:solidFill>
+            <a:srgbClr val="E9F5EE"/>
+          </a:solidFill>
+          <a:ln w="12700">
+            <a:solidFill>
+              <a:srgbClr val="157F4A"/>
+            </a:solidFill>
+            <a:prstDash val="solid"/>
+          </a:ln>
+        </p:spPr>
+      </p:sp>
+      <p:sp>
+        <p:nvSpPr>
+          <p:cNvPr id="21" name="Text 19"/>
+          <p:cNvSpPr/>
+          <p:nvPr/>
+        </p:nvSpPr>
+        <p:spPr>
+          <a:xfrm>
+            <a:off x="786384" y="3657600"/>
+            <a:ext cx="3088538" cy="256032"/>
+          </a:xfrm>
+          <a:prstGeom prst="rect">
+            <a:avLst/>
+          </a:prstGeom>
+          <a:noFill/>
+          <a:ln/>
+        </p:spPr>
+        <p:txBody>
+          <a:bodyPr wrap="square" lIns="0" tIns="0" rIns="0" bIns="0" rtlCol="0" anchor="t"/>
+          <a:lstStyle/>
+          <a:p>
+            <a:pPr algn="l" indent="0" marL="0">
+              <a:buNone/>
+            </a:pPr>
+            <a:r>
+              <a:rPr lang="en-US" sz="950" b="1" spc="120" kern="0" dirty="0">
+                <a:solidFill>
+                  <a:srgbClr val="157F4A"/>
+                </a:solidFill>
+                <a:latin typeface="Segoe UI" pitchFamily="34" charset="0"/>
+                <a:ea typeface="Segoe UI" pitchFamily="34" charset="-122"/>
+                <a:cs typeface="Segoe UI" pitchFamily="34" charset="-120"/>
+              </a:rPr>
+              <a:t>ROUTINE</a:t>
+            </a:r>
+            <a:endParaRPr lang="en-US" sz="950" dirty="0"/>
+          </a:p>
+        </p:txBody>
+      </p:sp>
+      <p:sp>
+        <p:nvSpPr>
+          <p:cNvPr id="22" name="Text 20"/>
+          <p:cNvSpPr/>
+          <p:nvPr/>
+        </p:nvSpPr>
+        <p:spPr>
+          <a:xfrm>
+            <a:off x="786384" y="4096512"/>
+            <a:ext cx="3088538" cy="457200"/>
+          </a:xfrm>
+          <a:prstGeom prst="rect">
+            <a:avLst/>
+          </a:prstGeom>
+          <a:noFill/>
+          <a:ln/>
+        </p:spPr>
+        <p:txBody>
+          <a:bodyPr wrap="square" lIns="0" tIns="0" rIns="0" bIns="0" rtlCol="0" anchor="t"/>
+          <a:lstStyle/>
+          <a:p>
+            <a:pPr algn="l" indent="0" marL="0">
+              <a:buNone/>
+            </a:pPr>
+            <a:r>
+              <a:rPr lang="en-US" sz="2200" b="1" dirty="0">
+                <a:solidFill>
+                  <a:srgbClr val="157F4A"/>
+                </a:solidFill>
+                <a:latin typeface="Consolas" pitchFamily="34" charset="0"/>
+                <a:ea typeface="Consolas" pitchFamily="34" charset="-122"/>
+                <a:cs typeface="Consolas" pitchFamily="34" charset="-120"/>
+              </a:rPr>
+              <a:t>approve</a:t>
+            </a:r>
+            <a:endParaRPr lang="en-US" sz="2200" dirty="0"/>
+          </a:p>
+        </p:txBody>
+      </p:sp>
+      <p:sp>
+        <p:nvSpPr>
+          <p:cNvPr id="23" name="Text 21"/>
+          <p:cNvSpPr/>
+          <p:nvPr/>
+        </p:nvSpPr>
+        <p:spPr>
+          <a:xfrm>
+            <a:off x="786384" y="4736592"/>
+            <a:ext cx="3088538" cy="640080"/>
+          </a:xfrm>
+          <a:prstGeom prst="rect">
+            <a:avLst/>
+          </a:prstGeom>
+          <a:noFill/>
+          <a:ln/>
+        </p:spPr>
+        <p:txBody>
+          <a:bodyPr wrap="square" lIns="0" tIns="0" rIns="0" bIns="0" rtlCol="0" anchor="t"/>
+          <a:lstStyle/>
+          <a:p>
+            <a:pPr algn="l" indent="0" marL="0">
+              <a:buNone/>
+            </a:pPr>
+            <a:r>
+              <a:rPr lang="en-US" sz="1400" dirty="0">
+                <a:solidFill>
+                  <a:srgbClr val="12161F"/>
+                </a:solidFill>
+                <a:latin typeface="Segoe UI" pitchFamily="34" charset="0"/>
+                <a:ea typeface="Segoe UI" pitchFamily="34" charset="-122"/>
+                <a:cs typeface="Segoe UI" pitchFamily="34" charset="-120"/>
+              </a:rPr>
+              <a:t>Settles. You are never told.</a:t>
+            </a:r>
+            <a:endParaRPr lang="en-US" sz="1400" dirty="0"/>
+          </a:p>
+        </p:txBody>
+      </p:sp>
+      <p:sp>
+        <p:nvSpPr>
+          <p:cNvPr id="24" name="Shape 22"/>
+          <p:cNvSpPr/>
+          <p:nvPr/>
+        </p:nvSpPr>
+        <p:spPr>
+          <a:xfrm>
+            <a:off x="4332122" y="3438144"/>
+            <a:ext cx="3527450" cy="2121408"/>
+          </a:xfrm>
+          <a:prstGeom prst="roundRect">
+            <a:avLst>
+              <a:gd name="adj" fmla="val 3017"/>
+            </a:avLst>
+          </a:prstGeom>
+          <a:solidFill>
+            <a:srgbClr val="FDF4E6"/>
+          </a:solidFill>
+          <a:ln w="12700">
+            <a:solidFill>
+              <a:srgbClr val="B45309"/>
+            </a:solidFill>
+            <a:prstDash val="solid"/>
+          </a:ln>
+        </p:spPr>
+      </p:sp>
+      <p:sp>
+        <p:nvSpPr>
+          <p:cNvPr id="25" name="Text 23"/>
+          <p:cNvSpPr/>
+          <p:nvPr/>
+        </p:nvSpPr>
+        <p:spPr>
+          <a:xfrm>
+            <a:off x="4551578" y="3657600"/>
+            <a:ext cx="3088538" cy="256032"/>
+          </a:xfrm>
+          <a:prstGeom prst="rect">
+            <a:avLst/>
+          </a:prstGeom>
+          <a:noFill/>
+          <a:ln/>
+        </p:spPr>
+        <p:txBody>
+          <a:bodyPr wrap="square" lIns="0" tIns="0" rIns="0" bIns="0" rtlCol="0" anchor="t"/>
+          <a:lstStyle/>
+          <a:p>
+            <a:pPr algn="l" indent="0" marL="0">
+              <a:buNone/>
+            </a:pPr>
+            <a:r>
+              <a:rPr lang="en-US" sz="950" b="1" spc="120" kern="0" dirty="0">
+                <a:solidFill>
+                  <a:srgbClr val="B45309"/>
+                </a:solidFill>
+                <a:latin typeface="Segoe UI" pitchFamily="34" charset="0"/>
+                <a:ea typeface="Segoe UI" pitchFamily="34" charset="-122"/>
+                <a:cs typeface="Segoe UI" pitchFamily="34" charset="-120"/>
+              </a:rPr>
+              <a:t>OUT OF POLICY</a:t>
+            </a:r>
+            <a:endParaRPr lang="en-US" sz="950" dirty="0"/>
+          </a:p>
+        </p:txBody>
+      </p:sp>
+      <p:sp>
+        <p:nvSpPr>
+          <p:cNvPr id="26" name="Text 24"/>
+          <p:cNvSpPr/>
+          <p:nvPr/>
+        </p:nvSpPr>
+        <p:spPr>
+          <a:xfrm>
+            <a:off x="4551578" y="4096512"/>
+            <a:ext cx="3088538" cy="457200"/>
+          </a:xfrm>
+          <a:prstGeom prst="rect">
+            <a:avLst/>
+          </a:prstGeom>
+          <a:noFill/>
+          <a:ln/>
+        </p:spPr>
+        <p:txBody>
+          <a:bodyPr wrap="square" lIns="0" tIns="0" rIns="0" bIns="0" rtlCol="0" anchor="t"/>
+          <a:lstStyle/>
+          <a:p>
+            <a:pPr algn="l" indent="0" marL="0">
+              <a:buNone/>
+            </a:pPr>
+            <a:r>
+              <a:rPr lang="en-US" sz="2200" b="1" dirty="0">
+                <a:solidFill>
+                  <a:srgbClr val="B45309"/>
+                </a:solidFill>
+                <a:latin typeface="Consolas" pitchFamily="34" charset="0"/>
+                <a:ea typeface="Consolas" pitchFamily="34" charset="-122"/>
+                <a:cs typeface="Consolas" pitchFamily="34" charset="-120"/>
+              </a:rPr>
+              <a:t>pending</a:t>
+            </a:r>
+            <a:endParaRPr lang="en-US" sz="2200" dirty="0"/>
+          </a:p>
+        </p:txBody>
+      </p:sp>
+      <p:sp>
+        <p:nvSpPr>
+          <p:cNvPr id="27" name="Text 25"/>
+          <p:cNvSpPr/>
+          <p:nvPr/>
+        </p:nvSpPr>
+        <p:spPr>
+          <a:xfrm>
+            <a:off x="4551578" y="4736592"/>
+            <a:ext cx="3088538" cy="640080"/>
+          </a:xfrm>
+          <a:prstGeom prst="rect">
+            <a:avLst/>
+          </a:prstGeom>
+          <a:noFill/>
+          <a:ln/>
+        </p:spPr>
+        <p:txBody>
+          <a:bodyPr wrap="square" lIns="0" tIns="0" rIns="0" bIns="0" rtlCol="0" anchor="t"/>
+          <a:lstStyle/>
+          <a:p>
+            <a:pPr algn="l" indent="0" marL="0">
+              <a:buNone/>
+            </a:pPr>
+            <a:r>
+              <a:rPr lang="en-US" sz="1400" dirty="0">
+                <a:solidFill>
+                  <a:srgbClr val="12161F"/>
+                </a:solidFill>
+                <a:latin typeface="Segoe UI" pitchFamily="34" charset="0"/>
+                <a:ea typeface="Segoe UI" pitchFamily="34" charset="-122"/>
+                <a:cs typeface="Segoe UI" pitchFamily="34" charset="-120"/>
+              </a:rPr>
+              <a:t>Stops. Comes to you.</a:t>
+            </a:r>
+            <a:endParaRPr lang="en-US" sz="1400" dirty="0"/>
+          </a:p>
+        </p:txBody>
+      </p:sp>
+      <p:sp>
+        <p:nvSpPr>
+          <p:cNvPr id="28" name="Shape 26"/>
+          <p:cNvSpPr/>
+          <p:nvPr/>
+        </p:nvSpPr>
+        <p:spPr>
+          <a:xfrm>
+            <a:off x="8097317" y="3438144"/>
+            <a:ext cx="3527450" cy="2121408"/>
+          </a:xfrm>
+          <a:prstGeom prst="roundRect">
+            <a:avLst>
+              <a:gd name="adj" fmla="val 3017"/>
+            </a:avLst>
+          </a:prstGeom>
+          <a:solidFill>
+            <a:srgbClr val="FCEDEB"/>
+          </a:solidFill>
+          <a:ln w="12700">
+            <a:solidFill>
+              <a:srgbClr val="B42318"/>
+            </a:solidFill>
+            <a:prstDash val="solid"/>
+          </a:ln>
+        </p:spPr>
+      </p:sp>
+      <p:sp>
+        <p:nvSpPr>
+          <p:cNvPr id="29" name="Text 27"/>
+          <p:cNvSpPr/>
+          <p:nvPr/>
+        </p:nvSpPr>
+        <p:spPr>
+          <a:xfrm>
+            <a:off x="8316773" y="3657600"/>
+            <a:ext cx="3088538" cy="256032"/>
+          </a:xfrm>
+          <a:prstGeom prst="rect">
+            <a:avLst/>
+          </a:prstGeom>
+          <a:noFill/>
+          <a:ln/>
+        </p:spPr>
+        <p:txBody>
+          <a:bodyPr wrap="square" lIns="0" tIns="0" rIns="0" bIns="0" rtlCol="0" anchor="t"/>
+          <a:lstStyle/>
+          <a:p>
+            <a:pPr algn="l" indent="0" marL="0">
+              <a:buNone/>
+            </a:pPr>
+            <a:r>
+              <a:rPr lang="en-US" sz="950" b="1" spc="120" kern="0" dirty="0">
+                <a:solidFill>
+                  <a:srgbClr val="B42318"/>
+                </a:solidFill>
+                <a:latin typeface="Segoe UI" pitchFamily="34" charset="0"/>
+                <a:ea typeface="Segoe UI" pitchFamily="34" charset="-122"/>
+                <a:cs typeface="Segoe UI" pitchFamily="34" charset="-120"/>
+              </a:rPr>
+              <a:t>ENGINE OFFLINE</a:t>
+            </a:r>
+            <a:endParaRPr lang="en-US" sz="950" dirty="0"/>
+          </a:p>
+        </p:txBody>
+      </p:sp>
+      <p:sp>
+        <p:nvSpPr>
+          <p:cNvPr id="30" name="Text 28"/>
+          <p:cNvSpPr/>
+          <p:nvPr/>
+        </p:nvSpPr>
+        <p:spPr>
+          <a:xfrm>
+            <a:off x="8316773" y="4096512"/>
+            <a:ext cx="3088538" cy="457200"/>
+          </a:xfrm>
+          <a:prstGeom prst="rect">
+            <a:avLst/>
+          </a:prstGeom>
+          <a:noFill/>
+          <a:ln/>
+        </p:spPr>
+        <p:txBody>
+          <a:bodyPr wrap="square" lIns="0" tIns="0" rIns="0" bIns="0" rtlCol="0" anchor="t"/>
+          <a:lstStyle/>
+          <a:p>
+            <a:pPr algn="l" indent="0" marL="0">
+              <a:buNone/>
+            </a:pPr>
+            <a:r>
+              <a:rPr lang="en-US" sz="2200" b="1" dirty="0">
+                <a:solidFill>
+                  <a:srgbClr val="B42318"/>
+                </a:solidFill>
+                <a:latin typeface="Consolas" pitchFamily="34" charset="0"/>
+                <a:ea typeface="Consolas" pitchFamily="34" charset="-122"/>
+                <a:cs typeface="Consolas" pitchFamily="34" charset="-120"/>
+              </a:rPr>
+              <a:t>no answer</a:t>
+            </a:r>
+            <a:endParaRPr lang="en-US" sz="2200" dirty="0"/>
+          </a:p>
+        </p:txBody>
+      </p:sp>
+      <p:sp>
+        <p:nvSpPr>
+          <p:cNvPr id="31" name="Text 29"/>
+          <p:cNvSpPr/>
+          <p:nvPr/>
+        </p:nvSpPr>
+        <p:spPr>
+          <a:xfrm>
+            <a:off x="8316773" y="4736592"/>
+            <a:ext cx="3088538" cy="640080"/>
+          </a:xfrm>
+          <a:prstGeom prst="rect">
+            <a:avLst/>
+          </a:prstGeom>
+          <a:noFill/>
+          <a:ln/>
+        </p:spPr>
+        <p:txBody>
+          <a:bodyPr wrap="square" lIns="0" tIns="0" rIns="0" bIns="0" rtlCol="0" anchor="t"/>
+          <a:lstStyle/>
+          <a:p>
+            <a:pPr algn="l" indent="0" marL="0">
+              <a:buNone/>
+            </a:pPr>
+            <a:r>
+              <a:rPr lang="en-US" sz="1400" dirty="0">
+                <a:solidFill>
+                  <a:srgbClr val="12161F"/>
+                </a:solidFill>
+                <a:latin typeface="Segoe UI" pitchFamily="34" charset="0"/>
+                <a:ea typeface="Segoe UI" pitchFamily="34" charset="-122"/>
+                <a:cs typeface="Segoe UI" pitchFamily="34" charset="-120"/>
+              </a:rPr>
+              <a:t>Stops. Silence is not consent.</a:t>
+            </a:r>
+            <a:endParaRPr lang="en-US" sz="1400" dirty="0"/>
+          </a:p>
+        </p:txBody>
+      </p:sp>
+      <p:sp>
+        <p:nvSpPr>
+          <p:cNvPr id="32" name="Shape 30"/>
+          <p:cNvSpPr/>
+          <p:nvPr/>
+        </p:nvSpPr>
+        <p:spPr>
+          <a:xfrm>
+            <a:off x="566928" y="6199632"/>
+            <a:ext cx="11057839" cy="402336"/>
+          </a:xfrm>
+          <a:prstGeom prst="roundRect">
+            <a:avLst>
+              <a:gd name="adj" fmla="val 113636"/>
+            </a:avLst>
+          </a:prstGeom>
+          <a:solidFill>
+            <a:srgbClr val="EDF2FD"/>
+          </a:solidFill>
+          <a:ln w="12700">
+            <a:solidFill>
+              <a:srgbClr val="1A56DB"/>
+            </a:solidFill>
+            <a:prstDash val="solid"/>
+          </a:ln>
+        </p:spPr>
+      </p:sp>
+      <p:sp>
+        <p:nvSpPr>
+          <p:cNvPr id="33" name="Text 31"/>
+          <p:cNvSpPr/>
+          <p:nvPr/>
+        </p:nvSpPr>
+        <p:spPr>
+          <a:xfrm>
+            <a:off x="859536" y="6199632"/>
+            <a:ext cx="10472623" cy="402336"/>
+          </a:xfrm>
+          <a:prstGeom prst="rect">
+            <a:avLst/>
+          </a:prstGeom>
+          <a:noFill/>
+          <a:ln/>
+        </p:spPr>
+        <p:txBody>
+          <a:bodyPr wrap="square" lIns="0" tIns="0" rIns="0" bIns="0" rtlCol="0" anchor="ctr"/>
+          <a:lstStyle/>
+          <a:p>
+            <a:pPr algn="l" indent="0" marL="0">
+              <a:buNone/>
+            </a:pPr>
+            <a:r>
+              <a:rPr lang="en-US" sz="1150" b="1" dirty="0">
+                <a:solidFill>
+                  <a:srgbClr val="1A56DB"/>
+                </a:solidFill>
+                <a:latin typeface="Segoe UI" pitchFamily="34" charset="0"/>
+                <a:ea typeface="Segoe UI" pitchFamily="34" charset="-122"/>
+                <a:cs typeface="Segoe UI" pitchFamily="34" charset="-120"/>
+              </a:rPr>
+              <a:t>PROVEN LIVE   ·   0x7ba2eab4…  →  status 5, signed by agent + policy, both on page 2</a:t>
+            </a:r>
+            <a:endParaRPr lang="en-US" sz="1150" dirty="0"/>
+          </a:p>
+        </p:txBody>
+      </p:sp>
     </p:spTree>
   </p:cSld>
   <p:clrMapOvr>
@@ -1420,30 +6069,1602 @@
           <a:chExt cx="0" cy="0"/>
         </a:xfrm>
       </p:grpSpPr>
-      <p:pic>
-        <p:nvPicPr>
-          <p:cNvPr id="2" name="Image 0" descr="C:\Accumulate_Stuff\certen\independant_validator\docs\demo\slides\carp-panel-brief-5.jpg">    </p:cNvPr>
-          <p:cNvPicPr>
-            <a:picLocks noChangeAspect="1"/>
-          </p:cNvPicPr>
-          <p:nvPr/>
-        </p:nvPicPr>
-        <p:blipFill>
-          <a:blip r:embed="rId1"/>
-          <a:stretch>
-            <a:fillRect/>
-          </a:stretch>
-        </p:blipFill>
-        <p:spPr>
-          <a:xfrm>
-            <a:off x="0" y="0"/>
-            <a:ext cx="12191695" cy="6858000"/>
-          </a:xfrm>
-          <a:prstGeom prst="rect">
-            <a:avLst/>
-          </a:prstGeom>
-        </p:spPr>
-      </p:pic>
+      <p:sp>
+        <p:nvSpPr>
+          <p:cNvPr id="2" name="Shape 0"/>
+          <p:cNvSpPr/>
+          <p:nvPr/>
+        </p:nvSpPr>
+        <p:spPr>
+          <a:xfrm>
+            <a:off x="0" y="6766560"/>
+            <a:ext cx="12191695" cy="91440"/>
+          </a:xfrm>
+          <a:prstGeom prst="rect">
+            <a:avLst/>
+          </a:prstGeom>
+          <a:solidFill>
+            <a:srgbClr val="1A56DB"/>
+          </a:solidFill>
+          <a:ln w="12700">
+            <a:solidFill>
+              <a:srgbClr val="333333"/>
+            </a:solidFill>
+            <a:prstDash val="solid"/>
+          </a:ln>
+        </p:spPr>
+      </p:sp>
+      <p:sp>
+        <p:nvSpPr>
+          <p:cNvPr id="3" name="Text 1"/>
+          <p:cNvSpPr/>
+          <p:nvPr/>
+        </p:nvSpPr>
+        <p:spPr>
+          <a:xfrm>
+            <a:off x="566928" y="402336"/>
+            <a:ext cx="11057839" cy="201168"/>
+          </a:xfrm>
+          <a:prstGeom prst="rect">
+            <a:avLst/>
+          </a:prstGeom>
+          <a:noFill/>
+          <a:ln/>
+        </p:spPr>
+        <p:txBody>
+          <a:bodyPr wrap="square" lIns="0" tIns="0" rIns="0" bIns="0" rtlCol="0" anchor="t"/>
+          <a:lstStyle/>
+          <a:p>
+            <a:pPr algn="l" indent="0" marL="0">
+              <a:buNone/>
+            </a:pPr>
+            <a:r>
+              <a:rPr lang="en-US" sz="900" b="1" spc="160" kern="0" dirty="0">
+                <a:solidFill>
+                  <a:srgbClr val="1A56DB"/>
+                </a:solidFill>
+                <a:latin typeface="Segoe UI" pitchFamily="34" charset="0"/>
+                <a:ea typeface="Segoe UI" pitchFamily="34" charset="-122"/>
+                <a:cs typeface="Segoe UI" pitchFamily="34" charset="-120"/>
+              </a:rPr>
+              <a:t>ACT II</a:t>
+            </a:r>
+            <a:endParaRPr lang="en-US" sz="900" dirty="0"/>
+          </a:p>
+        </p:txBody>
+      </p:sp>
+      <p:sp>
+        <p:nvSpPr>
+          <p:cNvPr id="4" name="Text 2"/>
+          <p:cNvSpPr/>
+          <p:nvPr/>
+        </p:nvSpPr>
+        <p:spPr>
+          <a:xfrm>
+            <a:off x="566928" y="640080"/>
+            <a:ext cx="11057839" cy="420624"/>
+          </a:xfrm>
+          <a:prstGeom prst="rect">
+            <a:avLst/>
+          </a:prstGeom>
+          <a:noFill/>
+          <a:ln/>
+        </p:spPr>
+        <p:txBody>
+          <a:bodyPr wrap="square" lIns="0" tIns="0" rIns="0" bIns="0" rtlCol="0" anchor="t"/>
+          <a:lstStyle/>
+          <a:p>
+            <a:pPr algn="l" indent="0" marL="0">
+              <a:buNone/>
+            </a:pPr>
+            <a:r>
+              <a:rPr lang="en-US" sz="2300" b="1" dirty="0">
+                <a:solidFill>
+                  <a:srgbClr val="12161F"/>
+                </a:solidFill>
+                <a:latin typeface="Segoe UI" pitchFamily="34" charset="0"/>
+                <a:ea typeface="Segoe UI" pitchFamily="34" charset="-122"/>
+                <a:cs typeface="Segoe UI" pitchFamily="34" charset="-120"/>
+              </a:rPr>
+              <a:t>Escalation — the only time you appear</a:t>
+            </a:r>
+            <a:endParaRPr lang="en-US" sz="2300" dirty="0"/>
+          </a:p>
+        </p:txBody>
+      </p:sp>
+      <p:sp>
+        <p:nvSpPr>
+          <p:cNvPr id="5" name="Shape 3"/>
+          <p:cNvSpPr/>
+          <p:nvPr/>
+        </p:nvSpPr>
+        <p:spPr>
+          <a:xfrm>
+            <a:off x="566928" y="1499616"/>
+            <a:ext cx="5208880" cy="2048256"/>
+          </a:xfrm>
+          <a:prstGeom prst="roundRect">
+            <a:avLst>
+              <a:gd name="adj" fmla="val 3125"/>
+            </a:avLst>
+          </a:prstGeom>
+          <a:solidFill>
+            <a:srgbClr val="F5F7FA"/>
+          </a:solidFill>
+          <a:ln w="12700">
+            <a:solidFill>
+              <a:srgbClr val="B45309"/>
+            </a:solidFill>
+            <a:prstDash val="dash"/>
+          </a:ln>
+        </p:spPr>
+      </p:sp>
+      <p:sp>
+        <p:nvSpPr>
+          <p:cNvPr id="6" name="Text 4"/>
+          <p:cNvSpPr/>
+          <p:nvPr/>
+        </p:nvSpPr>
+        <p:spPr>
+          <a:xfrm>
+            <a:off x="804672" y="1700784"/>
+            <a:ext cx="4733392" cy="256032"/>
+          </a:xfrm>
+          <a:prstGeom prst="rect">
+            <a:avLst/>
+          </a:prstGeom>
+          <a:noFill/>
+          <a:ln/>
+        </p:spPr>
+        <p:txBody>
+          <a:bodyPr wrap="square" lIns="0" tIns="0" rIns="0" bIns="0" rtlCol="0" anchor="t"/>
+          <a:lstStyle/>
+          <a:p>
+            <a:pPr algn="l" indent="0" marL="0">
+              <a:buNone/>
+            </a:pPr>
+            <a:r>
+              <a:rPr lang="en-US" sz="1000" b="1" spc="120" kern="0" dirty="0">
+                <a:solidFill>
+                  <a:srgbClr val="5B6472"/>
+                </a:solidFill>
+                <a:latin typeface="Segoe UI" pitchFamily="34" charset="0"/>
+                <a:ea typeface="Segoe UI" pitchFamily="34" charset="-122"/>
+                <a:cs typeface="Segoe UI" pitchFamily="34" charset="-120"/>
+              </a:rPr>
+              <a:t>PAGE 2  ·  NEEDS 2</a:t>
+            </a:r>
+            <a:endParaRPr lang="en-US" sz="1000" dirty="0"/>
+          </a:p>
+        </p:txBody>
+      </p:sp>
+      <p:sp>
+        <p:nvSpPr>
+          <p:cNvPr id="7" name="Shape 5"/>
+          <p:cNvSpPr/>
+          <p:nvPr/>
+        </p:nvSpPr>
+        <p:spPr>
+          <a:xfrm>
+            <a:off x="804672" y="2121408"/>
+            <a:ext cx="2266112" cy="731520"/>
+          </a:xfrm>
+          <a:prstGeom prst="roundRect">
+            <a:avLst>
+              <a:gd name="adj" fmla="val 8750"/>
+            </a:avLst>
+          </a:prstGeom>
+          <a:solidFill>
+            <a:srgbClr val="EDF2FD"/>
+          </a:solidFill>
+          <a:ln w="12700">
+            <a:solidFill>
+              <a:srgbClr val="1A56DB"/>
+            </a:solidFill>
+            <a:prstDash val="solid"/>
+          </a:ln>
+        </p:spPr>
+      </p:sp>
+      <p:sp>
+        <p:nvSpPr>
+          <p:cNvPr id="8" name="Text 6"/>
+          <p:cNvSpPr/>
+          <p:nvPr/>
+        </p:nvSpPr>
+        <p:spPr>
+          <a:xfrm>
+            <a:off x="804672" y="2121408"/>
+            <a:ext cx="2266112" cy="731520"/>
+          </a:xfrm>
+          <a:prstGeom prst="rect">
+            <a:avLst/>
+          </a:prstGeom>
+          <a:noFill/>
+          <a:ln/>
+        </p:spPr>
+        <p:txBody>
+          <a:bodyPr wrap="square" lIns="0" tIns="0" rIns="0" bIns="0" rtlCol="0" anchor="ctr"/>
+          <a:lstStyle/>
+          <a:p>
+            <a:pPr algn="ctr" indent="0" marL="0">
+              <a:buNone/>
+            </a:pPr>
+            <a:r>
+              <a:rPr lang="en-US" sz="1400" b="1" dirty="0">
+                <a:solidFill>
+                  <a:srgbClr val="1A56DB"/>
+                </a:solidFill>
+                <a:latin typeface="Segoe UI" pitchFamily="34" charset="0"/>
+                <a:ea typeface="Segoe UI" pitchFamily="34" charset="-122"/>
+                <a:cs typeface="Segoe UI" pitchFamily="34" charset="-120"/>
+              </a:rPr>
+              <a:t>agent  ✓</a:t>
+            </a:r>
+            <a:endParaRPr lang="en-US" sz="1400" dirty="0"/>
+          </a:p>
+        </p:txBody>
+      </p:sp>
+      <p:sp>
+        <p:nvSpPr>
+          <p:cNvPr id="9" name="Shape 7"/>
+          <p:cNvSpPr/>
+          <p:nvPr/>
+        </p:nvSpPr>
+        <p:spPr>
+          <a:xfrm>
+            <a:off x="3308528" y="2121408"/>
+            <a:ext cx="2266112" cy="731520"/>
+          </a:xfrm>
+          <a:prstGeom prst="roundRect">
+            <a:avLst>
+              <a:gd name="adj" fmla="val 8750"/>
+            </a:avLst>
+          </a:prstGeom>
+          <a:ln w="12700">
+            <a:solidFill>
+              <a:srgbClr val="9AA2B0"/>
+            </a:solidFill>
+            <a:prstDash val="dash"/>
+          </a:ln>
+        </p:spPr>
+      </p:sp>
+      <p:sp>
+        <p:nvSpPr>
+          <p:cNvPr id="10" name="Text 8"/>
+          <p:cNvSpPr/>
+          <p:nvPr/>
+        </p:nvSpPr>
+        <p:spPr>
+          <a:xfrm>
+            <a:off x="3308528" y="2121408"/>
+            <a:ext cx="2266112" cy="731520"/>
+          </a:xfrm>
+          <a:prstGeom prst="rect">
+            <a:avLst/>
+          </a:prstGeom>
+          <a:noFill/>
+          <a:ln/>
+        </p:spPr>
+        <p:txBody>
+          <a:bodyPr wrap="square" lIns="0" tIns="0" rIns="0" bIns="0" rtlCol="0" anchor="ctr"/>
+          <a:lstStyle/>
+          <a:p>
+            <a:pPr algn="ctr" indent="0" marL="0">
+              <a:buNone/>
+            </a:pPr>
+            <a:r>
+              <a:rPr lang="en-US" sz="1400" b="1" dirty="0">
+                <a:solidFill>
+                  <a:srgbClr val="9AA2B0"/>
+                </a:solidFill>
+                <a:latin typeface="Segoe UI" pitchFamily="34" charset="0"/>
+                <a:ea typeface="Segoe UI" pitchFamily="34" charset="-122"/>
+                <a:cs typeface="Segoe UI" pitchFamily="34" charset="-120"/>
+              </a:rPr>
+              <a:t>policy  —</a:t>
+            </a:r>
+            <a:endParaRPr lang="en-US" sz="1400" dirty="0"/>
+          </a:p>
+        </p:txBody>
+      </p:sp>
+      <p:sp>
+        <p:nvSpPr>
+          <p:cNvPr id="11" name="Text 9"/>
+          <p:cNvSpPr/>
+          <p:nvPr/>
+        </p:nvSpPr>
+        <p:spPr>
+          <a:xfrm>
+            <a:off x="804672" y="2999232"/>
+            <a:ext cx="4733392" cy="329184"/>
+          </a:xfrm>
+          <a:prstGeom prst="rect">
+            <a:avLst/>
+          </a:prstGeom>
+          <a:noFill/>
+          <a:ln/>
+        </p:spPr>
+        <p:txBody>
+          <a:bodyPr wrap="square" lIns="0" tIns="0" rIns="0" bIns="0" rtlCol="0" anchor="t"/>
+          <a:lstStyle/>
+          <a:p>
+            <a:pPr algn="l" indent="0" marL="0">
+              <a:buNone/>
+            </a:pPr>
+            <a:r>
+              <a:rPr lang="en-US" sz="1400" b="1" dirty="0">
+                <a:solidFill>
+                  <a:srgbClr val="B45309"/>
+                </a:solidFill>
+                <a:latin typeface="Segoe UI" pitchFamily="34" charset="0"/>
+                <a:ea typeface="Segoe UI" pitchFamily="34" charset="-122"/>
+                <a:cs typeface="Segoe UI" pitchFamily="34" charset="-120"/>
+              </a:rPr>
+              <a:t>Half of two. Nothing happens.</a:t>
+            </a:r>
+            <a:endParaRPr lang="en-US" sz="1400" dirty="0"/>
+          </a:p>
+        </p:txBody>
+      </p:sp>
+      <p:sp>
+        <p:nvSpPr>
+          <p:cNvPr id="12" name="Shape 10"/>
+          <p:cNvSpPr/>
+          <p:nvPr/>
+        </p:nvSpPr>
+        <p:spPr>
+          <a:xfrm>
+            <a:off x="5885536" y="2523744"/>
+            <a:ext cx="420624" cy="0"/>
+          </a:xfrm>
+          <a:prstGeom prst="line">
+            <a:avLst/>
+          </a:prstGeom>
+          <a:noFill/>
+          <a:ln w="25400">
+            <a:solidFill>
+              <a:srgbClr val="1A56DB"/>
+            </a:solidFill>
+            <a:prstDash val="solid"/>
+            <a:tailEnd type="triangle"/>
+          </a:ln>
+        </p:spPr>
+      </p:sp>
+      <p:sp>
+        <p:nvSpPr>
+          <p:cNvPr id="13" name="Shape 11"/>
+          <p:cNvSpPr/>
+          <p:nvPr/>
+        </p:nvSpPr>
+        <p:spPr>
+          <a:xfrm>
+            <a:off x="6415888" y="1499616"/>
+            <a:ext cx="5208880" cy="2048256"/>
+          </a:xfrm>
+          <a:prstGeom prst="roundRect">
+            <a:avLst>
+              <a:gd name="adj" fmla="val 3125"/>
+            </a:avLst>
+          </a:prstGeom>
+          <a:solidFill>
+            <a:srgbClr val="EDF2FD"/>
+          </a:solidFill>
+          <a:ln w="12700">
+            <a:solidFill>
+              <a:srgbClr val="1A56DB"/>
+            </a:solidFill>
+            <a:prstDash val="solid"/>
+          </a:ln>
+        </p:spPr>
+      </p:sp>
+      <p:sp>
+        <p:nvSpPr>
+          <p:cNvPr id="14" name="Text 12"/>
+          <p:cNvSpPr/>
+          <p:nvPr/>
+        </p:nvSpPr>
+        <p:spPr>
+          <a:xfrm>
+            <a:off x="6653632" y="1700784"/>
+            <a:ext cx="4733392" cy="256032"/>
+          </a:xfrm>
+          <a:prstGeom prst="rect">
+            <a:avLst/>
+          </a:prstGeom>
+          <a:noFill/>
+          <a:ln/>
+        </p:spPr>
+        <p:txBody>
+          <a:bodyPr wrap="square" lIns="0" tIns="0" rIns="0" bIns="0" rtlCol="0" anchor="t"/>
+          <a:lstStyle/>
+          <a:p>
+            <a:pPr algn="l" indent="0" marL="0">
+              <a:buNone/>
+            </a:pPr>
+            <a:r>
+              <a:rPr lang="en-US" sz="1000" b="1" spc="120" kern="0" dirty="0">
+                <a:solidFill>
+                  <a:srgbClr val="1A56DB"/>
+                </a:solidFill>
+                <a:latin typeface="Segoe UI" pitchFamily="34" charset="0"/>
+                <a:ea typeface="Segoe UI" pitchFamily="34" charset="-122"/>
+                <a:cs typeface="Segoe UI" pitchFamily="34" charset="-120"/>
+              </a:rPr>
+              <a:t>PAGE 1  ·  NEEDS 1</a:t>
+            </a:r>
+            <a:endParaRPr lang="en-US" sz="1000" dirty="0"/>
+          </a:p>
+        </p:txBody>
+      </p:sp>
+      <p:sp>
+        <p:nvSpPr>
+          <p:cNvPr id="15" name="Shape 13"/>
+          <p:cNvSpPr/>
+          <p:nvPr/>
+        </p:nvSpPr>
+        <p:spPr>
+          <a:xfrm>
+            <a:off x="6653632" y="2121408"/>
+            <a:ext cx="2266112" cy="731520"/>
+          </a:xfrm>
+          <a:prstGeom prst="roundRect">
+            <a:avLst>
+              <a:gd name="adj" fmla="val 8750"/>
+            </a:avLst>
+          </a:prstGeom>
+          <a:solidFill>
+            <a:srgbClr val="1A56DB"/>
+          </a:solidFill>
+          <a:ln w="12700">
+            <a:solidFill>
+              <a:srgbClr val="1A56DB"/>
+            </a:solidFill>
+            <a:prstDash val="solid"/>
+          </a:ln>
+        </p:spPr>
+      </p:sp>
+      <p:sp>
+        <p:nvSpPr>
+          <p:cNvPr id="16" name="Text 14"/>
+          <p:cNvSpPr/>
+          <p:nvPr/>
+        </p:nvSpPr>
+        <p:spPr>
+          <a:xfrm>
+            <a:off x="6653632" y="2121408"/>
+            <a:ext cx="2266112" cy="731520"/>
+          </a:xfrm>
+          <a:prstGeom prst="rect">
+            <a:avLst/>
+          </a:prstGeom>
+          <a:noFill/>
+          <a:ln/>
+        </p:spPr>
+        <p:txBody>
+          <a:bodyPr wrap="square" lIns="0" tIns="0" rIns="0" bIns="0" rtlCol="0" anchor="ctr"/>
+          <a:lstStyle/>
+          <a:p>
+            <a:pPr algn="ctr" indent="0" marL="0">
+              <a:buNone/>
+            </a:pPr>
+            <a:r>
+              <a:rPr lang="en-US" sz="1400" b="1" dirty="0">
+                <a:solidFill>
+                  <a:srgbClr val="FFFFFF"/>
+                </a:solidFill>
+                <a:latin typeface="Segoe UI" pitchFamily="34" charset="0"/>
+                <a:ea typeface="Segoe UI" pitchFamily="34" charset="-122"/>
+                <a:cs typeface="Segoe UI" pitchFamily="34" charset="-120"/>
+              </a:rPr>
+              <a:t>you  ✓</a:t>
+            </a:r>
+            <a:endParaRPr lang="en-US" sz="1400" dirty="0"/>
+          </a:p>
+        </p:txBody>
+      </p:sp>
+      <p:sp>
+        <p:nvSpPr>
+          <p:cNvPr id="17" name="Text 15"/>
+          <p:cNvSpPr/>
+          <p:nvPr/>
+        </p:nvSpPr>
+        <p:spPr>
+          <a:xfrm>
+            <a:off x="9157487" y="2121408"/>
+            <a:ext cx="2266112" cy="731520"/>
+          </a:xfrm>
+          <a:prstGeom prst="rect">
+            <a:avLst/>
+          </a:prstGeom>
+          <a:noFill/>
+          <a:ln/>
+        </p:spPr>
+        <p:txBody>
+          <a:bodyPr wrap="square" lIns="0" tIns="0" rIns="0" bIns="0" rtlCol="0" anchor="ctr"/>
+          <a:lstStyle/>
+          <a:p>
+            <a:pPr algn="l" indent="0" marL="0">
+              <a:buNone/>
+            </a:pPr>
+            <a:r>
+              <a:rPr lang="en-US" sz="1300" dirty="0">
+                <a:solidFill>
+                  <a:srgbClr val="5B6472"/>
+                </a:solidFill>
+                <a:latin typeface="Segoe UI" pitchFamily="34" charset="0"/>
+                <a:ea typeface="Segoe UI" pitchFamily="34" charset="-122"/>
+                <a:cs typeface="Segoe UI" pitchFamily="34" charset="-120"/>
+              </a:rPr>
+              <a:t>satisfies the book alone</a:t>
+            </a:r>
+            <a:endParaRPr lang="en-US" sz="1300" dirty="0"/>
+          </a:p>
+        </p:txBody>
+      </p:sp>
+      <p:sp>
+        <p:nvSpPr>
+          <p:cNvPr id="18" name="Text 16"/>
+          <p:cNvSpPr/>
+          <p:nvPr/>
+        </p:nvSpPr>
+        <p:spPr>
+          <a:xfrm>
+            <a:off x="6653632" y="2999232"/>
+            <a:ext cx="4733392" cy="329184"/>
+          </a:xfrm>
+          <a:prstGeom prst="rect">
+            <a:avLst/>
+          </a:prstGeom>
+          <a:noFill/>
+          <a:ln/>
+        </p:spPr>
+        <p:txBody>
+          <a:bodyPr wrap="square" lIns="0" tIns="0" rIns="0" bIns="0" rtlCol="0" anchor="t"/>
+          <a:lstStyle/>
+          <a:p>
+            <a:pPr algn="l" indent="0" marL="0">
+              <a:buNone/>
+            </a:pPr>
+            <a:r>
+              <a:rPr lang="en-US" sz="1400" b="1" dirty="0">
+                <a:solidFill>
+                  <a:srgbClr val="1A56DB"/>
+                </a:solidFill>
+                <a:latin typeface="Segoe UI" pitchFamily="34" charset="0"/>
+                <a:ea typeface="Segoe UI" pitchFamily="34" charset="-122"/>
+                <a:cs typeface="Segoe UI" pitchFamily="34" charset="-120"/>
+              </a:rPr>
+              <a:t>One signature. Status 5.</a:t>
+            </a:r>
+            <a:endParaRPr lang="en-US" sz="1400" dirty="0"/>
+          </a:p>
+        </p:txBody>
+      </p:sp>
+      <p:sp>
+        <p:nvSpPr>
+          <p:cNvPr id="19" name="Shape 17"/>
+          <p:cNvSpPr/>
+          <p:nvPr/>
+        </p:nvSpPr>
+        <p:spPr>
+          <a:xfrm>
+            <a:off x="566928" y="4023360"/>
+            <a:ext cx="5208880" cy="969264"/>
+          </a:xfrm>
+          <a:prstGeom prst="roundRect">
+            <a:avLst>
+              <a:gd name="adj" fmla="val 6604"/>
+            </a:avLst>
+          </a:prstGeom>
+          <a:solidFill>
+            <a:srgbClr val="F5F7FA"/>
+          </a:solidFill>
+          <a:ln w="12700">
+            <a:solidFill>
+              <a:srgbClr val="DDE2EA"/>
+            </a:solidFill>
+            <a:prstDash val="solid"/>
+          </a:ln>
+        </p:spPr>
+      </p:sp>
+      <p:sp>
+        <p:nvSpPr>
+          <p:cNvPr id="20" name="Text 18"/>
+          <p:cNvSpPr/>
+          <p:nvPr/>
+        </p:nvSpPr>
+        <p:spPr>
+          <a:xfrm>
+            <a:off x="804672" y="4224528"/>
+            <a:ext cx="4733392" cy="329184"/>
+          </a:xfrm>
+          <a:prstGeom prst="rect">
+            <a:avLst/>
+          </a:prstGeom>
+          <a:noFill/>
+          <a:ln/>
+        </p:spPr>
+        <p:txBody>
+          <a:bodyPr wrap="square" lIns="0" tIns="0" rIns="0" bIns="0" rtlCol="0" anchor="t"/>
+          <a:lstStyle/>
+          <a:p>
+            <a:pPr algn="l" indent="0" marL="0">
+              <a:buNone/>
+            </a:pPr>
+            <a:r>
+              <a:rPr lang="en-US" sz="1600" b="1" dirty="0">
+                <a:solidFill>
+                  <a:srgbClr val="1A56DB"/>
+                </a:solidFill>
+                <a:latin typeface="Consolas" pitchFamily="34" charset="0"/>
+                <a:ea typeface="Consolas" pitchFamily="34" charset="-122"/>
+                <a:cs typeface="Consolas" pitchFamily="34" charset="-120"/>
+              </a:rPr>
+              <a:t>certen-approve list</a:t>
+            </a:r>
+            <a:endParaRPr lang="en-US" sz="1600" dirty="0"/>
+          </a:p>
+        </p:txBody>
+      </p:sp>
+      <p:sp>
+        <p:nvSpPr>
+          <p:cNvPr id="21" name="Text 19"/>
+          <p:cNvSpPr/>
+          <p:nvPr/>
+        </p:nvSpPr>
+        <p:spPr>
+          <a:xfrm>
+            <a:off x="804672" y="4608576"/>
+            <a:ext cx="4733392" cy="256032"/>
+          </a:xfrm>
+          <a:prstGeom prst="rect">
+            <a:avLst/>
+          </a:prstGeom>
+          <a:noFill/>
+          <a:ln/>
+        </p:spPr>
+        <p:txBody>
+          <a:bodyPr wrap="square" lIns="0" tIns="0" rIns="0" bIns="0" rtlCol="0" anchor="t"/>
+          <a:lstStyle/>
+          <a:p>
+            <a:pPr algn="l" indent="0" marL="0">
+              <a:buNone/>
+            </a:pPr>
+            <a:r>
+              <a:rPr lang="en-US" sz="1200" dirty="0">
+                <a:solidFill>
+                  <a:srgbClr val="5B6472"/>
+                </a:solidFill>
+                <a:latin typeface="Segoe UI" pitchFamily="34" charset="0"/>
+                <a:ea typeface="Segoe UI" pitchFamily="34" charset="-122"/>
+                <a:cs typeface="Segoe UI" pitchFamily="34" charset="-120"/>
+              </a:rPr>
+              <a:t>what is waiting</a:t>
+            </a:r>
+            <a:endParaRPr lang="en-US" sz="1200" dirty="0"/>
+          </a:p>
+        </p:txBody>
+      </p:sp>
+      <p:sp>
+        <p:nvSpPr>
+          <p:cNvPr id="22" name="Shape 20"/>
+          <p:cNvSpPr/>
+          <p:nvPr/>
+        </p:nvSpPr>
+        <p:spPr>
+          <a:xfrm>
+            <a:off x="6415888" y="4023360"/>
+            <a:ext cx="5208880" cy="969264"/>
+          </a:xfrm>
+          <a:prstGeom prst="roundRect">
+            <a:avLst>
+              <a:gd name="adj" fmla="val 6604"/>
+            </a:avLst>
+          </a:prstGeom>
+          <a:solidFill>
+            <a:srgbClr val="F5F7FA"/>
+          </a:solidFill>
+          <a:ln w="12700">
+            <a:solidFill>
+              <a:srgbClr val="DDE2EA"/>
+            </a:solidFill>
+            <a:prstDash val="solid"/>
+          </a:ln>
+        </p:spPr>
+      </p:sp>
+      <p:sp>
+        <p:nvSpPr>
+          <p:cNvPr id="23" name="Text 21"/>
+          <p:cNvSpPr/>
+          <p:nvPr/>
+        </p:nvSpPr>
+        <p:spPr>
+          <a:xfrm>
+            <a:off x="6653632" y="4224528"/>
+            <a:ext cx="4733392" cy="329184"/>
+          </a:xfrm>
+          <a:prstGeom prst="rect">
+            <a:avLst/>
+          </a:prstGeom>
+          <a:noFill/>
+          <a:ln/>
+        </p:spPr>
+        <p:txBody>
+          <a:bodyPr wrap="square" lIns="0" tIns="0" rIns="0" bIns="0" rtlCol="0" anchor="t"/>
+          <a:lstStyle/>
+          <a:p>
+            <a:pPr algn="l" indent="0" marL="0">
+              <a:buNone/>
+            </a:pPr>
+            <a:r>
+              <a:rPr lang="en-US" sz="1600" b="1" dirty="0">
+                <a:solidFill>
+                  <a:srgbClr val="1A56DB"/>
+                </a:solidFill>
+                <a:latin typeface="Consolas" pitchFamily="34" charset="0"/>
+                <a:ea typeface="Consolas" pitchFamily="34" charset="-122"/>
+                <a:cs typeface="Consolas" pitchFamily="34" charset="-120"/>
+              </a:rPr>
+              <a:t>certen-approve sign &lt;tx&gt;</a:t>
+            </a:r>
+            <a:endParaRPr lang="en-US" sz="1600" dirty="0"/>
+          </a:p>
+        </p:txBody>
+      </p:sp>
+      <p:sp>
+        <p:nvSpPr>
+          <p:cNvPr id="24" name="Text 22"/>
+          <p:cNvSpPr/>
+          <p:nvPr/>
+        </p:nvSpPr>
+        <p:spPr>
+          <a:xfrm>
+            <a:off x="6653632" y="4608576"/>
+            <a:ext cx="4733392" cy="256032"/>
+          </a:xfrm>
+          <a:prstGeom prst="rect">
+            <a:avLst/>
+          </a:prstGeom>
+          <a:noFill/>
+          <a:ln/>
+        </p:spPr>
+        <p:txBody>
+          <a:bodyPr wrap="square" lIns="0" tIns="0" rIns="0" bIns="0" rtlCol="0" anchor="t"/>
+          <a:lstStyle/>
+          <a:p>
+            <a:pPr algn="l" indent="0" marL="0">
+              <a:buNone/>
+            </a:pPr>
+            <a:r>
+              <a:rPr lang="en-US" sz="1200" dirty="0">
+                <a:solidFill>
+                  <a:srgbClr val="5B6472"/>
+                </a:solidFill>
+                <a:latin typeface="Segoe UI" pitchFamily="34" charset="0"/>
+                <a:ea typeface="Segoe UI" pitchFamily="34" charset="-122"/>
+                <a:cs typeface="Segoe UI" pitchFamily="34" charset="-120"/>
+              </a:rPr>
+              <a:t>your key, your passphrase</a:t>
+            </a:r>
+            <a:endParaRPr lang="en-US" sz="1200" dirty="0"/>
+          </a:p>
+        </p:txBody>
+      </p:sp>
+      <p:sp>
+        <p:nvSpPr>
+          <p:cNvPr id="25" name="Shape 23"/>
+          <p:cNvSpPr/>
+          <p:nvPr/>
+        </p:nvSpPr>
+        <p:spPr>
+          <a:xfrm>
+            <a:off x="566928" y="5303520"/>
+            <a:ext cx="11057839" cy="621792"/>
+          </a:xfrm>
+          <a:prstGeom prst="roundRect">
+            <a:avLst>
+              <a:gd name="adj" fmla="val 10294"/>
+            </a:avLst>
+          </a:prstGeom>
+          <a:solidFill>
+            <a:srgbClr val="E9F5EE"/>
+          </a:solidFill>
+          <a:ln w="12700">
+            <a:solidFill>
+              <a:srgbClr val="157F4A"/>
+            </a:solidFill>
+            <a:prstDash val="solid"/>
+          </a:ln>
+        </p:spPr>
+      </p:sp>
+      <p:sp>
+        <p:nvSpPr>
+          <p:cNvPr id="26" name="Text 24"/>
+          <p:cNvSpPr/>
+          <p:nvPr/>
+        </p:nvSpPr>
+        <p:spPr>
+          <a:xfrm>
+            <a:off x="841248" y="5303520"/>
+            <a:ext cx="10509199" cy="621792"/>
+          </a:xfrm>
+          <a:prstGeom prst="rect">
+            <a:avLst/>
+          </a:prstGeom>
+          <a:noFill/>
+          <a:ln/>
+        </p:spPr>
+        <p:txBody>
+          <a:bodyPr wrap="square" lIns="0" tIns="0" rIns="0" bIns="0" rtlCol="0" anchor="ctr"/>
+          <a:lstStyle/>
+          <a:p>
+            <a:pPr algn="l" indent="0" marL="0">
+              <a:buNone/>
+            </a:pPr>
+            <a:r>
+              <a:rPr lang="en-US" sz="1300" b="1" dirty="0">
+                <a:solidFill>
+                  <a:srgbClr val="157F4A"/>
+                </a:solidFill>
+                <a:latin typeface="Segoe UI" pitchFamily="34" charset="0"/>
+                <a:ea typeface="Segoe UI" pitchFamily="34" charset="-122"/>
+                <a:cs typeface="Segoe UI" pitchFamily="34" charset="-120"/>
+              </a:rPr>
+              <a:t>Encrypted at rest. No daemon holds it — nothing signs for you while you are away.</a:t>
+            </a:r>
+            <a:endParaRPr lang="en-US" sz="1300" dirty="0"/>
+          </a:p>
+        </p:txBody>
+      </p:sp>
+      <p:sp>
+        <p:nvSpPr>
+          <p:cNvPr id="27" name="Shape 25"/>
+          <p:cNvSpPr/>
+          <p:nvPr/>
+        </p:nvSpPr>
+        <p:spPr>
+          <a:xfrm>
+            <a:off x="566928" y="6199632"/>
+            <a:ext cx="11057839" cy="402336"/>
+          </a:xfrm>
+          <a:prstGeom prst="roundRect">
+            <a:avLst>
+              <a:gd name="adj" fmla="val 113636"/>
+            </a:avLst>
+          </a:prstGeom>
+          <a:solidFill>
+            <a:srgbClr val="EDF2FD"/>
+          </a:solidFill>
+          <a:ln w="12700">
+            <a:solidFill>
+              <a:srgbClr val="1A56DB"/>
+            </a:solidFill>
+            <a:prstDash val="solid"/>
+          </a:ln>
+        </p:spPr>
+      </p:sp>
+      <p:sp>
+        <p:nvSpPr>
+          <p:cNvPr id="28" name="Text 26"/>
+          <p:cNvSpPr/>
+          <p:nvPr/>
+        </p:nvSpPr>
+        <p:spPr>
+          <a:xfrm>
+            <a:off x="859536" y="6199632"/>
+            <a:ext cx="10472623" cy="402336"/>
+          </a:xfrm>
+          <a:prstGeom prst="rect">
+            <a:avLst/>
+          </a:prstGeom>
+          <a:noFill/>
+          <a:ln/>
+        </p:spPr>
+        <p:txBody>
+          <a:bodyPr wrap="square" lIns="0" tIns="0" rIns="0" bIns="0" rtlCol="0" anchor="ctr"/>
+          <a:lstStyle/>
+          <a:p>
+            <a:pPr algn="l" indent="0" marL="0">
+              <a:buNone/>
+            </a:pPr>
+            <a:r>
+              <a:rPr lang="en-US" sz="1150" b="1" dirty="0">
+                <a:solidFill>
+                  <a:srgbClr val="1A56DB"/>
+                </a:solidFill>
+                <a:latin typeface="Segoe UI" pitchFamily="34" charset="0"/>
+                <a:ea typeface="Segoe UI" pitchFamily="34" charset="-122"/>
+                <a:cs typeface="Segoe UI" pitchFamily="34" charset="-120"/>
+              </a:rPr>
+              <a:t>PROVEN LIVE   ·   0xf62eefea…  →  status 5.  Record: you on book/1, agent on book/2</a:t>
+            </a:r>
+            <a:endParaRPr lang="en-US" sz="1150" dirty="0"/>
+          </a:p>
+        </p:txBody>
+      </p:sp>
+    </p:spTree>
+  </p:cSld>
+  <p:clrMapOvr>
+    <a:masterClrMapping/>
+  </p:clrMapOvr>
+</p:sld>
+</file>
+
+<file path=ppt/slides/slide6.xml><?xml version="1.0" encoding="utf-8"?>
+<p:sld xmlns:a="http://schemas.openxmlformats.org/drawingml/2006/main" xmlns:r="http://schemas.openxmlformats.org/officeDocument/2006/relationships" xmlns:p="http://schemas.openxmlformats.org/presentationml/2006/main">
+  <p:cSld name="Slide 6">
+    <p:spTree>
+      <p:nvGrpSpPr>
+        <p:cNvPr id="1" name=""/>
+        <p:cNvGrpSpPr/>
+        <p:nvPr/>
+      </p:nvGrpSpPr>
+      <p:grpSpPr>
+        <a:xfrm>
+          <a:off x="0" y="0"/>
+          <a:ext cx="0" cy="0"/>
+          <a:chOff x="0" y="0"/>
+          <a:chExt cx="0" cy="0"/>
+        </a:xfrm>
+      </p:grpSpPr>
+      <p:sp>
+        <p:nvSpPr>
+          <p:cNvPr id="2" name="Shape 0"/>
+          <p:cNvSpPr/>
+          <p:nvPr/>
+        </p:nvSpPr>
+        <p:spPr>
+          <a:xfrm>
+            <a:off x="0" y="6766560"/>
+            <a:ext cx="12191695" cy="91440"/>
+          </a:xfrm>
+          <a:prstGeom prst="rect">
+            <a:avLst/>
+          </a:prstGeom>
+          <a:solidFill>
+            <a:srgbClr val="1A56DB"/>
+          </a:solidFill>
+          <a:ln w="12700">
+            <a:solidFill>
+              <a:srgbClr val="333333"/>
+            </a:solidFill>
+            <a:prstDash val="solid"/>
+          </a:ln>
+        </p:spPr>
+      </p:sp>
+      <p:sp>
+        <p:nvSpPr>
+          <p:cNvPr id="3" name="Text 1"/>
+          <p:cNvSpPr/>
+          <p:nvPr/>
+        </p:nvSpPr>
+        <p:spPr>
+          <a:xfrm>
+            <a:off x="566928" y="402336"/>
+            <a:ext cx="11057839" cy="201168"/>
+          </a:xfrm>
+          <a:prstGeom prst="rect">
+            <a:avLst/>
+          </a:prstGeom>
+          <a:noFill/>
+          <a:ln/>
+        </p:spPr>
+        <p:txBody>
+          <a:bodyPr wrap="square" lIns="0" tIns="0" rIns="0" bIns="0" rtlCol="0" anchor="t"/>
+          <a:lstStyle/>
+          <a:p>
+            <a:pPr algn="l" indent="0" marL="0">
+              <a:buNone/>
+            </a:pPr>
+            <a:r>
+              <a:rPr lang="en-US" sz="900" b="1" spc="160" kern="0" dirty="0">
+                <a:solidFill>
+                  <a:srgbClr val="1A56DB"/>
+                </a:solidFill>
+                <a:latin typeface="Segoe UI" pitchFamily="34" charset="0"/>
+                <a:ea typeface="Segoe UI" pitchFamily="34" charset="-122"/>
+                <a:cs typeface="Segoe UI" pitchFamily="34" charset="-120"/>
+              </a:rPr>
+              <a:t>SCOPE</a:t>
+            </a:r>
+            <a:endParaRPr lang="en-US" sz="900" dirty="0"/>
+          </a:p>
+        </p:txBody>
+      </p:sp>
+      <p:sp>
+        <p:nvSpPr>
+          <p:cNvPr id="4" name="Text 2"/>
+          <p:cNvSpPr/>
+          <p:nvPr/>
+        </p:nvSpPr>
+        <p:spPr>
+          <a:xfrm>
+            <a:off x="566928" y="640080"/>
+            <a:ext cx="11057839" cy="420624"/>
+          </a:xfrm>
+          <a:prstGeom prst="rect">
+            <a:avLst/>
+          </a:prstGeom>
+          <a:noFill/>
+          <a:ln/>
+        </p:spPr>
+        <p:txBody>
+          <a:bodyPr wrap="square" lIns="0" tIns="0" rIns="0" bIns="0" rtlCol="0" anchor="t"/>
+          <a:lstStyle/>
+          <a:p>
+            <a:pPr algn="l" indent="0" marL="0">
+              <a:buNone/>
+            </a:pPr>
+            <a:r>
+              <a:rPr lang="en-US" sz="2300" b="1" dirty="0">
+                <a:solidFill>
+                  <a:srgbClr val="12161F"/>
+                </a:solidFill>
+                <a:latin typeface="Segoe UI" pitchFamily="34" charset="0"/>
+                <a:ea typeface="Segoe UI" pitchFamily="34" charset="-122"/>
+                <a:cs typeface="Segoe UI" pitchFamily="34" charset="-120"/>
+              </a:rPr>
+              <a:t>What this is — and what it isn’t</a:t>
+            </a:r>
+            <a:endParaRPr lang="en-US" sz="2300" dirty="0"/>
+          </a:p>
+        </p:txBody>
+      </p:sp>
+      <p:sp>
+        <p:nvSpPr>
+          <p:cNvPr id="5" name="Shape 3"/>
+          <p:cNvSpPr/>
+          <p:nvPr/>
+        </p:nvSpPr>
+        <p:spPr>
+          <a:xfrm>
+            <a:off x="566928" y="1499616"/>
+            <a:ext cx="5346040" cy="2889504"/>
+          </a:xfrm>
+          <a:prstGeom prst="roundRect">
+            <a:avLst>
+              <a:gd name="adj" fmla="val 2215"/>
+            </a:avLst>
+          </a:prstGeom>
+          <a:solidFill>
+            <a:srgbClr val="E9F5EE"/>
+          </a:solidFill>
+          <a:ln w="12700">
+            <a:solidFill>
+              <a:srgbClr val="157F4A"/>
+            </a:solidFill>
+            <a:prstDash val="solid"/>
+          </a:ln>
+        </p:spPr>
+      </p:sp>
+      <p:sp>
+        <p:nvSpPr>
+          <p:cNvPr id="6" name="Text 4"/>
+          <p:cNvSpPr/>
+          <p:nvPr/>
+        </p:nvSpPr>
+        <p:spPr>
+          <a:xfrm>
+            <a:off x="841248" y="1719072"/>
+            <a:ext cx="1828800" cy="256032"/>
+          </a:xfrm>
+          <a:prstGeom prst="rect">
+            <a:avLst/>
+          </a:prstGeom>
+          <a:noFill/>
+          <a:ln/>
+        </p:spPr>
+        <p:txBody>
+          <a:bodyPr wrap="square" lIns="0" tIns="0" rIns="0" bIns="0" rtlCol="0" anchor="t"/>
+          <a:lstStyle/>
+          <a:p>
+            <a:pPr algn="l" indent="0" marL="0">
+              <a:buNone/>
+            </a:pPr>
+            <a:r>
+              <a:rPr lang="en-US" sz="1100" b="1" spc="200" kern="0" dirty="0">
+                <a:solidFill>
+                  <a:srgbClr val="157F4A"/>
+                </a:solidFill>
+                <a:latin typeface="Segoe UI" pitchFamily="34" charset="0"/>
+                <a:ea typeface="Segoe UI" pitchFamily="34" charset="-122"/>
+                <a:cs typeface="Segoe UI" pitchFamily="34" charset="-120"/>
+              </a:rPr>
+              <a:t>IS</a:t>
+            </a:r>
+            <a:endParaRPr lang="en-US" sz="1100" dirty="0"/>
+          </a:p>
+        </p:txBody>
+      </p:sp>
+      <p:sp>
+        <p:nvSpPr>
+          <p:cNvPr id="7" name="Text 5"/>
+          <p:cNvSpPr/>
+          <p:nvPr/>
+        </p:nvSpPr>
+        <p:spPr>
+          <a:xfrm>
+            <a:off x="841248" y="2103120"/>
+            <a:ext cx="4797400" cy="2103120"/>
+          </a:xfrm>
+          <a:prstGeom prst="rect">
+            <a:avLst/>
+          </a:prstGeom>
+          <a:noFill/>
+          <a:ln/>
+        </p:spPr>
+        <p:txBody>
+          <a:bodyPr wrap="square" lIns="0" tIns="0" rIns="0" bIns="0" rtlCol="0" anchor="t"/>
+          <a:lstStyle/>
+          <a:p>
+            <a:pPr marL="342900" indent="-342900">
+              <a:lnSpc>
+                <a:spcPct val="150000"/>
+              </a:lnSpc>
+              <a:buSzPct val="100000"/>
+              <a:buChar char="✓"/>
+            </a:pPr>
+            <a:r>
+              <a:rPr lang="en-US" sz="1350" dirty="0">
+                <a:solidFill>
+                  <a:srgbClr val="12161F"/>
+                </a:solidFill>
+                <a:latin typeface="Segoe UI" pitchFamily="34" charset="0"/>
+                <a:ea typeface="Segoe UI" pitchFamily="34" charset="-122"/>
+                <a:cs typeface="Segoe UI" pitchFamily="34" charset="-120"/>
+              </a:rPr>
+              <a:t>live on Sepolia, panel as admin</a:t>
+            </a:r>
+            <a:endParaRPr lang="en-US" sz="1350" dirty="0"/>
+          </a:p>
+          <a:p>
+            <a:pPr marL="342900" indent="-342900">
+              <a:lnSpc>
+                <a:spcPct val="150000"/>
+              </a:lnSpc>
+              <a:buSzPct val="100000"/>
+              <a:buChar char="✓"/>
+            </a:pPr>
+            <a:r>
+              <a:rPr lang="en-US" sz="1350" dirty="0">
+                <a:solidFill>
+                  <a:srgbClr val="12161F"/>
+                </a:solidFill>
+                <a:latin typeface="Segoe UI" pitchFamily="34" charset="0"/>
+                <a:ea typeface="Segoe UI" pitchFamily="34" charset="-122"/>
+                <a:cs typeface="Segoe UI" pitchFamily="34" charset="-120"/>
+              </a:rPr>
+              <a:t>routine settled by seats you control</a:t>
+            </a:r>
+            <a:endParaRPr lang="en-US" sz="1350" dirty="0"/>
+          </a:p>
+          <a:p>
+            <a:pPr marL="342900" indent="-342900">
+              <a:lnSpc>
+                <a:spcPct val="150000"/>
+              </a:lnSpc>
+              <a:buSzPct val="100000"/>
+              <a:buChar char="✓"/>
+            </a:pPr>
+            <a:r>
+              <a:rPr lang="en-US" sz="1350" dirty="0">
+                <a:solidFill>
+                  <a:srgbClr val="12161F"/>
+                </a:solidFill>
+                <a:latin typeface="Segoe UI" pitchFamily="34" charset="0"/>
+                <a:ea typeface="Segoe UI" pitchFamily="34" charset="-122"/>
+                <a:cs typeface="Segoe UI" pitchFamily="34" charset="-120"/>
+              </a:rPr>
+              <a:t>escalation by a key only you hold</a:t>
+            </a:r>
+            <a:endParaRPr lang="en-US" sz="1350" dirty="0"/>
+          </a:p>
+          <a:p>
+            <a:pPr marL="342900" indent="-342900">
+              <a:lnSpc>
+                <a:spcPct val="150000"/>
+              </a:lnSpc>
+              <a:buSzPct val="100000"/>
+              <a:buChar char="✓"/>
+            </a:pPr>
+            <a:r>
+              <a:rPr lang="en-US" sz="1350" dirty="0">
+                <a:solidFill>
+                  <a:srgbClr val="12161F"/>
+                </a:solidFill>
+                <a:latin typeface="Segoe UI" pitchFamily="34" charset="0"/>
+                <a:ea typeface="Segoe UI" pitchFamily="34" charset="-122"/>
+                <a:cs typeface="Segoe UI" pitchFamily="34" charset="-120"/>
+              </a:rPr>
+              <a:t>a policy engine that fails closed</a:t>
+            </a:r>
+            <a:endParaRPr lang="en-US" sz="1350" dirty="0"/>
+          </a:p>
+          <a:p>
+            <a:pPr marL="342900" indent="-342900">
+              <a:lnSpc>
+                <a:spcPct val="150000"/>
+              </a:lnSpc>
+              <a:buSzPct val="100000"/>
+              <a:buChar char="✓"/>
+            </a:pPr>
+            <a:r>
+              <a:rPr lang="en-US" sz="1350" dirty="0">
+                <a:solidFill>
+                  <a:srgbClr val="12161F"/>
+                </a:solidFill>
+                <a:latin typeface="Segoe UI" pitchFamily="34" charset="0"/>
+                <a:ea typeface="Segoe UI" pitchFamily="34" charset="-122"/>
+                <a:cs typeface="Segoe UI" pitchFamily="34" charset="-120"/>
+              </a:rPr>
+              <a:t>membership recoverable from above</a:t>
+            </a:r>
+            <a:endParaRPr lang="en-US" sz="1350" dirty="0"/>
+          </a:p>
+          <a:p>
+            <a:pPr marL="342900" indent="-342900">
+              <a:lnSpc>
+                <a:spcPct val="150000"/>
+              </a:lnSpc>
+              <a:buSzPct val="100000"/>
+              <a:buChar char="✓"/>
+            </a:pPr>
+            <a:r>
+              <a:rPr lang="en-US" sz="1350" dirty="0">
+                <a:solidFill>
+                  <a:srgbClr val="12161F"/>
+                </a:solidFill>
+                <a:latin typeface="Segoe UI" pitchFamily="34" charset="0"/>
+                <a:ea typeface="Segoe UI" pitchFamily="34" charset="-122"/>
+                <a:cs typeface="Segoe UI" pitchFamily="34" charset="-120"/>
+              </a:rPr>
+              <a:t>re-checkable on Etherscan</a:t>
+            </a:r>
+            <a:endParaRPr lang="en-US" sz="1350" dirty="0"/>
+          </a:p>
+        </p:txBody>
+      </p:sp>
+      <p:sp>
+        <p:nvSpPr>
+          <p:cNvPr id="8" name="Shape 6"/>
+          <p:cNvSpPr/>
+          <p:nvPr/>
+        </p:nvSpPr>
+        <p:spPr>
+          <a:xfrm>
+            <a:off x="6278728" y="1499616"/>
+            <a:ext cx="5346040" cy="2889504"/>
+          </a:xfrm>
+          <a:prstGeom prst="roundRect">
+            <a:avLst>
+              <a:gd name="adj" fmla="val 2215"/>
+            </a:avLst>
+          </a:prstGeom>
+          <a:solidFill>
+            <a:srgbClr val="F5F7FA"/>
+          </a:solidFill>
+          <a:ln w="12700">
+            <a:solidFill>
+              <a:srgbClr val="DDE2EA"/>
+            </a:solidFill>
+            <a:prstDash val="solid"/>
+          </a:ln>
+        </p:spPr>
+      </p:sp>
+      <p:sp>
+        <p:nvSpPr>
+          <p:cNvPr id="9" name="Text 7"/>
+          <p:cNvSpPr/>
+          <p:nvPr/>
+        </p:nvSpPr>
+        <p:spPr>
+          <a:xfrm>
+            <a:off x="6553048" y="1719072"/>
+            <a:ext cx="1828800" cy="256032"/>
+          </a:xfrm>
+          <a:prstGeom prst="rect">
+            <a:avLst/>
+          </a:prstGeom>
+          <a:noFill/>
+          <a:ln/>
+        </p:spPr>
+        <p:txBody>
+          <a:bodyPr wrap="square" lIns="0" tIns="0" rIns="0" bIns="0" rtlCol="0" anchor="t"/>
+          <a:lstStyle/>
+          <a:p>
+            <a:pPr algn="l" indent="0" marL="0">
+              <a:buNone/>
+            </a:pPr>
+            <a:r>
+              <a:rPr lang="en-US" sz="1100" b="1" spc="200" kern="0" dirty="0">
+                <a:solidFill>
+                  <a:srgbClr val="5B6472"/>
+                </a:solidFill>
+                <a:latin typeface="Segoe UI" pitchFamily="34" charset="0"/>
+                <a:ea typeface="Segoe UI" pitchFamily="34" charset="-122"/>
+                <a:cs typeface="Segoe UI" pitchFamily="34" charset="-120"/>
+              </a:rPr>
+              <a:t>ISN’T</a:t>
+            </a:r>
+            <a:endParaRPr lang="en-US" sz="1100" dirty="0"/>
+          </a:p>
+        </p:txBody>
+      </p:sp>
+      <p:sp>
+        <p:nvSpPr>
+          <p:cNvPr id="10" name="Text 8"/>
+          <p:cNvSpPr/>
+          <p:nvPr/>
+        </p:nvSpPr>
+        <p:spPr>
+          <a:xfrm>
+            <a:off x="6553048" y="2103120"/>
+            <a:ext cx="4797400" cy="2103120"/>
+          </a:xfrm>
+          <a:prstGeom prst="rect">
+            <a:avLst/>
+          </a:prstGeom>
+          <a:noFill/>
+          <a:ln/>
+        </p:spPr>
+        <p:txBody>
+          <a:bodyPr wrap="square" lIns="0" tIns="0" rIns="0" bIns="0" rtlCol="0" anchor="t"/>
+          <a:lstStyle/>
+          <a:p>
+            <a:pPr marL="342900" indent="-342900">
+              <a:lnSpc>
+                <a:spcPct val="150000"/>
+              </a:lnSpc>
+              <a:buSzPct val="100000"/>
+              <a:buChar char="×"/>
+            </a:pPr>
+            <a:r>
+              <a:rPr lang="en-US" sz="1350" dirty="0">
+                <a:solidFill>
+                  <a:srgbClr val="5B6472"/>
+                </a:solidFill>
+                <a:latin typeface="Segoe UI" pitchFamily="34" charset="0"/>
+                <a:ea typeface="Segoe UI" pitchFamily="34" charset="-122"/>
+                <a:cs typeface="Segoe UI" pitchFamily="34" charset="-120"/>
+              </a:rPr>
+              <a:t>on mainnet</a:t>
+            </a:r>
+            <a:endParaRPr lang="en-US" sz="1350" dirty="0"/>
+          </a:p>
+          <a:p>
+            <a:pPr marL="342900" indent="-342900">
+              <a:lnSpc>
+                <a:spcPct val="150000"/>
+              </a:lnSpc>
+              <a:buSzPct val="100000"/>
+              <a:buChar char="×"/>
+            </a:pPr>
+            <a:r>
+              <a:rPr lang="en-US" sz="1350" dirty="0">
+                <a:solidFill>
+                  <a:srgbClr val="5B6472"/>
+                </a:solidFill>
+                <a:latin typeface="Segoe UI" pitchFamily="34" charset="0"/>
+                <a:ea typeface="Segoe UI" pitchFamily="34" charset="-122"/>
+                <a:cs typeface="Segoe UI" pitchFamily="34" charset="-120"/>
+              </a:rPr>
+              <a:t>a change to your contract</a:t>
+            </a:r>
+            <a:endParaRPr lang="en-US" sz="1350" dirty="0"/>
+          </a:p>
+          <a:p>
+            <a:pPr marL="342900" indent="-342900">
+              <a:lnSpc>
+                <a:spcPct val="150000"/>
+              </a:lnSpc>
+              <a:buSzPct val="100000"/>
+              <a:buChar char="×"/>
+            </a:pPr>
+            <a:r>
+              <a:rPr lang="en-US" sz="1350" dirty="0">
+                <a:solidFill>
+                  <a:srgbClr val="5B6472"/>
+                </a:solidFill>
+                <a:latin typeface="Segoe UI" pitchFamily="34" charset="0"/>
+                <a:ea typeface="Segoe UI" pitchFamily="34" charset="-122"/>
+                <a:cs typeface="Segoe UI" pitchFamily="34" charset="-120"/>
+              </a:rPr>
+              <a:t>a fee path — conservation still holds</a:t>
+            </a:r>
+            <a:endParaRPr lang="en-US" sz="1350" dirty="0"/>
+          </a:p>
+          <a:p>
+            <a:pPr marL="342900" indent="-342900">
+              <a:lnSpc>
+                <a:spcPct val="150000"/>
+              </a:lnSpc>
+              <a:buSzPct val="100000"/>
+              <a:buChar char="×"/>
+            </a:pPr>
+            <a:r>
+              <a:rPr lang="en-US" sz="1350" dirty="0">
+                <a:solidFill>
+                  <a:srgbClr val="5B6472"/>
+                </a:solidFill>
+                <a:latin typeface="Segoe UI" pitchFamily="34" charset="0"/>
+                <a:ea typeface="Segoe UI" pitchFamily="34" charset="-122"/>
+                <a:cs typeface="Segoe UI" pitchFamily="34" charset="-120"/>
+              </a:rPr>
+              <a:t>a cut for your agent</a:t>
+            </a:r>
+            <a:endParaRPr lang="en-US" sz="1350" dirty="0"/>
+          </a:p>
+        </p:txBody>
+      </p:sp>
+      <p:sp>
+        <p:nvSpPr>
+          <p:cNvPr id="11" name="Shape 9"/>
+          <p:cNvSpPr/>
+          <p:nvPr/>
+        </p:nvSpPr>
+        <p:spPr>
+          <a:xfrm>
+            <a:off x="566928" y="4773168"/>
+            <a:ext cx="11057839" cy="1371600"/>
+          </a:xfrm>
+          <a:prstGeom prst="roundRect">
+            <a:avLst>
+              <a:gd name="adj" fmla="val 4667"/>
+            </a:avLst>
+          </a:prstGeom>
+          <a:solidFill>
+            <a:srgbClr val="EDF2FD"/>
+          </a:solidFill>
+          <a:ln w="12700">
+            <a:solidFill>
+              <a:srgbClr val="1A56DB"/>
+            </a:solidFill>
+            <a:prstDash val="solid"/>
+          </a:ln>
+        </p:spPr>
+      </p:sp>
+      <p:sp>
+        <p:nvSpPr>
+          <p:cNvPr id="12" name="Shape 10"/>
+          <p:cNvSpPr/>
+          <p:nvPr/>
+        </p:nvSpPr>
+        <p:spPr>
+          <a:xfrm>
+            <a:off x="566928" y="4773168"/>
+            <a:ext cx="54864" cy="1371600"/>
+          </a:xfrm>
+          <a:prstGeom prst="rect">
+            <a:avLst/>
+          </a:prstGeom>
+          <a:solidFill>
+            <a:srgbClr val="1A56DB"/>
+          </a:solidFill>
+          <a:ln w="12700">
+            <a:solidFill>
+              <a:srgbClr val="333333"/>
+            </a:solidFill>
+            <a:prstDash val="solid"/>
+          </a:ln>
+        </p:spPr>
+      </p:sp>
+      <p:sp>
+        <p:nvSpPr>
+          <p:cNvPr id="13" name="Text 11"/>
+          <p:cNvSpPr/>
+          <p:nvPr/>
+        </p:nvSpPr>
+        <p:spPr>
+          <a:xfrm>
+            <a:off x="877824" y="4974336"/>
+            <a:ext cx="10436047" cy="237744"/>
+          </a:xfrm>
+          <a:prstGeom prst="rect">
+            <a:avLst/>
+          </a:prstGeom>
+          <a:noFill/>
+          <a:ln/>
+        </p:spPr>
+        <p:txBody>
+          <a:bodyPr wrap="square" lIns="0" tIns="0" rIns="0" bIns="0" rtlCol="0" anchor="t"/>
+          <a:lstStyle/>
+          <a:p>
+            <a:pPr algn="l" indent="0" marL="0">
+              <a:buNone/>
+            </a:pPr>
+            <a:r>
+              <a:rPr lang="en-US" sz="950" b="1" spc="140" kern="0" dirty="0">
+                <a:solidFill>
+                  <a:srgbClr val="1A56DB"/>
+                </a:solidFill>
+                <a:latin typeface="Segoe UI" pitchFamily="34" charset="0"/>
+                <a:ea typeface="Segoe UI" pitchFamily="34" charset="-122"/>
+                <a:cs typeface="Segoe UI" pitchFamily="34" charset="-120"/>
+              </a:rPr>
+              <a:t>ONE PROPERTY TO WEIGH</a:t>
+            </a:r>
+            <a:endParaRPr lang="en-US" sz="950" dirty="0"/>
+          </a:p>
+        </p:txBody>
+      </p:sp>
+      <p:sp>
+        <p:nvSpPr>
+          <p:cNvPr id="14" name="Text 12"/>
+          <p:cNvSpPr/>
+          <p:nvPr/>
+        </p:nvSpPr>
+        <p:spPr>
+          <a:xfrm>
+            <a:off x="877824" y="5303520"/>
+            <a:ext cx="10436047" cy="329184"/>
+          </a:xfrm>
+          <a:prstGeom prst="rect">
+            <a:avLst/>
+          </a:prstGeom>
+          <a:noFill/>
+          <a:ln/>
+        </p:spPr>
+        <p:txBody>
+          <a:bodyPr wrap="square" lIns="0" tIns="0" rIns="0" bIns="0" rtlCol="0" anchor="t"/>
+          <a:lstStyle/>
+          <a:p>
+            <a:pPr algn="l" indent="0" marL="0">
+              <a:buNone/>
+            </a:pPr>
+            <a:r>
+              <a:rPr lang="en-US" sz="1600" b="1" dirty="0">
+                <a:solidFill>
+                  <a:srgbClr val="12161F"/>
+                </a:solidFill>
+                <a:latin typeface="Segoe UI" pitchFamily="34" charset="0"/>
+                <a:ea typeface="Segoe UI" pitchFamily="34" charset="-122"/>
+                <a:cs typeface="Segoe UI" pitchFamily="34" charset="-120"/>
+              </a:rPr>
+              <a:t>Two compromised seats on page 2 could settle without you.</a:t>
+            </a:r>
+            <a:endParaRPr lang="en-US" sz="1600" dirty="0"/>
+          </a:p>
+        </p:txBody>
+      </p:sp>
+      <p:sp>
+        <p:nvSpPr>
+          <p:cNvPr id="15" name="Text 13"/>
+          <p:cNvSpPr/>
+          <p:nvPr/>
+        </p:nvSpPr>
+        <p:spPr>
+          <a:xfrm>
+            <a:off x="877824" y="5687568"/>
+            <a:ext cx="10436047" cy="310896"/>
+          </a:xfrm>
+          <a:prstGeom prst="rect">
+            <a:avLst/>
+          </a:prstGeom>
+          <a:noFill/>
+          <a:ln/>
+        </p:spPr>
+        <p:txBody>
+          <a:bodyPr wrap="square" lIns="0" tIns="0" rIns="0" bIns="0" rtlCol="0" anchor="t"/>
+          <a:lstStyle/>
+          <a:p>
+            <a:pPr algn="l" indent="0" marL="0">
+              <a:buNone/>
+            </a:pPr>
+            <a:r>
+              <a:rPr lang="en-US" sz="1250" dirty="0">
+                <a:solidFill>
+                  <a:srgbClr val="5B6472"/>
+                </a:solidFill>
+                <a:latin typeface="Segoe UI" pitchFamily="34" charset="0"/>
+                <a:ea typeface="Segoe UI" pitchFamily="34" charset="-122"/>
+                <a:cs typeface="Segoe UI" pitchFamily="34" charset="-120"/>
+              </a:rPr>
+              <a:t>Guards: your policy rules, and your power to rewrite page 2.</a:t>
+            </a:r>
+            <a:endParaRPr lang="en-US" sz="1250" dirty="0"/>
+          </a:p>
+        </p:txBody>
+      </p:sp>
     </p:spTree>
   </p:cSld>
   <p:clrMapOvr>
